--- a/delivery/ppt_slides/CS6493_Math_Reasoning_Presentation.pptx
+++ b/delivery/ppt_slides/CS6493_Math_Reasoning_Presentation.pptx
@@ -187,22 +187,22 @@
                 <c:formatCode>General</c:formatCode>
                 <c:ptCount val="6"/>
                 <c:pt idx="0">
-                  <c:v>0.5112</c:v>
+                  <c:v>0.5112007569363879</c:v>
                 </c:pt>
                 <c:pt idx="1">
-                  <c:v>0.4996</c:v>
+                  <c:v>0.4996375105460599</c:v>
                 </c:pt>
                 <c:pt idx="2">
-                  <c:v>0.5766</c:v>
+                  <c:v>0.5766291429931889</c:v>
                 </c:pt>
                 <c:pt idx="3">
-                  <c:v>0.5214</c:v>
+                  <c:v>0.5213820167983818</c:v>
                 </c:pt>
                 <c:pt idx="4">
-                  <c:v>0.6955</c:v>
+                  <c:v>0.6955189210712173</c:v>
                 </c:pt>
                 <c:pt idx="5">
-                  <c:v>0.714</c:v>
+                  <c:v>0.7139959100438581</c:v>
                 </c:pt>
               </c:numCache>
             </c:numRef>
@@ -260,22 +260,22 @@
                 <c:formatCode>General</c:formatCode>
                 <c:ptCount val="6"/>
                 <c:pt idx="0">
-                  <c:v>0.5176</c:v>
+                  <c:v>0.5175864218945031</c:v>
                 </c:pt>
                 <c:pt idx="1">
-                  <c:v>0.4604</c:v>
+                  <c:v>0.4604277979075689</c:v>
                 </c:pt>
                 <c:pt idx="2">
-                  <c:v>0.4726</c:v>
+                  <c:v>0.47261278155562825</c:v>
                 </c:pt>
                 <c:pt idx="3">
-                  <c:v>0.4789</c:v>
+                  <c:v>0.4788811292355391</c:v>
                 </c:pt>
                 <c:pt idx="4">
-                  <c:v>0.657</c:v>
+                  <c:v>0.657011075472665</c:v>
                 </c:pt>
                 <c:pt idx="5">
-                  <c:v>0.6681</c:v>
+                  <c:v>0.66807454824902</c:v>
                 </c:pt>
               </c:numCache>
             </c:numRef>
@@ -3988,6 +3988,242 @@
           </a:p>
         </p:txBody>
       </p:sp>
+      <p:sp>
+        <p:nvSpPr>
+          <p:cNvPr id="18" name="Rectangle 17"/>
+          <p:cNvSpPr/>
+          <p:nvPr/>
+        </p:nvSpPr>
+        <p:spPr>
+          <a:xfrm>
+            <a:off x="694944" y="5650992"/>
+            <a:ext cx="10771632" cy="548640"/>
+          </a:xfrm>
+          <a:prstGeom prst="rect">
+            <a:avLst/>
+          </a:prstGeom>
+          <a:solidFill>
+            <a:srgbClr val="FFFFFF"/>
+          </a:solidFill>
+          <a:ln>
+            <a:solidFill>
+              <a:srgbClr val="CED6E3"/>
+            </a:solidFill>
+          </a:ln>
+        </p:spPr>
+        <p:style>
+          <a:lnRef idx="1">
+            <a:schemeClr val="accent1"/>
+          </a:lnRef>
+          <a:fillRef idx="3">
+            <a:schemeClr val="accent1"/>
+          </a:fillRef>
+          <a:effectRef idx="2">
+            <a:schemeClr val="accent1"/>
+          </a:effectRef>
+          <a:fontRef idx="minor">
+            <a:schemeClr val="lt1"/>
+          </a:fontRef>
+        </p:style>
+        <p:txBody>
+          <a:bodyPr rtlCol="0" anchor="ctr"/>
+          <a:lstStyle/>
+          <a:p>
+            <a:pPr algn="ctr"/>
+          </a:p>
+        </p:txBody>
+      </p:sp>
+      <p:sp>
+        <p:nvSpPr>
+          <p:cNvPr id="19" name="Rectangle 18"/>
+          <p:cNvSpPr/>
+          <p:nvPr/>
+        </p:nvSpPr>
+        <p:spPr>
+          <a:xfrm>
+            <a:off x="694944" y="5650992"/>
+            <a:ext cx="54864" cy="548640"/>
+          </a:xfrm>
+          <a:prstGeom prst="rect">
+            <a:avLst/>
+          </a:prstGeom>
+          <a:solidFill>
+            <a:srgbClr val="1E5B9E"/>
+          </a:solidFill>
+          <a:ln>
+            <a:noFill/>
+          </a:ln>
+        </p:spPr>
+        <p:style>
+          <a:lnRef idx="1">
+            <a:schemeClr val="accent1"/>
+          </a:lnRef>
+          <a:fillRef idx="3">
+            <a:schemeClr val="accent1"/>
+          </a:fillRef>
+          <a:effectRef idx="2">
+            <a:schemeClr val="accent1"/>
+          </a:effectRef>
+          <a:fontRef idx="minor">
+            <a:schemeClr val="lt1"/>
+          </a:fontRef>
+        </p:style>
+        <p:txBody>
+          <a:bodyPr rtlCol="0" anchor="ctr"/>
+          <a:lstStyle/>
+          <a:p>
+            <a:pPr algn="ctr"/>
+          </a:p>
+        </p:txBody>
+      </p:sp>
+      <p:sp>
+        <p:nvSpPr>
+          <p:cNvPr id="20" name="Rounded Rectangle 19"/>
+          <p:cNvSpPr/>
+          <p:nvPr/>
+        </p:nvSpPr>
+        <p:spPr>
+          <a:xfrm>
+            <a:off x="841248" y="5733288"/>
+            <a:ext cx="1325880" cy="146304"/>
+          </a:xfrm>
+          <a:prstGeom prst="roundRect">
+            <a:avLst/>
+          </a:prstGeom>
+          <a:solidFill>
+            <a:srgbClr val="EAF2FF"/>
+          </a:solidFill>
+          <a:ln>
+            <a:noFill/>
+          </a:ln>
+        </p:spPr>
+        <p:style>
+          <a:lnRef idx="1">
+            <a:schemeClr val="accent1"/>
+          </a:lnRef>
+          <a:fillRef idx="3">
+            <a:schemeClr val="accent1"/>
+          </a:fillRef>
+          <a:effectRef idx="2">
+            <a:schemeClr val="accent1"/>
+          </a:effectRef>
+          <a:fontRef idx="minor">
+            <a:schemeClr val="lt1"/>
+          </a:fontRef>
+        </p:style>
+        <p:txBody>
+          <a:bodyPr rtlCol="0" anchor="ctr"/>
+          <a:lstStyle/>
+          <a:p>
+            <a:pPr algn="ctr"/>
+          </a:p>
+        </p:txBody>
+      </p:sp>
+      <p:sp>
+        <p:nvSpPr>
+          <p:cNvPr id="21" name="TextBox 20"/>
+          <p:cNvSpPr txBox="1"/>
+          <p:nvPr/>
+        </p:nvSpPr>
+        <p:spPr>
+          <a:xfrm>
+            <a:off x="896112" y="5765292"/>
+            <a:ext cx="1170432" cy="73152"/>
+          </a:xfrm>
+          <a:prstGeom prst="rect">
+            <a:avLst/>
+          </a:prstGeom>
+          <a:noFill/>
+        </p:spPr>
+        <p:txBody>
+          <a:bodyPr wrap="square" lIns="36576" rIns="36576" tIns="18288" bIns="18288" anchor="t">
+            <a:spAutoFit/>
+          </a:bodyPr>
+          <a:lstStyle/>
+          <a:p>
+            <a:pPr algn="ctr"/>
+            <a:r>
+              <a:rPr sz="600" b="1">
+                <a:solidFill>
+                  <a:srgbClr val="1E5B9E"/>
+                </a:solidFill>
+                <a:latin typeface="Courier New"/>
+              </a:rPr>
+              <a:t>CORE CLAIM</a:t>
+            </a:r>
+          </a:p>
+        </p:txBody>
+      </p:sp>
+      <p:sp>
+        <p:nvSpPr>
+          <p:cNvPr id="22" name="TextBox 21"/>
+          <p:cNvSpPr txBox="1"/>
+          <p:nvPr/>
+        </p:nvSpPr>
+        <p:spPr>
+          <a:xfrm>
+            <a:off x="9985248" y="5765292"/>
+            <a:ext cx="1097280" cy="73152"/>
+          </a:xfrm>
+          <a:prstGeom prst="rect">
+            <a:avLst/>
+          </a:prstGeom>
+          <a:noFill/>
+        </p:spPr>
+        <p:txBody>
+          <a:bodyPr wrap="square" lIns="36576" rIns="36576" tIns="18288" bIns="18288" anchor="t">
+            <a:spAutoFit/>
+          </a:bodyPr>
+          <a:lstStyle/>
+          <a:p>
+            <a:pPr algn="r"/>
+            <a:r>
+              <a:rPr sz="600" b="1">
+                <a:solidFill>
+                  <a:srgbClr val="647084"/>
+                </a:solidFill>
+                <a:latin typeface="Courier New"/>
+              </a:rPr>
+              <a:t>PROJECT</a:t>
+            </a:r>
+          </a:p>
+        </p:txBody>
+      </p:sp>
+      <p:sp>
+        <p:nvSpPr>
+          <p:cNvPr id="23" name="TextBox 22"/>
+          <p:cNvSpPr txBox="1"/>
+          <p:nvPr/>
+        </p:nvSpPr>
+        <p:spPr>
+          <a:xfrm>
+            <a:off x="841248" y="5925312"/>
+            <a:ext cx="10296144" cy="146304"/>
+          </a:xfrm>
+          <a:prstGeom prst="rect">
+            <a:avLst/>
+          </a:prstGeom>
+          <a:noFill/>
+        </p:spPr>
+        <p:txBody>
+          <a:bodyPr wrap="square" lIns="36576" rIns="36576" tIns="18288" bIns="18288" anchor="t">
+            <a:spAutoFit/>
+          </a:bodyPr>
+          <a:lstStyle/>
+          <a:p>
+            <a:pPr algn="l"/>
+            <a:r>
+              <a:rPr sz="700" b="0">
+                <a:solidFill>
+                  <a:srgbClr val="344256"/>
+                </a:solidFill>
+                <a:latin typeface="Arial"/>
+              </a:rPr>
+              <a:t>This presentation studies mathematical reasoning as a complete solving behavior. The main contribution is a fair comparison of prompt-only designs and a behavior-aware score that makes hidden reasoning cost explicit.</a:t>
+            </a:r>
+          </a:p>
+        </p:txBody>
+      </p:sp>
     </p:spTree>
   </p:cSld>
   <p:clrMapOvr>
@@ -5020,6 +5256,242 @@
         </p:nvSpPr>
         <p:spPr>
           <a:xfrm>
+            <a:off x="694944" y="5650992"/>
+            <a:ext cx="10771632" cy="548640"/>
+          </a:xfrm>
+          <a:prstGeom prst="rect">
+            <a:avLst/>
+          </a:prstGeom>
+          <a:solidFill>
+            <a:srgbClr val="FFFFFF"/>
+          </a:solidFill>
+          <a:ln>
+            <a:solidFill>
+              <a:srgbClr val="CED6E3"/>
+            </a:solidFill>
+          </a:ln>
+        </p:spPr>
+        <p:style>
+          <a:lnRef idx="1">
+            <a:schemeClr val="accent1"/>
+          </a:lnRef>
+          <a:fillRef idx="3">
+            <a:schemeClr val="accent1"/>
+          </a:fillRef>
+          <a:effectRef idx="2">
+            <a:schemeClr val="accent1"/>
+          </a:effectRef>
+          <a:fontRef idx="minor">
+            <a:schemeClr val="lt1"/>
+          </a:fontRef>
+        </p:style>
+        <p:txBody>
+          <a:bodyPr rtlCol="0" anchor="ctr"/>
+          <a:lstStyle/>
+          <a:p>
+            <a:pPr algn="ctr"/>
+          </a:p>
+        </p:txBody>
+      </p:sp>
+      <p:sp>
+        <p:nvSpPr>
+          <p:cNvPr id="29" name="Rectangle 28"/>
+          <p:cNvSpPr/>
+          <p:nvPr/>
+        </p:nvSpPr>
+        <p:spPr>
+          <a:xfrm>
+            <a:off x="694944" y="5650992"/>
+            <a:ext cx="54864" cy="548640"/>
+          </a:xfrm>
+          <a:prstGeom prst="rect">
+            <a:avLst/>
+          </a:prstGeom>
+          <a:solidFill>
+            <a:srgbClr val="B7791F"/>
+          </a:solidFill>
+          <a:ln>
+            <a:noFill/>
+          </a:ln>
+        </p:spPr>
+        <p:style>
+          <a:lnRef idx="1">
+            <a:schemeClr val="accent1"/>
+          </a:lnRef>
+          <a:fillRef idx="3">
+            <a:schemeClr val="accent1"/>
+          </a:fillRef>
+          <a:effectRef idx="2">
+            <a:schemeClr val="accent1"/>
+          </a:effectRef>
+          <a:fontRef idx="minor">
+            <a:schemeClr val="lt1"/>
+          </a:fontRef>
+        </p:style>
+        <p:txBody>
+          <a:bodyPr rtlCol="0" anchor="ctr"/>
+          <a:lstStyle/>
+          <a:p>
+            <a:pPr algn="ctr"/>
+          </a:p>
+        </p:txBody>
+      </p:sp>
+      <p:sp>
+        <p:nvSpPr>
+          <p:cNvPr id="30" name="Rounded Rectangle 29"/>
+          <p:cNvSpPr/>
+          <p:nvPr/>
+        </p:nvSpPr>
+        <p:spPr>
+          <a:xfrm>
+            <a:off x="841248" y="5733288"/>
+            <a:ext cx="1325880" cy="146304"/>
+          </a:xfrm>
+          <a:prstGeom prst="roundRect">
+            <a:avLst/>
+          </a:prstGeom>
+          <a:solidFill>
+            <a:srgbClr val="FFF3D6"/>
+          </a:solidFill>
+          <a:ln>
+            <a:noFill/>
+          </a:ln>
+        </p:spPr>
+        <p:style>
+          <a:lnRef idx="1">
+            <a:schemeClr val="accent1"/>
+          </a:lnRef>
+          <a:fillRef idx="3">
+            <a:schemeClr val="accent1"/>
+          </a:fillRef>
+          <a:effectRef idx="2">
+            <a:schemeClr val="accent1"/>
+          </a:effectRef>
+          <a:fontRef idx="minor">
+            <a:schemeClr val="lt1"/>
+          </a:fontRef>
+        </p:style>
+        <p:txBody>
+          <a:bodyPr rtlCol="0" anchor="ctr"/>
+          <a:lstStyle/>
+          <a:p>
+            <a:pPr algn="ctr"/>
+          </a:p>
+        </p:txBody>
+      </p:sp>
+      <p:sp>
+        <p:nvSpPr>
+          <p:cNvPr id="31" name="TextBox 30"/>
+          <p:cNvSpPr txBox="1"/>
+          <p:nvPr/>
+        </p:nvSpPr>
+        <p:spPr>
+          <a:xfrm>
+            <a:off x="896112" y="5765292"/>
+            <a:ext cx="1170432" cy="73152"/>
+          </a:xfrm>
+          <a:prstGeom prst="rect">
+            <a:avLst/>
+          </a:prstGeom>
+          <a:noFill/>
+        </p:spPr>
+        <p:txBody>
+          <a:bodyPr wrap="square" lIns="36576" rIns="36576" tIns="18288" bIns="18288" anchor="t">
+            <a:spAutoFit/>
+          </a:bodyPr>
+          <a:lstStyle/>
+          <a:p>
+            <a:pPr algn="ctr"/>
+            <a:r>
+              <a:rPr sz="600" b="1">
+                <a:solidFill>
+                  <a:srgbClr val="B7791F"/>
+                </a:solidFill>
+                <a:latin typeface="Courier New"/>
+              </a:rPr>
+              <a:t>AGENTIC ANGLE</a:t>
+            </a:r>
+          </a:p>
+        </p:txBody>
+      </p:sp>
+      <p:sp>
+        <p:nvSpPr>
+          <p:cNvPr id="32" name="TextBox 31"/>
+          <p:cNvSpPr txBox="1"/>
+          <p:nvPr/>
+        </p:nvSpPr>
+        <p:spPr>
+          <a:xfrm>
+            <a:off x="9985248" y="5765292"/>
+            <a:ext cx="1097280" cy="73152"/>
+          </a:xfrm>
+          <a:prstGeom prst="rect">
+            <a:avLst/>
+          </a:prstGeom>
+          <a:noFill/>
+        </p:spPr>
+        <p:txBody>
+          <a:bodyPr wrap="square" lIns="36576" rIns="36576" tIns="18288" bIns="18288" anchor="t">
+            <a:spAutoFit/>
+          </a:bodyPr>
+          <a:lstStyle/>
+          <a:p>
+            <a:pPr algn="r"/>
+            <a:r>
+              <a:rPr sz="600" b="1">
+                <a:solidFill>
+                  <a:srgbClr val="647084"/>
+                </a:solidFill>
+                <a:latin typeface="Courier New"/>
+              </a:rPr>
+              <a:t>REASONING</a:t>
+            </a:r>
+          </a:p>
+        </p:txBody>
+      </p:sp>
+      <p:sp>
+        <p:nvSpPr>
+          <p:cNvPr id="33" name="TextBox 32"/>
+          <p:cNvSpPr txBox="1"/>
+          <p:nvPr/>
+        </p:nvSpPr>
+        <p:spPr>
+          <a:xfrm>
+            <a:off x="841248" y="5925312"/>
+            <a:ext cx="10296144" cy="146304"/>
+          </a:xfrm>
+          <a:prstGeom prst="rect">
+            <a:avLst/>
+          </a:prstGeom>
+          <a:noFill/>
+        </p:spPr>
+        <p:txBody>
+          <a:bodyPr wrap="square" lIns="36576" rIns="36576" tIns="18288" bIns="18288" anchor="t">
+            <a:spAutoFit/>
+          </a:bodyPr>
+          <a:lstStyle/>
+          <a:p>
+            <a:pPr algn="l"/>
+            <a:r>
+              <a:rPr sz="700" b="0">
+                <a:solidFill>
+                  <a:srgbClr val="344256"/>
+                </a:solidFill>
+                <a:latin typeface="Arial"/>
+              </a:rPr>
+              <a:t>TIR is framed as a small agentic extension. Its value is not merely higher score, but the ability to externalize exact computation and feed the observation back into reasoning.</a:t>
+            </a:r>
+          </a:p>
+        </p:txBody>
+      </p:sp>
+      <p:sp>
+        <p:nvSpPr>
+          <p:cNvPr id="34" name="Rectangle 33"/>
+          <p:cNvSpPr/>
+          <p:nvPr/>
+        </p:nvSpPr>
+        <p:spPr>
+          <a:xfrm>
             <a:off x="658368" y="6355080"/>
             <a:ext cx="10607040" cy="9144"/>
           </a:xfrm>
@@ -5057,7 +5529,7 @@
       </p:sp>
       <p:sp>
         <p:nvSpPr>
-          <p:cNvPr id="29" name="TextBox 28"/>
+          <p:cNvPr id="35" name="TextBox 34"/>
           <p:cNvSpPr txBox="1"/>
           <p:nvPr/>
         </p:nvSpPr>
@@ -5302,7 +5774,7 @@
                 </a:solidFill>
                 <a:latin typeface="Georgia"/>
               </a:rPr>
-              <a:t>Why a single metric view is misleading</a:t>
+              <a:t>Single metrics hide different failure modes</a:t>
             </a:r>
           </a:p>
         </p:txBody>
@@ -5337,7 +5809,7 @@
                 </a:solidFill>
                 <a:latin typeface="Arial"/>
               </a:rPr>
-              <a:t>The project requirement mentions accuracy and response length; multi-stage methods make that separation tricky.</a:t>
+              <a:t>Once methods become multi-stage, accuracy and length stop telling the same story.</a:t>
             </a:r>
           </a:p>
         </p:txBody>
@@ -5824,6 +6296,242 @@
         </p:nvSpPr>
         <p:spPr>
           <a:xfrm>
+            <a:off x="694944" y="5650992"/>
+            <a:ext cx="10771632" cy="548640"/>
+          </a:xfrm>
+          <a:prstGeom prst="rect">
+            <a:avLst/>
+          </a:prstGeom>
+          <a:solidFill>
+            <a:srgbClr val="FFFFFF"/>
+          </a:solidFill>
+          <a:ln>
+            <a:solidFill>
+              <a:srgbClr val="CED6E3"/>
+            </a:solidFill>
+          </a:ln>
+        </p:spPr>
+        <p:style>
+          <a:lnRef idx="1">
+            <a:schemeClr val="accent1"/>
+          </a:lnRef>
+          <a:fillRef idx="3">
+            <a:schemeClr val="accent1"/>
+          </a:fillRef>
+          <a:effectRef idx="2">
+            <a:schemeClr val="accent1"/>
+          </a:effectRef>
+          <a:fontRef idx="minor">
+            <a:schemeClr val="lt1"/>
+          </a:fontRef>
+        </p:style>
+        <p:txBody>
+          <a:bodyPr rtlCol="0" anchor="ctr"/>
+          <a:lstStyle/>
+          <a:p>
+            <a:pPr algn="ctr"/>
+          </a:p>
+        </p:txBody>
+      </p:sp>
+      <p:sp>
+        <p:nvSpPr>
+          <p:cNvPr id="21" name="Rectangle 20"/>
+          <p:cNvSpPr/>
+          <p:nvPr/>
+        </p:nvSpPr>
+        <p:spPr>
+          <a:xfrm>
+            <a:off x="694944" y="5650992"/>
+            <a:ext cx="54864" cy="548640"/>
+          </a:xfrm>
+          <a:prstGeom prst="rect">
+            <a:avLst/>
+          </a:prstGeom>
+          <a:solidFill>
+            <a:srgbClr val="0F766E"/>
+          </a:solidFill>
+          <a:ln>
+            <a:noFill/>
+          </a:ln>
+        </p:spPr>
+        <p:style>
+          <a:lnRef idx="1">
+            <a:schemeClr val="accent1"/>
+          </a:lnRef>
+          <a:fillRef idx="3">
+            <a:schemeClr val="accent1"/>
+          </a:fillRef>
+          <a:effectRef idx="2">
+            <a:schemeClr val="accent1"/>
+          </a:effectRef>
+          <a:fontRef idx="minor">
+            <a:schemeClr val="lt1"/>
+          </a:fontRef>
+        </p:style>
+        <p:txBody>
+          <a:bodyPr rtlCol="0" anchor="ctr"/>
+          <a:lstStyle/>
+          <a:p>
+            <a:pPr algn="ctr"/>
+          </a:p>
+        </p:txBody>
+      </p:sp>
+      <p:sp>
+        <p:nvSpPr>
+          <p:cNvPr id="22" name="Rounded Rectangle 21"/>
+          <p:cNvSpPr/>
+          <p:nvPr/>
+        </p:nvSpPr>
+        <p:spPr>
+          <a:xfrm>
+            <a:off x="841248" y="5733288"/>
+            <a:ext cx="1325880" cy="146304"/>
+          </a:xfrm>
+          <a:prstGeom prst="roundRect">
+            <a:avLst/>
+          </a:prstGeom>
+          <a:solidFill>
+            <a:srgbClr val="E7F6F4"/>
+          </a:solidFill>
+          <a:ln>
+            <a:noFill/>
+          </a:ln>
+        </p:spPr>
+        <p:style>
+          <a:lnRef idx="1">
+            <a:schemeClr val="accent1"/>
+          </a:lnRef>
+          <a:fillRef idx="3">
+            <a:schemeClr val="accent1"/>
+          </a:fillRef>
+          <a:effectRef idx="2">
+            <a:schemeClr val="accent1"/>
+          </a:effectRef>
+          <a:fontRef idx="minor">
+            <a:schemeClr val="lt1"/>
+          </a:fontRef>
+        </p:style>
+        <p:txBody>
+          <a:bodyPr rtlCol="0" anchor="ctr"/>
+          <a:lstStyle/>
+          <a:p>
+            <a:pPr algn="ctr"/>
+          </a:p>
+        </p:txBody>
+      </p:sp>
+      <p:sp>
+        <p:nvSpPr>
+          <p:cNvPr id="23" name="TextBox 22"/>
+          <p:cNvSpPr txBox="1"/>
+          <p:nvPr/>
+        </p:nvSpPr>
+        <p:spPr>
+          <a:xfrm>
+            <a:off x="896112" y="5765292"/>
+            <a:ext cx="1170432" cy="73152"/>
+          </a:xfrm>
+          <a:prstGeom prst="rect">
+            <a:avLst/>
+          </a:prstGeom>
+          <a:noFill/>
+        </p:spPr>
+        <p:txBody>
+          <a:bodyPr wrap="square" lIns="36576" rIns="36576" tIns="18288" bIns="18288" anchor="t">
+            <a:spAutoFit/>
+          </a:bodyPr>
+          <a:lstStyle/>
+          <a:p>
+            <a:pPr algn="ctr"/>
+            <a:r>
+              <a:rPr sz="600" b="1">
+                <a:solidFill>
+                  <a:srgbClr val="0F766E"/>
+                </a:solidFill>
+                <a:latin typeface="Courier New"/>
+              </a:rPr>
+              <a:t>METRIC LOGIC</a:t>
+            </a:r>
+          </a:p>
+        </p:txBody>
+      </p:sp>
+      <p:sp>
+        <p:nvSpPr>
+          <p:cNvPr id="24" name="TextBox 23"/>
+          <p:cNvSpPr txBox="1"/>
+          <p:nvPr/>
+        </p:nvSpPr>
+        <p:spPr>
+          <a:xfrm>
+            <a:off x="9985248" y="5765292"/>
+            <a:ext cx="1097280" cy="73152"/>
+          </a:xfrm>
+          <a:prstGeom prst="rect">
+            <a:avLst/>
+          </a:prstGeom>
+          <a:noFill/>
+        </p:spPr>
+        <p:txBody>
+          <a:bodyPr wrap="square" lIns="36576" rIns="36576" tIns="18288" bIns="18288" anchor="t">
+            <a:spAutoFit/>
+          </a:bodyPr>
+          <a:lstStyle/>
+          <a:p>
+            <a:pPr algn="r"/>
+            <a:r>
+              <a:rPr sz="600" b="1">
+                <a:solidFill>
+                  <a:srgbClr val="647084"/>
+                </a:solidFill>
+                <a:latin typeface="Courier New"/>
+              </a:rPr>
+              <a:t>EVALUATION</a:t>
+            </a:r>
+          </a:p>
+        </p:txBody>
+      </p:sp>
+      <p:sp>
+        <p:nvSpPr>
+          <p:cNvPr id="25" name="TextBox 24"/>
+          <p:cNvSpPr txBox="1"/>
+          <p:nvPr/>
+        </p:nvSpPr>
+        <p:spPr>
+          <a:xfrm>
+            <a:off x="841248" y="5925312"/>
+            <a:ext cx="10296144" cy="146304"/>
+          </a:xfrm>
+          <a:prstGeom prst="rect">
+            <a:avLst/>
+          </a:prstGeom>
+          <a:noFill/>
+        </p:spPr>
+        <p:txBody>
+          <a:bodyPr wrap="square" lIns="36576" rIns="36576" tIns="18288" bIns="18288" anchor="t">
+            <a:spAutoFit/>
+          </a:bodyPr>
+          <a:lstStyle/>
+          <a:p>
+            <a:pPr algn="l"/>
+            <a:r>
+              <a:rPr sz="700" b="0">
+                <a:solidFill>
+                  <a:srgbClr val="344256"/>
+                </a:solidFill>
+                <a:latin typeface="Arial"/>
+              </a:rPr>
+              <a:t>Accuracy, final length, and total length each miss part of the story when used alone. The designed metric keeps accuracy central while exposing the cost and stability of the reasoning path.</a:t>
+            </a:r>
+          </a:p>
+        </p:txBody>
+      </p:sp>
+      <p:sp>
+        <p:nvSpPr>
+          <p:cNvPr id="26" name="Rectangle 25"/>
+          <p:cNvSpPr/>
+          <p:nvPr/>
+        </p:nvSpPr>
+        <p:spPr>
+          <a:xfrm>
             <a:off x="658368" y="6355080"/>
             <a:ext cx="10607040" cy="9144"/>
           </a:xfrm>
@@ -5861,7 +6569,7 @@
       </p:sp>
       <p:sp>
         <p:nvSpPr>
-          <p:cNvPr id="21" name="TextBox 20"/>
+          <p:cNvPr id="27" name="TextBox 26"/>
           <p:cNvSpPr txBox="1"/>
           <p:nvPr/>
         </p:nvSpPr>
@@ -6141,7 +6849,7 @@
                 </a:solidFill>
                 <a:latin typeface="Arial"/>
               </a:rPr>
-              <a:t>Incorrect answers still receive zero, so short wrong answers cannot outrank long correct ones.</a:t>
+              <a:t>The formula itself is part of the contribution, so it is rendered explicitly instead of being described only in prose.</a:t>
             </a:r>
           </a:p>
         </p:txBody>
@@ -6154,8 +6862,8 @@
         </p:nvSpPr>
         <p:spPr>
           <a:xfrm>
-            <a:off x="914400" y="1938528"/>
-            <a:ext cx="10058400" cy="2514600"/>
+            <a:off x="914400" y="1865376"/>
+            <a:ext cx="10058400" cy="3127248"/>
           </a:xfrm>
           <a:prstGeom prst="rect">
             <a:avLst/>
@@ -6199,8 +6907,8 @@
         </p:nvSpPr>
         <p:spPr>
           <a:xfrm>
-            <a:off x="1234440" y="2249424"/>
-            <a:ext cx="9418320" cy="438912"/>
+            <a:off x="1234440" y="2066543"/>
+            <a:ext cx="9418320" cy="658368"/>
           </a:xfrm>
           <a:prstGeom prst="rect">
             <a:avLst/>
@@ -6238,14 +6946,57 @@
       </p:sp>
       <p:sp>
         <p:nvSpPr>
-          <p:cNvPr id="10" name="TextBox 9"/>
-          <p:cNvSpPr txBox="1"/>
-          <p:nvPr/>
-        </p:nvSpPr>
-        <p:spPr>
-          <a:xfrm>
-            <a:off x="1426464" y="2359152"/>
-            <a:ext cx="9015984" cy="201168"/>
+          <p:cNvPr id="10" name="Rectangle 9"/>
+          <p:cNvSpPr/>
+          <p:nvPr/>
+        </p:nvSpPr>
+        <p:spPr>
+          <a:xfrm>
+            <a:off x="1234440" y="2066543"/>
+            <a:ext cx="54864" cy="658368"/>
+          </a:xfrm>
+          <a:prstGeom prst="rect">
+            <a:avLst/>
+          </a:prstGeom>
+          <a:solidFill>
+            <a:srgbClr val="1E5B9E"/>
+          </a:solidFill>
+          <a:ln>
+            <a:noFill/>
+          </a:ln>
+        </p:spPr>
+        <p:style>
+          <a:lnRef idx="1">
+            <a:schemeClr val="accent1"/>
+          </a:lnRef>
+          <a:fillRef idx="3">
+            <a:schemeClr val="accent1"/>
+          </a:fillRef>
+          <a:effectRef idx="2">
+            <a:schemeClr val="accent1"/>
+          </a:effectRef>
+          <a:fontRef idx="minor">
+            <a:schemeClr val="lt1"/>
+          </a:fontRef>
+        </p:style>
+        <p:txBody>
+          <a:bodyPr rtlCol="0" anchor="ctr"/>
+          <a:lstStyle/>
+          <a:p>
+            <a:pPr algn="ctr"/>
+          </a:p>
+        </p:txBody>
+      </p:sp>
+      <p:sp>
+        <p:nvSpPr>
+          <p:cNvPr id="11" name="TextBox 10"/>
+          <p:cNvSpPr txBox="1"/>
+          <p:nvPr/>
+        </p:nvSpPr>
+        <p:spPr>
+          <a:xfrm>
+            <a:off x="1444752" y="2167127"/>
+            <a:ext cx="9015984" cy="219456"/>
           </a:xfrm>
           <a:prstGeom prst="rect">
             <a:avLst/>
@@ -6260,27 +7011,62 @@
           <a:p>
             <a:pPr algn="l"/>
             <a:r>
-              <a:rPr sz="1600" b="1">
+              <a:rPr sz="1700" b="1">
                 <a:solidFill>
                   <a:srgbClr val="18212F"/>
                 </a:solidFill>
-                <a:latin typeface="Courier New"/>
-              </a:rPr>
-              <a:t>efficiency_i = answer_i^0.5 x length_i^0.3 x reflection_i^0.2</a:t>
-            </a:r>
-          </a:p>
-        </p:txBody>
-      </p:sp>
-      <p:sp>
-        <p:nvSpPr>
-          <p:cNvPr id="11" name="Rectangle 10"/>
+                <a:latin typeface="Georgia"/>
+              </a:rPr>
+              <a:t>η_i = a_i^0.5 · ℓ_i^0.3 · r_i^0.2</a:t>
+            </a:r>
+          </a:p>
+        </p:txBody>
+      </p:sp>
+      <p:sp>
+        <p:nvSpPr>
+          <p:cNvPr id="12" name="TextBox 11"/>
+          <p:cNvSpPr txBox="1"/>
+          <p:nvPr/>
+        </p:nvSpPr>
+        <p:spPr>
+          <a:xfrm>
+            <a:off x="1444752" y="2459736"/>
+            <a:ext cx="9015984" cy="182880"/>
+          </a:xfrm>
+          <a:prstGeom prst="rect">
+            <a:avLst/>
+          </a:prstGeom>
+          <a:noFill/>
+        </p:spPr>
+        <p:txBody>
+          <a:bodyPr wrap="square" lIns="36576" rIns="36576" tIns="18288" bIns="18288" anchor="t">
+            <a:spAutoFit/>
+          </a:bodyPr>
+          <a:lstStyle/>
+          <a:p>
+            <a:pPr algn="l"/>
+            <a:r>
+              <a:rPr sz="800" b="0">
+                <a:solidFill>
+                  <a:srgbClr val="647084"/>
+                </a:solidFill>
+                <a:latin typeface="Arial"/>
+              </a:rPr>
+              <a:t>Efficiency is a weighted geometric mean of answer stability, length economy, and reflection control.</a:t>
+            </a:r>
+          </a:p>
+        </p:txBody>
+      </p:sp>
+      <p:sp>
+        <p:nvSpPr>
+          <p:cNvPr id="13" name="Rectangle 12"/>
           <p:cNvSpPr/>
           <p:nvPr/>
         </p:nvSpPr>
         <p:spPr>
           <a:xfrm>
             <a:off x="1234440" y="2907791"/>
-            <a:ext cx="9418320" cy="438912"/>
+            <a:ext cx="9418320" cy="658368"/>
           </a:xfrm>
           <a:prstGeom prst="rect">
             <a:avLst/>
@@ -6318,14 +7104,57 @@
       </p:sp>
       <p:sp>
         <p:nvSpPr>
-          <p:cNvPr id="12" name="TextBox 11"/>
-          <p:cNvSpPr txBox="1"/>
-          <p:nvPr/>
-        </p:nvSpPr>
-        <p:spPr>
-          <a:xfrm>
-            <a:off x="1426464" y="3017520"/>
-            <a:ext cx="9015984" cy="201168"/>
+          <p:cNvPr id="14" name="Rectangle 13"/>
+          <p:cNvSpPr/>
+          <p:nvPr/>
+        </p:nvSpPr>
+        <p:spPr>
+          <a:xfrm>
+            <a:off x="1234440" y="2907791"/>
+            <a:ext cx="54864" cy="658368"/>
+          </a:xfrm>
+          <a:prstGeom prst="rect">
+            <a:avLst/>
+          </a:prstGeom>
+          <a:solidFill>
+            <a:srgbClr val="1E5B9E"/>
+          </a:solidFill>
+          <a:ln>
+            <a:noFill/>
+          </a:ln>
+        </p:spPr>
+        <p:style>
+          <a:lnRef idx="1">
+            <a:schemeClr val="accent1"/>
+          </a:lnRef>
+          <a:fillRef idx="3">
+            <a:schemeClr val="accent1"/>
+          </a:fillRef>
+          <a:effectRef idx="2">
+            <a:schemeClr val="accent1"/>
+          </a:effectRef>
+          <a:fontRef idx="minor">
+            <a:schemeClr val="lt1"/>
+          </a:fontRef>
+        </p:style>
+        <p:txBody>
+          <a:bodyPr rtlCol="0" anchor="ctr"/>
+          <a:lstStyle/>
+          <a:p>
+            <a:pPr algn="ctr"/>
+          </a:p>
+        </p:txBody>
+      </p:sp>
+      <p:sp>
+        <p:nvSpPr>
+          <p:cNvPr id="15" name="TextBox 14"/>
+          <p:cNvSpPr txBox="1"/>
+          <p:nvPr/>
+        </p:nvSpPr>
+        <p:spPr>
+          <a:xfrm>
+            <a:off x="1444752" y="3008375"/>
+            <a:ext cx="9015984" cy="219456"/>
           </a:xfrm>
           <a:prstGeom prst="rect">
             <a:avLst/>
@@ -6340,27 +7169,62 @@
           <a:p>
             <a:pPr algn="l"/>
             <a:r>
-              <a:rPr sz="1600" b="1">
+              <a:rPr sz="1700" b="1">
                 <a:solidFill>
                   <a:srgbClr val="18212F"/>
                 </a:solidFill>
-                <a:latin typeface="Courier New"/>
-              </a:rPr>
-              <a:t>score_i = c_i x (0.6 + 0.4 x efficiency_i)</a:t>
-            </a:r>
-          </a:p>
-        </p:txBody>
-      </p:sp>
-      <p:sp>
-        <p:nvSpPr>
-          <p:cNvPr id="13" name="Rectangle 12"/>
+                <a:latin typeface="Georgia"/>
+              </a:rPr>
+              <a:t>s_i = c_i(0.6 + 0.4η_i),  c_i ∈ {0, 1}</a:t>
+            </a:r>
+          </a:p>
+        </p:txBody>
+      </p:sp>
+      <p:sp>
+        <p:nvSpPr>
+          <p:cNvPr id="16" name="TextBox 15"/>
+          <p:cNvSpPr txBox="1"/>
+          <p:nvPr/>
+        </p:nvSpPr>
+        <p:spPr>
+          <a:xfrm>
+            <a:off x="1444752" y="3300984"/>
+            <a:ext cx="9015984" cy="182880"/>
+          </a:xfrm>
+          <a:prstGeom prst="rect">
+            <a:avLst/>
+          </a:prstGeom>
+          <a:noFill/>
+        </p:spPr>
+        <p:txBody>
+          <a:bodyPr wrap="square" lIns="36576" rIns="36576" tIns="18288" bIns="18288" anchor="t">
+            <a:spAutoFit/>
+          </a:bodyPr>
+          <a:lstStyle/>
+          <a:p>
+            <a:pPr algn="l"/>
+            <a:r>
+              <a:rPr sz="800" b="0">
+                <a:solidFill>
+                  <a:srgbClr val="647084"/>
+                </a:solidFill>
+                <a:latin typeface="Arial"/>
+              </a:rPr>
+              <a:t>Correctness gates the score: incorrect predictions receive zero regardless of brevity.</a:t>
+            </a:r>
+          </a:p>
+        </p:txBody>
+      </p:sp>
+      <p:sp>
+        <p:nvSpPr>
+          <p:cNvPr id="17" name="Rectangle 16"/>
           <p:cNvSpPr/>
           <p:nvPr/>
         </p:nvSpPr>
         <p:spPr>
           <a:xfrm>
-            <a:off x="1234440" y="3566160"/>
-            <a:ext cx="9418320" cy="438912"/>
+            <a:off x="1234440" y="3749039"/>
+            <a:ext cx="9418320" cy="658368"/>
           </a:xfrm>
           <a:prstGeom prst="rect">
             <a:avLst/>
@@ -6398,14 +7262,57 @@
       </p:sp>
       <p:sp>
         <p:nvSpPr>
-          <p:cNvPr id="14" name="TextBox 13"/>
-          <p:cNvSpPr txBox="1"/>
-          <p:nvPr/>
-        </p:nvSpPr>
-        <p:spPr>
-          <a:xfrm>
-            <a:off x="1426464" y="3675887"/>
-            <a:ext cx="9015984" cy="201168"/>
+          <p:cNvPr id="18" name="Rectangle 17"/>
+          <p:cNvSpPr/>
+          <p:nvPr/>
+        </p:nvSpPr>
+        <p:spPr>
+          <a:xfrm>
+            <a:off x="1234440" y="3749039"/>
+            <a:ext cx="54864" cy="658368"/>
+          </a:xfrm>
+          <a:prstGeom prst="rect">
+            <a:avLst/>
+          </a:prstGeom>
+          <a:solidFill>
+            <a:srgbClr val="1E5B9E"/>
+          </a:solidFill>
+          <a:ln>
+            <a:noFill/>
+          </a:ln>
+        </p:spPr>
+        <p:style>
+          <a:lnRef idx="1">
+            <a:schemeClr val="accent1"/>
+          </a:lnRef>
+          <a:fillRef idx="3">
+            <a:schemeClr val="accent1"/>
+          </a:fillRef>
+          <a:effectRef idx="2">
+            <a:schemeClr val="accent1"/>
+          </a:effectRef>
+          <a:fontRef idx="minor">
+            <a:schemeClr val="lt1"/>
+          </a:fontRef>
+        </p:style>
+        <p:txBody>
+          <a:bodyPr rtlCol="0" anchor="ctr"/>
+          <a:lstStyle/>
+          <a:p>
+            <a:pPr algn="ctr"/>
+          </a:p>
+        </p:txBody>
+      </p:sp>
+      <p:sp>
+        <p:nvSpPr>
+          <p:cNvPr id="19" name="TextBox 18"/>
+          <p:cNvSpPr txBox="1"/>
+          <p:nvPr/>
+        </p:nvSpPr>
+        <p:spPr>
+          <a:xfrm>
+            <a:off x="1444752" y="3849624"/>
+            <a:ext cx="9015984" cy="219456"/>
           </a:xfrm>
           <a:prstGeom prst="rect">
             <a:avLst/>
@@ -6420,27 +7327,62 @@
           <a:p>
             <a:pPr algn="l"/>
             <a:r>
-              <a:rPr sz="1600" b="1">
+              <a:rPr sz="1700" b="1">
                 <a:solidFill>
                   <a:srgbClr val="18212F"/>
                 </a:solidFill>
-                <a:latin typeface="Courier New"/>
-              </a:rPr>
-              <a:t>joint score = mean(score_i)</a:t>
-            </a:r>
-          </a:p>
-        </p:txBody>
-      </p:sp>
-      <p:sp>
-        <p:nvSpPr>
-          <p:cNvPr id="15" name="Rectangle 14"/>
+                <a:latin typeface="Georgia"/>
+              </a:rPr>
+              <a:t>J = (1 / N) · Σ_i=1^N s_i</a:t>
+            </a:r>
+          </a:p>
+        </p:txBody>
+      </p:sp>
+      <p:sp>
+        <p:nvSpPr>
+          <p:cNvPr id="20" name="TextBox 19"/>
+          <p:cNvSpPr txBox="1"/>
+          <p:nvPr/>
+        </p:nvSpPr>
+        <p:spPr>
+          <a:xfrm>
+            <a:off x="1444752" y="4142231"/>
+            <a:ext cx="9015984" cy="182880"/>
+          </a:xfrm>
+          <a:prstGeom prst="rect">
+            <a:avLst/>
+          </a:prstGeom>
+          <a:noFill/>
+        </p:spPr>
+        <p:txBody>
+          <a:bodyPr wrap="square" lIns="36576" rIns="36576" tIns="18288" bIns="18288" anchor="t">
+            <a:spAutoFit/>
+          </a:bodyPr>
+          <a:lstStyle/>
+          <a:p>
+            <a:pPr algn="l"/>
+            <a:r>
+              <a:rPr sz="800" b="0">
+                <a:solidFill>
+                  <a:srgbClr val="647084"/>
+                </a:solidFill>
+                <a:latin typeface="Arial"/>
+              </a:rPr>
+              <a:t>The reported joint score averages sample-level scores over a model-method run.</a:t>
+            </a:r>
+          </a:p>
+        </p:txBody>
+      </p:sp>
+      <p:sp>
+        <p:nvSpPr>
+          <p:cNvPr id="21" name="Rectangle 20"/>
           <p:cNvSpPr/>
           <p:nvPr/>
         </p:nvSpPr>
         <p:spPr>
           <a:xfrm>
-            <a:off x="1847088" y="4828032"/>
-            <a:ext cx="8156448" cy="493776"/>
+            <a:off x="914400" y="5102352"/>
+            <a:ext cx="3267456" cy="182880"/>
           </a:xfrm>
           <a:prstGeom prst="rect">
             <a:avLst/>
@@ -6478,42 +7420,678 @@
       </p:sp>
       <p:sp>
         <p:nvSpPr>
-          <p:cNvPr id="16" name="TextBox 15"/>
-          <p:cNvSpPr txBox="1"/>
-          <p:nvPr/>
-        </p:nvSpPr>
-        <p:spPr>
-          <a:xfrm>
-            <a:off x="1993392" y="4965192"/>
-            <a:ext cx="7863840" cy="201168"/>
-          </a:xfrm>
-          <a:prstGeom prst="rect">
-            <a:avLst/>
-          </a:prstGeom>
-          <a:noFill/>
-        </p:spPr>
-        <p:txBody>
-          <a:bodyPr wrap="square" lIns="36576" rIns="36576" tIns="18288" bIns="18288" anchor="t">
-            <a:spAutoFit/>
-          </a:bodyPr>
-          <a:lstStyle/>
-          <a:p>
-            <a:pPr algn="ctr"/>
-            <a:r>
-              <a:rPr sz="1300" b="1">
+          <p:cNvPr id="22" name="TextBox 21"/>
+          <p:cNvSpPr txBox="1"/>
+          <p:nvPr/>
+        </p:nvSpPr>
+        <p:spPr>
+          <a:xfrm>
+            <a:off x="987552" y="5143500"/>
+            <a:ext cx="3121152" cy="91440"/>
+          </a:xfrm>
+          <a:prstGeom prst="rect">
+            <a:avLst/>
+          </a:prstGeom>
+          <a:noFill/>
+        </p:spPr>
+        <p:txBody>
+          <a:bodyPr wrap="square" lIns="36576" rIns="36576" tIns="18288" bIns="18288" anchor="t">
+            <a:spAutoFit/>
+          </a:bodyPr>
+          <a:lstStyle/>
+          <a:p>
+            <a:pPr algn="ctr"/>
+            <a:r>
+              <a:rPr sz="650" b="1">
                 <a:solidFill>
                   <a:srgbClr val="0F766E"/>
                 </a:solidFill>
+                <a:latin typeface="Georgia"/>
+              </a:rPr>
+              <a:t>A_i: answer-cue count</a:t>
+            </a:r>
+          </a:p>
+        </p:txBody>
+      </p:sp>
+      <p:sp>
+        <p:nvSpPr>
+          <p:cNvPr id="23" name="Rectangle 22"/>
+          <p:cNvSpPr/>
+          <p:nvPr/>
+        </p:nvSpPr>
+        <p:spPr>
+          <a:xfrm>
+            <a:off x="4309872" y="5102352"/>
+            <a:ext cx="3267456" cy="182880"/>
+          </a:xfrm>
+          <a:prstGeom prst="rect">
+            <a:avLst/>
+          </a:prstGeom>
+          <a:solidFill>
+            <a:srgbClr val="E7F6F4"/>
+          </a:solidFill>
+          <a:ln>
+            <a:solidFill>
+              <a:srgbClr val="0F766E"/>
+            </a:solidFill>
+          </a:ln>
+        </p:spPr>
+        <p:style>
+          <a:lnRef idx="1">
+            <a:schemeClr val="accent1"/>
+          </a:lnRef>
+          <a:fillRef idx="3">
+            <a:schemeClr val="accent1"/>
+          </a:fillRef>
+          <a:effectRef idx="2">
+            <a:schemeClr val="accent1"/>
+          </a:effectRef>
+          <a:fontRef idx="minor">
+            <a:schemeClr val="lt1"/>
+          </a:fontRef>
+        </p:style>
+        <p:txBody>
+          <a:bodyPr rtlCol="0" anchor="ctr"/>
+          <a:lstStyle/>
+          <a:p>
+            <a:pPr algn="ctr"/>
+          </a:p>
+        </p:txBody>
+      </p:sp>
+      <p:sp>
+        <p:nvSpPr>
+          <p:cNvPr id="24" name="TextBox 23"/>
+          <p:cNvSpPr txBox="1"/>
+          <p:nvPr/>
+        </p:nvSpPr>
+        <p:spPr>
+          <a:xfrm>
+            <a:off x="4383024" y="5143500"/>
+            <a:ext cx="3121152" cy="91440"/>
+          </a:xfrm>
+          <a:prstGeom prst="rect">
+            <a:avLst/>
+          </a:prstGeom>
+          <a:noFill/>
+        </p:spPr>
+        <p:txBody>
+          <a:bodyPr wrap="square" lIns="36576" rIns="36576" tIns="18288" bIns="18288" anchor="t">
+            <a:spAutoFit/>
+          </a:bodyPr>
+          <a:lstStyle/>
+          <a:p>
+            <a:pPr algn="ctr"/>
+            <a:r>
+              <a:rPr sz="650" b="1">
+                <a:solidFill>
+                  <a:srgbClr val="0F766E"/>
+                </a:solidFill>
+                <a:latin typeface="Georgia"/>
+              </a:rPr>
+              <a:t>R_i: tail ratio after first cue</a:t>
+            </a:r>
+          </a:p>
+        </p:txBody>
+      </p:sp>
+      <p:sp>
+        <p:nvSpPr>
+          <p:cNvPr id="25" name="Rectangle 24"/>
+          <p:cNvSpPr/>
+          <p:nvPr/>
+        </p:nvSpPr>
+        <p:spPr>
+          <a:xfrm>
+            <a:off x="7705344" y="5102352"/>
+            <a:ext cx="3267456" cy="182880"/>
+          </a:xfrm>
+          <a:prstGeom prst="rect">
+            <a:avLst/>
+          </a:prstGeom>
+          <a:solidFill>
+            <a:srgbClr val="E7F6F4"/>
+          </a:solidFill>
+          <a:ln>
+            <a:solidFill>
+              <a:srgbClr val="0F766E"/>
+            </a:solidFill>
+          </a:ln>
+        </p:spPr>
+        <p:style>
+          <a:lnRef idx="1">
+            <a:schemeClr val="accent1"/>
+          </a:lnRef>
+          <a:fillRef idx="3">
+            <a:schemeClr val="accent1"/>
+          </a:fillRef>
+          <a:effectRef idx="2">
+            <a:schemeClr val="accent1"/>
+          </a:effectRef>
+          <a:fontRef idx="minor">
+            <a:schemeClr val="lt1"/>
+          </a:fontRef>
+        </p:style>
+        <p:txBody>
+          <a:bodyPr rtlCol="0" anchor="ctr"/>
+          <a:lstStyle/>
+          <a:p>
+            <a:pPr algn="ctr"/>
+          </a:p>
+        </p:txBody>
+      </p:sp>
+      <p:sp>
+        <p:nvSpPr>
+          <p:cNvPr id="26" name="TextBox 25"/>
+          <p:cNvSpPr txBox="1"/>
+          <p:nvPr/>
+        </p:nvSpPr>
+        <p:spPr>
+          <a:xfrm>
+            <a:off x="7778496" y="5143500"/>
+            <a:ext cx="3121152" cy="91440"/>
+          </a:xfrm>
+          <a:prstGeom prst="rect">
+            <a:avLst/>
+          </a:prstGeom>
+          <a:noFill/>
+        </p:spPr>
+        <p:txBody>
+          <a:bodyPr wrap="square" lIns="36576" rIns="36576" tIns="18288" bIns="18288" anchor="t">
+            <a:spAutoFit/>
+          </a:bodyPr>
+          <a:lstStyle/>
+          <a:p>
+            <a:pPr algn="ctr"/>
+            <a:r>
+              <a:rPr sz="650" b="1">
+                <a:solidFill>
+                  <a:srgbClr val="0F766E"/>
+                </a:solidFill>
+                <a:latin typeface="Georgia"/>
+              </a:rPr>
+              <a:t>L_i: total generated tokens</a:t>
+            </a:r>
+          </a:p>
+        </p:txBody>
+      </p:sp>
+      <p:sp>
+        <p:nvSpPr>
+          <p:cNvPr id="27" name="Rectangle 26"/>
+          <p:cNvSpPr/>
+          <p:nvPr/>
+        </p:nvSpPr>
+        <p:spPr>
+          <a:xfrm>
+            <a:off x="914400" y="5358384"/>
+            <a:ext cx="3267456" cy="182880"/>
+          </a:xfrm>
+          <a:prstGeom prst="rect">
+            <a:avLst/>
+          </a:prstGeom>
+          <a:solidFill>
+            <a:srgbClr val="E7F6F4"/>
+          </a:solidFill>
+          <a:ln>
+            <a:solidFill>
+              <a:srgbClr val="0F766E"/>
+            </a:solidFill>
+          </a:ln>
+        </p:spPr>
+        <p:style>
+          <a:lnRef idx="1">
+            <a:schemeClr val="accent1"/>
+          </a:lnRef>
+          <a:fillRef idx="3">
+            <a:schemeClr val="accent1"/>
+          </a:fillRef>
+          <a:effectRef idx="2">
+            <a:schemeClr val="accent1"/>
+          </a:effectRef>
+          <a:fontRef idx="minor">
+            <a:schemeClr val="lt1"/>
+          </a:fontRef>
+        </p:style>
+        <p:txBody>
+          <a:bodyPr rtlCol="0" anchor="ctr"/>
+          <a:lstStyle/>
+          <a:p>
+            <a:pPr algn="ctr"/>
+          </a:p>
+        </p:txBody>
+      </p:sp>
+      <p:sp>
+        <p:nvSpPr>
+          <p:cNvPr id="28" name="TextBox 27"/>
+          <p:cNvSpPr txBox="1"/>
+          <p:nvPr/>
+        </p:nvSpPr>
+        <p:spPr>
+          <a:xfrm>
+            <a:off x="987552" y="5399532"/>
+            <a:ext cx="3121152" cy="91440"/>
+          </a:xfrm>
+          <a:prstGeom prst="rect">
+            <a:avLst/>
+          </a:prstGeom>
+          <a:noFill/>
+        </p:spPr>
+        <p:txBody>
+          <a:bodyPr wrap="square" lIns="36576" rIns="36576" tIns="18288" bIns="18288" anchor="t">
+            <a:spAutoFit/>
+          </a:bodyPr>
+          <a:lstStyle/>
+          <a:p>
+            <a:pPr algn="ctr"/>
+            <a:r>
+              <a:rPr sz="650" b="1">
+                <a:solidFill>
+                  <a:srgbClr val="0F766E"/>
+                </a:solidFill>
+                <a:latin typeface="Georgia"/>
+              </a:rPr>
+              <a:t>F_i: reflection-cue count</a:t>
+            </a:r>
+          </a:p>
+        </p:txBody>
+      </p:sp>
+      <p:sp>
+        <p:nvSpPr>
+          <p:cNvPr id="29" name="Rectangle 28"/>
+          <p:cNvSpPr/>
+          <p:nvPr/>
+        </p:nvSpPr>
+        <p:spPr>
+          <a:xfrm>
+            <a:off x="4309872" y="5358384"/>
+            <a:ext cx="3267456" cy="182880"/>
+          </a:xfrm>
+          <a:prstGeom prst="rect">
+            <a:avLst/>
+          </a:prstGeom>
+          <a:solidFill>
+            <a:srgbClr val="E7F6F4"/>
+          </a:solidFill>
+          <a:ln>
+            <a:solidFill>
+              <a:srgbClr val="0F766E"/>
+            </a:solidFill>
+          </a:ln>
+        </p:spPr>
+        <p:style>
+          <a:lnRef idx="1">
+            <a:schemeClr val="accent1"/>
+          </a:lnRef>
+          <a:fillRef idx="3">
+            <a:schemeClr val="accent1"/>
+          </a:fillRef>
+          <a:effectRef idx="2">
+            <a:schemeClr val="accent1"/>
+          </a:effectRef>
+          <a:fontRef idx="minor">
+            <a:schemeClr val="lt1"/>
+          </a:fontRef>
+        </p:style>
+        <p:txBody>
+          <a:bodyPr rtlCol="0" anchor="ctr"/>
+          <a:lstStyle/>
+          <a:p>
+            <a:pPr algn="ctr"/>
+          </a:p>
+        </p:txBody>
+      </p:sp>
+      <p:sp>
+        <p:nvSpPr>
+          <p:cNvPr id="30" name="TextBox 29"/>
+          <p:cNvSpPr txBox="1"/>
+          <p:nvPr/>
+        </p:nvSpPr>
+        <p:spPr>
+          <a:xfrm>
+            <a:off x="4383024" y="5399532"/>
+            <a:ext cx="3121152" cy="91440"/>
+          </a:xfrm>
+          <a:prstGeom prst="rect">
+            <a:avLst/>
+          </a:prstGeom>
+          <a:noFill/>
+        </p:spPr>
+        <p:txBody>
+          <a:bodyPr wrap="square" lIns="36576" rIns="36576" tIns="18288" bIns="18288" anchor="t">
+            <a:spAutoFit/>
+          </a:bodyPr>
+          <a:lstStyle/>
+          <a:p>
+            <a:pPr algn="ctr"/>
+            <a:r>
+              <a:rPr sz="650" b="1">
+                <a:solidFill>
+                  <a:srgbClr val="0F766E"/>
+                </a:solidFill>
+                <a:latin typeface="Georgia"/>
+              </a:rPr>
+              <a:t>L_ref = 1024, τ_L = 512: length reference</a:t>
+            </a:r>
+          </a:p>
+        </p:txBody>
+      </p:sp>
+      <p:sp>
+        <p:nvSpPr>
+          <p:cNvPr id="31" name="Rectangle 30"/>
+          <p:cNvSpPr/>
+          <p:nvPr/>
+        </p:nvSpPr>
+        <p:spPr>
+          <a:xfrm>
+            <a:off x="7705344" y="5358384"/>
+            <a:ext cx="3267456" cy="182880"/>
+          </a:xfrm>
+          <a:prstGeom prst="rect">
+            <a:avLst/>
+          </a:prstGeom>
+          <a:solidFill>
+            <a:srgbClr val="E7F6F4"/>
+          </a:solidFill>
+          <a:ln>
+            <a:solidFill>
+              <a:srgbClr val="0F766E"/>
+            </a:solidFill>
+          </a:ln>
+        </p:spPr>
+        <p:style>
+          <a:lnRef idx="1">
+            <a:schemeClr val="accent1"/>
+          </a:lnRef>
+          <a:fillRef idx="3">
+            <a:schemeClr val="accent1"/>
+          </a:fillRef>
+          <a:effectRef idx="2">
+            <a:schemeClr val="accent1"/>
+          </a:effectRef>
+          <a:fontRef idx="minor">
+            <a:schemeClr val="lt1"/>
+          </a:fontRef>
+        </p:style>
+        <p:txBody>
+          <a:bodyPr rtlCol="0" anchor="ctr"/>
+          <a:lstStyle/>
+          <a:p>
+            <a:pPr algn="ctr"/>
+          </a:p>
+        </p:txBody>
+      </p:sp>
+      <p:sp>
+        <p:nvSpPr>
+          <p:cNvPr id="32" name="TextBox 31"/>
+          <p:cNvSpPr txBox="1"/>
+          <p:nvPr/>
+        </p:nvSpPr>
+        <p:spPr>
+          <a:xfrm>
+            <a:off x="7778496" y="5399532"/>
+            <a:ext cx="3121152" cy="91440"/>
+          </a:xfrm>
+          <a:prstGeom prst="rect">
+            <a:avLst/>
+          </a:prstGeom>
+          <a:noFill/>
+        </p:spPr>
+        <p:txBody>
+          <a:bodyPr wrap="square" lIns="36576" rIns="36576" tIns="18288" bIns="18288" anchor="t">
+            <a:spAutoFit/>
+          </a:bodyPr>
+          <a:lstStyle/>
+          <a:p>
+            <a:pPr algn="ctr"/>
+            <a:r>
+              <a:rPr sz="650" b="1">
+                <a:solidFill>
+                  <a:srgbClr val="0F766E"/>
+                </a:solidFill>
+                <a:latin typeface="Georgia"/>
+              </a:rPr>
+              <a:t>F_ref = 1, τ_F = 2: reflection reference</a:t>
+            </a:r>
+          </a:p>
+        </p:txBody>
+      </p:sp>
+      <p:sp>
+        <p:nvSpPr>
+          <p:cNvPr id="33" name="Rectangle 32"/>
+          <p:cNvSpPr/>
+          <p:nvPr/>
+        </p:nvSpPr>
+        <p:spPr>
+          <a:xfrm>
+            <a:off x="694944" y="5650992"/>
+            <a:ext cx="10771632" cy="548640"/>
+          </a:xfrm>
+          <a:prstGeom prst="rect">
+            <a:avLst/>
+          </a:prstGeom>
+          <a:solidFill>
+            <a:srgbClr val="FFFFFF"/>
+          </a:solidFill>
+          <a:ln>
+            <a:solidFill>
+              <a:srgbClr val="CED6E3"/>
+            </a:solidFill>
+          </a:ln>
+        </p:spPr>
+        <p:style>
+          <a:lnRef idx="1">
+            <a:schemeClr val="accent1"/>
+          </a:lnRef>
+          <a:fillRef idx="3">
+            <a:schemeClr val="accent1"/>
+          </a:fillRef>
+          <a:effectRef idx="2">
+            <a:schemeClr val="accent1"/>
+          </a:effectRef>
+          <a:fontRef idx="minor">
+            <a:schemeClr val="lt1"/>
+          </a:fontRef>
+        </p:style>
+        <p:txBody>
+          <a:bodyPr rtlCol="0" anchor="ctr"/>
+          <a:lstStyle/>
+          <a:p>
+            <a:pPr algn="ctr"/>
+          </a:p>
+        </p:txBody>
+      </p:sp>
+      <p:sp>
+        <p:nvSpPr>
+          <p:cNvPr id="34" name="Rectangle 33"/>
+          <p:cNvSpPr/>
+          <p:nvPr/>
+        </p:nvSpPr>
+        <p:spPr>
+          <a:xfrm>
+            <a:off x="694944" y="5650992"/>
+            <a:ext cx="54864" cy="548640"/>
+          </a:xfrm>
+          <a:prstGeom prst="rect">
+            <a:avLst/>
+          </a:prstGeom>
+          <a:solidFill>
+            <a:srgbClr val="1E5B9E"/>
+          </a:solidFill>
+          <a:ln>
+            <a:noFill/>
+          </a:ln>
+        </p:spPr>
+        <p:style>
+          <a:lnRef idx="1">
+            <a:schemeClr val="accent1"/>
+          </a:lnRef>
+          <a:fillRef idx="3">
+            <a:schemeClr val="accent1"/>
+          </a:fillRef>
+          <a:effectRef idx="2">
+            <a:schemeClr val="accent1"/>
+          </a:effectRef>
+          <a:fontRef idx="minor">
+            <a:schemeClr val="lt1"/>
+          </a:fontRef>
+        </p:style>
+        <p:txBody>
+          <a:bodyPr rtlCol="0" anchor="ctr"/>
+          <a:lstStyle/>
+          <a:p>
+            <a:pPr algn="ctr"/>
+          </a:p>
+        </p:txBody>
+      </p:sp>
+      <p:sp>
+        <p:nvSpPr>
+          <p:cNvPr id="35" name="Rounded Rectangle 34"/>
+          <p:cNvSpPr/>
+          <p:nvPr/>
+        </p:nvSpPr>
+        <p:spPr>
+          <a:xfrm>
+            <a:off x="841248" y="5733288"/>
+            <a:ext cx="1325880" cy="146304"/>
+          </a:xfrm>
+          <a:prstGeom prst="roundRect">
+            <a:avLst/>
+          </a:prstGeom>
+          <a:solidFill>
+            <a:srgbClr val="EAF2FF"/>
+          </a:solidFill>
+          <a:ln>
+            <a:noFill/>
+          </a:ln>
+        </p:spPr>
+        <p:style>
+          <a:lnRef idx="1">
+            <a:schemeClr val="accent1"/>
+          </a:lnRef>
+          <a:fillRef idx="3">
+            <a:schemeClr val="accent1"/>
+          </a:fillRef>
+          <a:effectRef idx="2">
+            <a:schemeClr val="accent1"/>
+          </a:effectRef>
+          <a:fontRef idx="minor">
+            <a:schemeClr val="lt1"/>
+          </a:fontRef>
+        </p:style>
+        <p:txBody>
+          <a:bodyPr rtlCol="0" anchor="ctr"/>
+          <a:lstStyle/>
+          <a:p>
+            <a:pPr algn="ctr"/>
+          </a:p>
+        </p:txBody>
+      </p:sp>
+      <p:sp>
+        <p:nvSpPr>
+          <p:cNvPr id="36" name="TextBox 35"/>
+          <p:cNvSpPr txBox="1"/>
+          <p:nvPr/>
+        </p:nvSpPr>
+        <p:spPr>
+          <a:xfrm>
+            <a:off x="896112" y="5765292"/>
+            <a:ext cx="1170432" cy="73152"/>
+          </a:xfrm>
+          <a:prstGeom prst="rect">
+            <a:avLst/>
+          </a:prstGeom>
+          <a:noFill/>
+        </p:spPr>
+        <p:txBody>
+          <a:bodyPr wrap="square" lIns="36576" rIns="36576" tIns="18288" bIns="18288" anchor="t">
+            <a:spAutoFit/>
+          </a:bodyPr>
+          <a:lstStyle/>
+          <a:p>
+            <a:pPr algn="ctr"/>
+            <a:r>
+              <a:rPr sz="600" b="1">
+                <a:solidFill>
+                  <a:srgbClr val="1E5B9E"/>
+                </a:solidFill>
+                <a:latin typeface="Courier New"/>
+              </a:rPr>
+              <a:t>SCORE RULE</a:t>
+            </a:r>
+          </a:p>
+        </p:txBody>
+      </p:sp>
+      <p:sp>
+        <p:nvSpPr>
+          <p:cNvPr id="37" name="TextBox 36"/>
+          <p:cNvSpPr txBox="1"/>
+          <p:nvPr/>
+        </p:nvSpPr>
+        <p:spPr>
+          <a:xfrm>
+            <a:off x="9985248" y="5765292"/>
+            <a:ext cx="1097280" cy="73152"/>
+          </a:xfrm>
+          <a:prstGeom prst="rect">
+            <a:avLst/>
+          </a:prstGeom>
+          <a:noFill/>
+        </p:spPr>
+        <p:txBody>
+          <a:bodyPr wrap="square" lIns="36576" rIns="36576" tIns="18288" bIns="18288" anchor="t">
+            <a:spAutoFit/>
+          </a:bodyPr>
+          <a:lstStyle/>
+          <a:p>
+            <a:pPr algn="r"/>
+            <a:r>
+              <a:rPr sz="600" b="1">
+                <a:solidFill>
+                  <a:srgbClr val="647084"/>
+                </a:solidFill>
+                <a:latin typeface="Courier New"/>
+              </a:rPr>
+              <a:t>FORMULA</a:t>
+            </a:r>
+          </a:p>
+        </p:txBody>
+      </p:sp>
+      <p:sp>
+        <p:nvSpPr>
+          <p:cNvPr id="38" name="TextBox 37"/>
+          <p:cNvSpPr txBox="1"/>
+          <p:nvPr/>
+        </p:nvSpPr>
+        <p:spPr>
+          <a:xfrm>
+            <a:off x="841248" y="5925312"/>
+            <a:ext cx="10296144" cy="146304"/>
+          </a:xfrm>
+          <a:prstGeom prst="rect">
+            <a:avLst/>
+          </a:prstGeom>
+          <a:noFill/>
+        </p:spPr>
+        <p:txBody>
+          <a:bodyPr wrap="square" lIns="36576" rIns="36576" tIns="18288" bIns="18288" anchor="t">
+            <a:spAutoFit/>
+          </a:bodyPr>
+          <a:lstStyle/>
+          <a:p>
+            <a:pPr algn="l"/>
+            <a:r>
+              <a:rPr sz="700" b="0">
+                <a:solidFill>
+                  <a:srgbClr val="344256"/>
+                </a:solidFill>
                 <a:latin typeface="Arial"/>
               </a:rPr>
-              <a:t>Correctness first; behavior only modifies correct samples.</a:t>
-            </a:r>
-          </a:p>
-        </p:txBody>
-      </p:sp>
-      <p:sp>
-        <p:nvSpPr>
-          <p:cNvPr id="17" name="Rectangle 16"/>
+              <a:t>The formula is deliberately conservative: correctness is a prerequisite, then behavior factors adjust only the remaining credit. This protects against rewarding short but wrong outputs.</a:t>
+            </a:r>
+          </a:p>
+        </p:txBody>
+      </p:sp>
+      <p:sp>
+        <p:nvSpPr>
+          <p:cNvPr id="39" name="Rectangle 38"/>
           <p:cNvSpPr/>
           <p:nvPr/>
         </p:nvSpPr>
@@ -6556,7 +8134,7 @@
       </p:sp>
       <p:sp>
         <p:nvSpPr>
-          <p:cNvPr id="18" name="TextBox 17"/>
+          <p:cNvPr id="40" name="TextBox 39"/>
           <p:cNvSpPr txBox="1"/>
           <p:nvPr/>
         </p:nvSpPr>
@@ -6801,7 +8379,7 @@
                 </a:solidFill>
                 <a:latin typeface="Georgia"/>
               </a:rPr>
-              <a:t>The factors explain why two correct methods behave differently</a:t>
+              <a:t>Factor and variable design make the score interpretable</a:t>
             </a:r>
           </a:p>
         </p:txBody>
@@ -6836,7 +8414,7 @@
                 </a:solidFill>
                 <a:latin typeface="Arial"/>
               </a:rPr>
-              <a:t>The scalar joint score ranks methods; the factor view explains the ranking.</a:t>
+              <a:t>Each penalty is tied to a concrete observable variable instead of an opaque heuristic.</a:t>
             </a:r>
           </a:p>
         </p:txBody>
@@ -6994,7 +8572,7 @@
                 </a:solidFill>
                 <a:latin typeface="Arial"/>
               </a:rPr>
-              <a:t>Detects repeated final-answer declarations and long continuation after an answer cue appears.</a:t>
+              <a:t>A_i counts answer cues such as boxed{} or “final answer”. The factor penalizes repeated declarations and long continuation after the first answer cue.</a:t>
             </a:r>
           </a:p>
           <a:p>
@@ -7006,7 +8584,7 @@
                 </a:solidFill>
                 <a:latin typeface="Arial"/>
               </a:rPr>
-              <a:t>answer_i = count_i x tail_i</a:t>
+              <a:t>a_i = count_i · tail_i</a:t>
             </a:r>
           </a:p>
         </p:txBody>
@@ -7164,7 +8742,7 @@
                 </a:solidFill>
                 <a:latin typeface="Arial"/>
               </a:rPr>
-              <a:t>Penalizes only excessive total generated tokens, including hidden intermediate stages.</a:t>
+              <a:t>L_i is the total generated token count over all stages, including plans, critiques, sampled paths, and tool traces. Only over-budget generation is penalized.</a:t>
             </a:r>
           </a:p>
           <a:p>
@@ -7176,7 +8754,7 @@
                 </a:solidFill>
                 <a:latin typeface="Arial"/>
               </a:rPr>
-              <a:t>length_i = exp(-max(0,L_i-1024)/512)</a:t>
+              <a:t>ℓ_i = exp(-max(0, L_i - L_ref) / τ_L)</a:t>
             </a:r>
           </a:p>
         </p:txBody>
@@ -7334,7 +8912,7 @@
                 </a:solidFill>
                 <a:latin typeface="Arial"/>
               </a:rPr>
-              <a:t>Flags repeated wait/check/verify/rethink cues that suggest unstable reasoning.</a:t>
+              <a:t>F_i counts wait/check/verify/rethink cues. Reflection beyond the first cue is treated as unstable self-correction rather than useful structure.</a:t>
             </a:r>
           </a:p>
           <a:p>
@@ -7346,7 +8924,7 @@
                 </a:solidFill>
                 <a:latin typeface="Arial"/>
               </a:rPr>
-              <a:t>reflection_i = exp(-max(0,F_i-1)/2)</a:t>
+              <a:t>r_i = exp(-max(0, F_i - F_ref) / τ_F)</a:t>
             </a:r>
           </a:p>
         </p:txBody>
@@ -7354,6 +8932,242 @@
       <p:sp>
         <p:nvSpPr>
           <p:cNvPr id="20" name="Rectangle 19"/>
+          <p:cNvSpPr/>
+          <p:nvPr/>
+        </p:nvSpPr>
+        <p:spPr>
+          <a:xfrm>
+            <a:off x="694944" y="5650992"/>
+            <a:ext cx="10771632" cy="548640"/>
+          </a:xfrm>
+          <a:prstGeom prst="rect">
+            <a:avLst/>
+          </a:prstGeom>
+          <a:solidFill>
+            <a:srgbClr val="FFFFFF"/>
+          </a:solidFill>
+          <a:ln>
+            <a:solidFill>
+              <a:srgbClr val="CED6E3"/>
+            </a:solidFill>
+          </a:ln>
+        </p:spPr>
+        <p:style>
+          <a:lnRef idx="1">
+            <a:schemeClr val="accent1"/>
+          </a:lnRef>
+          <a:fillRef idx="3">
+            <a:schemeClr val="accent1"/>
+          </a:fillRef>
+          <a:effectRef idx="2">
+            <a:schemeClr val="accent1"/>
+          </a:effectRef>
+          <a:fontRef idx="minor">
+            <a:schemeClr val="lt1"/>
+          </a:fontRef>
+        </p:style>
+        <p:txBody>
+          <a:bodyPr rtlCol="0" anchor="ctr"/>
+          <a:lstStyle/>
+          <a:p>
+            <a:pPr algn="ctr"/>
+          </a:p>
+        </p:txBody>
+      </p:sp>
+      <p:sp>
+        <p:nvSpPr>
+          <p:cNvPr id="21" name="Rectangle 20"/>
+          <p:cNvSpPr/>
+          <p:nvPr/>
+        </p:nvSpPr>
+        <p:spPr>
+          <a:xfrm>
+            <a:off x="694944" y="5650992"/>
+            <a:ext cx="54864" cy="548640"/>
+          </a:xfrm>
+          <a:prstGeom prst="rect">
+            <a:avLst/>
+          </a:prstGeom>
+          <a:solidFill>
+            <a:srgbClr val="0F766E"/>
+          </a:solidFill>
+          <a:ln>
+            <a:noFill/>
+          </a:ln>
+        </p:spPr>
+        <p:style>
+          <a:lnRef idx="1">
+            <a:schemeClr val="accent1"/>
+          </a:lnRef>
+          <a:fillRef idx="3">
+            <a:schemeClr val="accent1"/>
+          </a:fillRef>
+          <a:effectRef idx="2">
+            <a:schemeClr val="accent1"/>
+          </a:effectRef>
+          <a:fontRef idx="minor">
+            <a:schemeClr val="lt1"/>
+          </a:fontRef>
+        </p:style>
+        <p:txBody>
+          <a:bodyPr rtlCol="0" anchor="ctr"/>
+          <a:lstStyle/>
+          <a:p>
+            <a:pPr algn="ctr"/>
+          </a:p>
+        </p:txBody>
+      </p:sp>
+      <p:sp>
+        <p:nvSpPr>
+          <p:cNvPr id="22" name="Rounded Rectangle 21"/>
+          <p:cNvSpPr/>
+          <p:nvPr/>
+        </p:nvSpPr>
+        <p:spPr>
+          <a:xfrm>
+            <a:off x="841248" y="5733288"/>
+            <a:ext cx="1325880" cy="146304"/>
+          </a:xfrm>
+          <a:prstGeom prst="roundRect">
+            <a:avLst/>
+          </a:prstGeom>
+          <a:solidFill>
+            <a:srgbClr val="E7F6F4"/>
+          </a:solidFill>
+          <a:ln>
+            <a:noFill/>
+          </a:ln>
+        </p:spPr>
+        <p:style>
+          <a:lnRef idx="1">
+            <a:schemeClr val="accent1"/>
+          </a:lnRef>
+          <a:fillRef idx="3">
+            <a:schemeClr val="accent1"/>
+          </a:fillRef>
+          <a:effectRef idx="2">
+            <a:schemeClr val="accent1"/>
+          </a:effectRef>
+          <a:fontRef idx="minor">
+            <a:schemeClr val="lt1"/>
+          </a:fontRef>
+        </p:style>
+        <p:txBody>
+          <a:bodyPr rtlCol="0" anchor="ctr"/>
+          <a:lstStyle/>
+          <a:p>
+            <a:pPr algn="ctr"/>
+          </a:p>
+        </p:txBody>
+      </p:sp>
+      <p:sp>
+        <p:nvSpPr>
+          <p:cNvPr id="23" name="TextBox 22"/>
+          <p:cNvSpPr txBox="1"/>
+          <p:nvPr/>
+        </p:nvSpPr>
+        <p:spPr>
+          <a:xfrm>
+            <a:off x="896112" y="5765292"/>
+            <a:ext cx="1170432" cy="73152"/>
+          </a:xfrm>
+          <a:prstGeom prst="rect">
+            <a:avLst/>
+          </a:prstGeom>
+          <a:noFill/>
+        </p:spPr>
+        <p:txBody>
+          <a:bodyPr wrap="square" lIns="36576" rIns="36576" tIns="18288" bIns="18288" anchor="t">
+            <a:spAutoFit/>
+          </a:bodyPr>
+          <a:lstStyle/>
+          <a:p>
+            <a:pPr algn="ctr"/>
+            <a:r>
+              <a:rPr sz="600" b="1">
+                <a:solidFill>
+                  <a:srgbClr val="0F766E"/>
+                </a:solidFill>
+                <a:latin typeface="Courier New"/>
+              </a:rPr>
+              <a:t>FACTOR READ</a:t>
+            </a:r>
+          </a:p>
+        </p:txBody>
+      </p:sp>
+      <p:sp>
+        <p:nvSpPr>
+          <p:cNvPr id="24" name="TextBox 23"/>
+          <p:cNvSpPr txBox="1"/>
+          <p:nvPr/>
+        </p:nvSpPr>
+        <p:spPr>
+          <a:xfrm>
+            <a:off x="9985248" y="5765292"/>
+            <a:ext cx="1097280" cy="73152"/>
+          </a:xfrm>
+          <a:prstGeom prst="rect">
+            <a:avLst/>
+          </a:prstGeom>
+          <a:noFill/>
+        </p:spPr>
+        <p:txBody>
+          <a:bodyPr wrap="square" lIns="36576" rIns="36576" tIns="18288" bIns="18288" anchor="t">
+            <a:spAutoFit/>
+          </a:bodyPr>
+          <a:lstStyle/>
+          <a:p>
+            <a:pPr algn="r"/>
+            <a:r>
+              <a:rPr sz="600" b="1">
+                <a:solidFill>
+                  <a:srgbClr val="647084"/>
+                </a:solidFill>
+                <a:latin typeface="Courier New"/>
+              </a:rPr>
+              <a:t>DIAGNOSTIC</a:t>
+            </a:r>
+          </a:p>
+        </p:txBody>
+      </p:sp>
+      <p:sp>
+        <p:nvSpPr>
+          <p:cNvPr id="25" name="TextBox 24"/>
+          <p:cNvSpPr txBox="1"/>
+          <p:nvPr/>
+        </p:nvSpPr>
+        <p:spPr>
+          <a:xfrm>
+            <a:off x="841248" y="5925312"/>
+            <a:ext cx="10296144" cy="146304"/>
+          </a:xfrm>
+          <a:prstGeom prst="rect">
+            <a:avLst/>
+          </a:prstGeom>
+          <a:noFill/>
+        </p:spPr>
+        <p:txBody>
+          <a:bodyPr wrap="square" lIns="36576" rIns="36576" tIns="18288" bIns="18288" anchor="t">
+            <a:spAutoFit/>
+          </a:bodyPr>
+          <a:lstStyle/>
+          <a:p>
+            <a:pPr algn="l"/>
+            <a:r>
+              <a:rPr sz="700" b="0">
+                <a:solidFill>
+                  <a:srgbClr val="344256"/>
+                </a:solidFill>
+                <a:latin typeface="Arial"/>
+              </a:rPr>
+              <a:t>The factor decomposition makes the score interpretable. A low score can be traced to over-generation, repeated answer cues, or excessive reflection rather than treated as an opaque penalty.</a:t>
+            </a:r>
+          </a:p>
+        </p:txBody>
+      </p:sp>
+      <p:sp>
+        <p:nvSpPr>
+          <p:cNvPr id="26" name="Rectangle 25"/>
           <p:cNvSpPr/>
           <p:nvPr/>
         </p:nvSpPr>
@@ -7396,7 +9210,7 @@
       </p:sp>
       <p:sp>
         <p:nvSpPr>
-          <p:cNvPr id="21" name="TextBox 20"/>
+          <p:cNvPr id="27" name="TextBox 26"/>
           <p:cNvSpPr txBox="1"/>
           <p:nvPr/>
         </p:nvSpPr>
@@ -7676,7 +9490,7 @@
                 </a:solidFill>
                 <a:latin typeface="Arial"/>
               </a:rPr>
-              <a:t>Only the custom accuracy-first joint score is used as the main result view.</a:t>
+              <a:t>The result slide uses only the custom accuracy-first joint score, not raw accuracy or raw length charts.</a:t>
             </a:r>
           </a:p>
         </p:txBody>
@@ -7691,7 +9505,7 @@
         </p:nvGraphicFramePr>
         <p:xfrm>
           <a:off x="822960" y="1874519"/>
-          <a:ext cx="10012680" cy="3886200"/>
+          <a:ext cx="10012680" cy="3493008"/>
         </p:xfrm>
         <a:graphic>
           <a:graphicData uri="http://schemas.openxmlformats.org/drawingml/2006/chart">
@@ -7707,6 +9521,242 @@
         </p:nvSpPr>
         <p:spPr>
           <a:xfrm>
+            <a:off x="694944" y="5650992"/>
+            <a:ext cx="10771632" cy="548640"/>
+          </a:xfrm>
+          <a:prstGeom prst="rect">
+            <a:avLst/>
+          </a:prstGeom>
+          <a:solidFill>
+            <a:srgbClr val="FFFFFF"/>
+          </a:solidFill>
+          <a:ln>
+            <a:solidFill>
+              <a:srgbClr val="CED6E3"/>
+            </a:solidFill>
+          </a:ln>
+        </p:spPr>
+        <p:style>
+          <a:lnRef idx="1">
+            <a:schemeClr val="accent1"/>
+          </a:lnRef>
+          <a:fillRef idx="3">
+            <a:schemeClr val="accent1"/>
+          </a:fillRef>
+          <a:effectRef idx="2">
+            <a:schemeClr val="accent1"/>
+          </a:effectRef>
+          <a:fontRef idx="minor">
+            <a:schemeClr val="lt1"/>
+          </a:fontRef>
+        </p:style>
+        <p:txBody>
+          <a:bodyPr rtlCol="0" anchor="ctr"/>
+          <a:lstStyle/>
+          <a:p>
+            <a:pPr algn="ctr"/>
+          </a:p>
+        </p:txBody>
+      </p:sp>
+      <p:sp>
+        <p:nvSpPr>
+          <p:cNvPr id="10" name="Rectangle 9"/>
+          <p:cNvSpPr/>
+          <p:nvPr/>
+        </p:nvSpPr>
+        <p:spPr>
+          <a:xfrm>
+            <a:off x="694944" y="5650992"/>
+            <a:ext cx="54864" cy="548640"/>
+          </a:xfrm>
+          <a:prstGeom prst="rect">
+            <a:avLst/>
+          </a:prstGeom>
+          <a:solidFill>
+            <a:srgbClr val="1E5B9E"/>
+          </a:solidFill>
+          <a:ln>
+            <a:noFill/>
+          </a:ln>
+        </p:spPr>
+        <p:style>
+          <a:lnRef idx="1">
+            <a:schemeClr val="accent1"/>
+          </a:lnRef>
+          <a:fillRef idx="3">
+            <a:schemeClr val="accent1"/>
+          </a:fillRef>
+          <a:effectRef idx="2">
+            <a:schemeClr val="accent1"/>
+          </a:effectRef>
+          <a:fontRef idx="minor">
+            <a:schemeClr val="lt1"/>
+          </a:fontRef>
+        </p:style>
+        <p:txBody>
+          <a:bodyPr rtlCol="0" anchor="ctr"/>
+          <a:lstStyle/>
+          <a:p>
+            <a:pPr algn="ctr"/>
+          </a:p>
+        </p:txBody>
+      </p:sp>
+      <p:sp>
+        <p:nvSpPr>
+          <p:cNvPr id="11" name="Rounded Rectangle 10"/>
+          <p:cNvSpPr/>
+          <p:nvPr/>
+        </p:nvSpPr>
+        <p:spPr>
+          <a:xfrm>
+            <a:off x="841248" y="5733288"/>
+            <a:ext cx="1325880" cy="146304"/>
+          </a:xfrm>
+          <a:prstGeom prst="roundRect">
+            <a:avLst/>
+          </a:prstGeom>
+          <a:solidFill>
+            <a:srgbClr val="EAF2FF"/>
+          </a:solidFill>
+          <a:ln>
+            <a:noFill/>
+          </a:ln>
+        </p:spPr>
+        <p:style>
+          <a:lnRef idx="1">
+            <a:schemeClr val="accent1"/>
+          </a:lnRef>
+          <a:fillRef idx="3">
+            <a:schemeClr val="accent1"/>
+          </a:fillRef>
+          <a:effectRef idx="2">
+            <a:schemeClr val="accent1"/>
+          </a:effectRef>
+          <a:fontRef idx="minor">
+            <a:schemeClr val="lt1"/>
+          </a:fontRef>
+        </p:style>
+        <p:txBody>
+          <a:bodyPr rtlCol="0" anchor="ctr"/>
+          <a:lstStyle/>
+          <a:p>
+            <a:pPr algn="ctr"/>
+          </a:p>
+        </p:txBody>
+      </p:sp>
+      <p:sp>
+        <p:nvSpPr>
+          <p:cNvPr id="12" name="TextBox 11"/>
+          <p:cNvSpPr txBox="1"/>
+          <p:nvPr/>
+        </p:nvSpPr>
+        <p:spPr>
+          <a:xfrm>
+            <a:off x="896112" y="5765292"/>
+            <a:ext cx="1170432" cy="73152"/>
+          </a:xfrm>
+          <a:prstGeom prst="rect">
+            <a:avLst/>
+          </a:prstGeom>
+          <a:noFill/>
+        </p:spPr>
+        <p:txBody>
+          <a:bodyPr wrap="square" lIns="36576" rIns="36576" tIns="18288" bIns="18288" anchor="t">
+            <a:spAutoFit/>
+          </a:bodyPr>
+          <a:lstStyle/>
+          <a:p>
+            <a:pPr algn="ctr"/>
+            <a:r>
+              <a:rPr sz="600" b="1">
+                <a:solidFill>
+                  <a:srgbClr val="1E5B9E"/>
+                </a:solidFill>
+                <a:latin typeface="Courier New"/>
+              </a:rPr>
+              <a:t>RESULT READ</a:t>
+            </a:r>
+          </a:p>
+        </p:txBody>
+      </p:sp>
+      <p:sp>
+        <p:nvSpPr>
+          <p:cNvPr id="13" name="TextBox 12"/>
+          <p:cNvSpPr txBox="1"/>
+          <p:nvPr/>
+        </p:nvSpPr>
+        <p:spPr>
+          <a:xfrm>
+            <a:off x="9985248" y="5765292"/>
+            <a:ext cx="1097280" cy="73152"/>
+          </a:xfrm>
+          <a:prstGeom prst="rect">
+            <a:avLst/>
+          </a:prstGeom>
+          <a:noFill/>
+        </p:spPr>
+        <p:txBody>
+          <a:bodyPr wrap="square" lIns="36576" rIns="36576" tIns="18288" bIns="18288" anchor="t">
+            <a:spAutoFit/>
+          </a:bodyPr>
+          <a:lstStyle/>
+          <a:p>
+            <a:pPr algn="r"/>
+            <a:r>
+              <a:rPr sz="600" b="1">
+                <a:solidFill>
+                  <a:srgbClr val="647084"/>
+                </a:solidFill>
+                <a:latin typeface="Courier New"/>
+              </a:rPr>
+              <a:t>OVERALL</a:t>
+            </a:r>
+          </a:p>
+        </p:txBody>
+      </p:sp>
+      <p:sp>
+        <p:nvSpPr>
+          <p:cNvPr id="14" name="TextBox 13"/>
+          <p:cNvSpPr txBox="1"/>
+          <p:nvPr/>
+        </p:nvSpPr>
+        <p:spPr>
+          <a:xfrm>
+            <a:off x="841248" y="5925312"/>
+            <a:ext cx="10296144" cy="146304"/>
+          </a:xfrm>
+          <a:prstGeom prst="rect">
+            <a:avLst/>
+          </a:prstGeom>
+          <a:noFill/>
+        </p:spPr>
+        <p:txBody>
+          <a:bodyPr wrap="square" lIns="36576" rIns="36576" tIns="18288" bIns="18288" anchor="t">
+            <a:spAutoFit/>
+          </a:bodyPr>
+          <a:lstStyle/>
+          <a:p>
+            <a:pPr algn="l"/>
+            <a:r>
+              <a:rPr sz="700" b="0">
+                <a:solidFill>
+                  <a:srgbClr val="344256"/>
+                </a:solidFill>
+                <a:latin typeface="Arial"/>
+              </a:rPr>
+              <a:t>The result view focuses on the designed joint score because it is the evaluation contribution of the project. Plan-and-Solve leads prompt-only methods, while TIR shows the potential of tool-augmented solving.</a:t>
+            </a:r>
+          </a:p>
+        </p:txBody>
+      </p:sp>
+      <p:sp>
+        <p:nvSpPr>
+          <p:cNvPr id="15" name="Rectangle 14"/>
+          <p:cNvSpPr/>
+          <p:nvPr/>
+        </p:nvSpPr>
+        <p:spPr>
+          <a:xfrm>
             <a:off x="658368" y="6355080"/>
             <a:ext cx="10607040" cy="9144"/>
           </a:xfrm>
@@ -7744,7 +9794,7 @@
       </p:sp>
       <p:sp>
         <p:nvSpPr>
-          <p:cNvPr id="10" name="TextBox 9"/>
+          <p:cNvPr id="16" name="TextBox 15"/>
           <p:cNvSpPr txBox="1"/>
           <p:nvPr/>
         </p:nvSpPr>
@@ -7919,7 +9969,7 @@
                 </a:solidFill>
                 <a:latin typeface="Courier New"/>
               </a:rPr>
-              <a:t>METHOD-LEVEL FINDING</a:t>
+              <a:t>FACTOR-BASED DISCUSSION</a:t>
             </a:r>
           </a:p>
         </p:txBody>
@@ -7989,7 +10039,7 @@
                 </a:solidFill>
                 <a:latin typeface="Georgia"/>
               </a:rPr>
-              <a:t>Plan-and-Solve is the safest main contribution</a:t>
+              <a:t>Factor diagnostics separate efficient gains from expensive gains</a:t>
             </a:r>
           </a:p>
         </p:txBody>
@@ -8024,7 +10074,7 @@
                 </a:solidFill>
                 <a:latin typeface="Arial"/>
               </a:rPr>
-              <a:t>It improves the designed score while staying inside the prompt-only comparison setting.</a:t>
+              <a:t>Methods can improve correctness for very different behavioral reasons; the factor view reveals which one.</a:t>
             </a:r>
           </a:p>
         </p:txBody>
@@ -8089,7 +10139,7 @@
             <a:avLst/>
           </a:prstGeom>
           <a:solidFill>
-            <a:srgbClr val="1E5B9E"/>
+            <a:srgbClr val="B7791F"/>
           </a:solidFill>
           <a:ln>
             <a:noFill/>
@@ -8147,7 +10197,7 @@
                 </a:solidFill>
                 <a:latin typeface="Arial"/>
               </a:rPr>
-              <a:t>Best prompt-only story</a:t>
+              <a:t>Self-Consistency buys accuracy with hidden budget</a:t>
             </a:r>
           </a:p>
         </p:txBody>
@@ -8182,7 +10232,7 @@
                 </a:solidFill>
                 <a:latin typeface="Arial"/>
               </a:rPr>
-              <a:t>It is easy to explain: plan before solving, then answer clearly.</a:t>
+              <a:t>DeepSeek length factor drops to 0.010; Qwen still falls to 0.515. Five-path voting helps correctness, but the joint score exposes the trajectory cost.</a:t>
             </a:r>
           </a:p>
         </p:txBody>
@@ -8247,7 +10297,7 @@
             <a:avLst/>
           </a:prstGeom>
           <a:solidFill>
-            <a:srgbClr val="0F766E"/>
+            <a:srgbClr val="1E5B9E"/>
           </a:solidFill>
           <a:ln>
             <a:noFill/>
@@ -8305,7 +10355,7 @@
                 </a:solidFill>
                 <a:latin typeface="Arial"/>
               </a:rPr>
-              <a:t>Compute-aware</a:t>
+              <a:t>Plan-and-Solve improves by cleaner decomposition</a:t>
             </a:r>
           </a:p>
         </p:txBody>
@@ -8340,7 +10390,7 @@
                 </a:solidFill>
                 <a:latin typeface="Arial"/>
               </a:rPr>
-              <a:t>It avoids the five-path sampling budget of Self-Consistency.</a:t>
+              <a:t>Reflection stays near one on both models (0.983 / 0.979). The gain comes from better early planning rather than extra self-check loops.</a:t>
             </a:r>
           </a:p>
         </p:txBody>
@@ -8463,7 +10513,7 @@
                 </a:solidFill>
                 <a:latin typeface="Arial"/>
               </a:rPr>
-              <a:t>Empirical signal</a:t>
+              <a:t>TIR is strongest when execution errors matter</a:t>
             </a:r>
           </a:p>
         </p:txBody>
@@ -8498,7 +10548,7 @@
                 </a:solidFill>
                 <a:latin typeface="Arial"/>
               </a:rPr>
-              <a:t>It receives higher joint scores than all four assignment-aligned baselines.</a:t>
+              <a:t>It reaches J = 0.714 on DeepSeek and J = 0.668 on Qwen while keeping length factors at 0.726 and 0.972. Tool use improves execution without collapsing into runaway reasoning.</a:t>
             </a:r>
           </a:p>
         </p:txBody>
@@ -8506,6 +10556,242 @@
       <p:sp>
         <p:nvSpPr>
           <p:cNvPr id="20" name="Rectangle 19"/>
+          <p:cNvSpPr/>
+          <p:nvPr/>
+        </p:nvSpPr>
+        <p:spPr>
+          <a:xfrm>
+            <a:off x="694944" y="5650992"/>
+            <a:ext cx="10771632" cy="548640"/>
+          </a:xfrm>
+          <a:prstGeom prst="rect">
+            <a:avLst/>
+          </a:prstGeom>
+          <a:solidFill>
+            <a:srgbClr val="FFFFFF"/>
+          </a:solidFill>
+          <a:ln>
+            <a:solidFill>
+              <a:srgbClr val="CED6E3"/>
+            </a:solidFill>
+          </a:ln>
+        </p:spPr>
+        <p:style>
+          <a:lnRef idx="1">
+            <a:schemeClr val="accent1"/>
+          </a:lnRef>
+          <a:fillRef idx="3">
+            <a:schemeClr val="accent1"/>
+          </a:fillRef>
+          <a:effectRef idx="2">
+            <a:schemeClr val="accent1"/>
+          </a:effectRef>
+          <a:fontRef idx="minor">
+            <a:schemeClr val="lt1"/>
+          </a:fontRef>
+        </p:style>
+        <p:txBody>
+          <a:bodyPr rtlCol="0" anchor="ctr"/>
+          <a:lstStyle/>
+          <a:p>
+            <a:pPr algn="ctr"/>
+          </a:p>
+        </p:txBody>
+      </p:sp>
+      <p:sp>
+        <p:nvSpPr>
+          <p:cNvPr id="21" name="Rectangle 20"/>
+          <p:cNvSpPr/>
+          <p:nvPr/>
+        </p:nvSpPr>
+        <p:spPr>
+          <a:xfrm>
+            <a:off x="694944" y="5650992"/>
+            <a:ext cx="54864" cy="548640"/>
+          </a:xfrm>
+          <a:prstGeom prst="rect">
+            <a:avLst/>
+          </a:prstGeom>
+          <a:solidFill>
+            <a:srgbClr val="2F855A"/>
+          </a:solidFill>
+          <a:ln>
+            <a:noFill/>
+          </a:ln>
+        </p:spPr>
+        <p:style>
+          <a:lnRef idx="1">
+            <a:schemeClr val="accent1"/>
+          </a:lnRef>
+          <a:fillRef idx="3">
+            <a:schemeClr val="accent1"/>
+          </a:fillRef>
+          <a:effectRef idx="2">
+            <a:schemeClr val="accent1"/>
+          </a:effectRef>
+          <a:fontRef idx="minor">
+            <a:schemeClr val="lt1"/>
+          </a:fontRef>
+        </p:style>
+        <p:txBody>
+          <a:bodyPr rtlCol="0" anchor="ctr"/>
+          <a:lstStyle/>
+          <a:p>
+            <a:pPr algn="ctr"/>
+          </a:p>
+        </p:txBody>
+      </p:sp>
+      <p:sp>
+        <p:nvSpPr>
+          <p:cNvPr id="22" name="Rounded Rectangle 21"/>
+          <p:cNvSpPr/>
+          <p:nvPr/>
+        </p:nvSpPr>
+        <p:spPr>
+          <a:xfrm>
+            <a:off x="841248" y="5733288"/>
+            <a:ext cx="1325880" cy="146304"/>
+          </a:xfrm>
+          <a:prstGeom prst="roundRect">
+            <a:avLst/>
+          </a:prstGeom>
+          <a:solidFill>
+            <a:srgbClr val="EAF7EF"/>
+          </a:solidFill>
+          <a:ln>
+            <a:noFill/>
+          </a:ln>
+        </p:spPr>
+        <p:style>
+          <a:lnRef idx="1">
+            <a:schemeClr val="accent1"/>
+          </a:lnRef>
+          <a:fillRef idx="3">
+            <a:schemeClr val="accent1"/>
+          </a:fillRef>
+          <a:effectRef idx="2">
+            <a:schemeClr val="accent1"/>
+          </a:effectRef>
+          <a:fontRef idx="minor">
+            <a:schemeClr val="lt1"/>
+          </a:fontRef>
+        </p:style>
+        <p:txBody>
+          <a:bodyPr rtlCol="0" anchor="ctr"/>
+          <a:lstStyle/>
+          <a:p>
+            <a:pPr algn="ctr"/>
+          </a:p>
+        </p:txBody>
+      </p:sp>
+      <p:sp>
+        <p:nvSpPr>
+          <p:cNvPr id="23" name="TextBox 22"/>
+          <p:cNvSpPr txBox="1"/>
+          <p:nvPr/>
+        </p:nvSpPr>
+        <p:spPr>
+          <a:xfrm>
+            <a:off x="896112" y="5765292"/>
+            <a:ext cx="1170432" cy="73152"/>
+          </a:xfrm>
+          <a:prstGeom prst="rect">
+            <a:avLst/>
+          </a:prstGeom>
+          <a:noFill/>
+        </p:spPr>
+        <p:txBody>
+          <a:bodyPr wrap="square" lIns="36576" rIns="36576" tIns="18288" bIns="18288" anchor="t">
+            <a:spAutoFit/>
+          </a:bodyPr>
+          <a:lstStyle/>
+          <a:p>
+            <a:pPr algn="ctr"/>
+            <a:r>
+              <a:rPr sz="600" b="1">
+                <a:solidFill>
+                  <a:srgbClr val="2F855A"/>
+                </a:solidFill>
+                <a:latin typeface="Courier New"/>
+              </a:rPr>
+              <a:t>FACTOR READ</a:t>
+            </a:r>
+          </a:p>
+        </p:txBody>
+      </p:sp>
+      <p:sp>
+        <p:nvSpPr>
+          <p:cNvPr id="24" name="TextBox 23"/>
+          <p:cNvSpPr txBox="1"/>
+          <p:nvPr/>
+        </p:nvSpPr>
+        <p:spPr>
+          <a:xfrm>
+            <a:off x="9985248" y="5765292"/>
+            <a:ext cx="1097280" cy="73152"/>
+          </a:xfrm>
+          <a:prstGeom prst="rect">
+            <a:avLst/>
+          </a:prstGeom>
+          <a:noFill/>
+        </p:spPr>
+        <p:txBody>
+          <a:bodyPr wrap="square" lIns="36576" rIns="36576" tIns="18288" bIns="18288" anchor="t">
+            <a:spAutoFit/>
+          </a:bodyPr>
+          <a:lstStyle/>
+          <a:p>
+            <a:pPr algn="r"/>
+            <a:r>
+              <a:rPr sz="600" b="1">
+                <a:solidFill>
+                  <a:srgbClr val="647084"/>
+                </a:solidFill>
+                <a:latin typeface="Courier New"/>
+              </a:rPr>
+              <a:t>DIAGNOSTIC</a:t>
+            </a:r>
+          </a:p>
+        </p:txBody>
+      </p:sp>
+      <p:sp>
+        <p:nvSpPr>
+          <p:cNvPr id="25" name="TextBox 24"/>
+          <p:cNvSpPr txBox="1"/>
+          <p:nvPr/>
+        </p:nvSpPr>
+        <p:spPr>
+          <a:xfrm>
+            <a:off x="841248" y="5925312"/>
+            <a:ext cx="10296144" cy="146304"/>
+          </a:xfrm>
+          <a:prstGeom prst="rect">
+            <a:avLst/>
+          </a:prstGeom>
+          <a:noFill/>
+        </p:spPr>
+        <p:txBody>
+          <a:bodyPr wrap="square" lIns="36576" rIns="36576" tIns="18288" bIns="18288" anchor="t">
+            <a:spAutoFit/>
+          </a:bodyPr>
+          <a:lstStyle/>
+          <a:p>
+            <a:pPr algn="l"/>
+            <a:r>
+              <a:rPr sz="700" b="0">
+                <a:solidFill>
+                  <a:srgbClr val="344256"/>
+                </a:solidFill>
+                <a:latin typeface="Arial"/>
+              </a:rPr>
+              <a:t>The factor view reveals whether a score gain comes from cleaner decomposition, better execution, or simply paying for more hidden generation budget.</a:t>
+            </a:r>
+          </a:p>
+        </p:txBody>
+      </p:sp>
+      <p:sp>
+        <p:nvSpPr>
+          <p:cNvPr id="26" name="Rectangle 25"/>
           <p:cNvSpPr/>
           <p:nvPr/>
         </p:nvSpPr>
@@ -8548,7 +10834,7 @@
       </p:sp>
       <p:sp>
         <p:nvSpPr>
-          <p:cNvPr id="21" name="TextBox 20"/>
+          <p:cNvPr id="27" name="TextBox 26"/>
           <p:cNvSpPr txBox="1"/>
           <p:nvPr/>
         </p:nvSpPr>
@@ -8576,7 +10862,7 @@
                 </a:solidFill>
                 <a:latin typeface="Arial"/>
               </a:rPr>
-              <a:t>Plan-and-Solve is the primary proposed prompt-only method for the final presentation.</a:t>
+              <a:t>The factor view explains whether a gain comes from cleaner structure, more budget, or better execution.</a:t>
             </a:r>
           </a:p>
         </p:txBody>
@@ -8723,7 +11009,7 @@
                 </a:solidFill>
                 <a:latin typeface="Courier New"/>
               </a:rPr>
-              <a:t>AGENTIC FINDING</a:t>
+              <a:t>MODEL-LEVEL DISCUSSION</a:t>
             </a:r>
           </a:p>
         </p:txBody>
@@ -8793,7 +11079,7 @@
                 </a:solidFill>
                 <a:latin typeface="Georgia"/>
               </a:rPr>
-              <a:t>TIR is strong because it changes the problem-solving loop</a:t>
+              <a:t>Backbone strength changes how much structure can be exploited</a:t>
             </a:r>
           </a:p>
         </p:txBody>
@@ -8828,7 +11114,7 @@
                 </a:solidFill>
                 <a:latin typeface="Arial"/>
               </a:rPr>
-              <a:t>The caveat is not a weakness; it is the research point.</a:t>
+              <a:t>Method gains are real on both models, but the stronger reasoning prior converts them more effectively on hard cases.</a:t>
             </a:r>
           </a:p>
         </p:txBody>
@@ -8842,7 +11128,7 @@
         <p:spPr>
           <a:xfrm>
             <a:off x="749808" y="2139696"/>
-            <a:ext cx="5175504" cy="2057400"/>
+            <a:ext cx="3395472" cy="2057400"/>
           </a:xfrm>
           <a:prstGeom prst="rect">
             <a:avLst/>
@@ -8887,13 +11173,13 @@
         <p:spPr>
           <a:xfrm>
             <a:off x="749808" y="2139696"/>
-            <a:ext cx="5175504" cy="64008"/>
+            <a:ext cx="3395472" cy="64008"/>
           </a:xfrm>
           <a:prstGeom prst="rect">
             <a:avLst/>
           </a:prstGeom>
           <a:solidFill>
-            <a:srgbClr val="B42318"/>
+            <a:srgbClr val="1E5B9E"/>
           </a:solidFill>
           <a:ln>
             <a:noFill/>
@@ -8930,7 +11216,7 @@
         <p:spPr>
           <a:xfrm>
             <a:off x="914400" y="2340864"/>
-            <a:ext cx="4846320" cy="310896"/>
+            <a:ext cx="3066288" cy="310896"/>
           </a:xfrm>
           <a:prstGeom prst="rect">
             <a:avLst/>
@@ -8951,7 +11237,7 @@
                 </a:solidFill>
                 <a:latin typeface="Arial"/>
               </a:rPr>
-              <a:t>Not prompt-only</a:t>
+              <a:t>Both backbones benefit from explicit structure</a:t>
             </a:r>
           </a:p>
         </p:txBody>
@@ -8965,7 +11251,7 @@
         <p:spPr>
           <a:xfrm>
             <a:off x="914400" y="2798063"/>
-            <a:ext cx="4846320" cy="1289304"/>
+            <a:ext cx="3066288" cy="1289304"/>
           </a:xfrm>
           <a:prstGeom prst="rect">
             <a:avLst/>
@@ -8986,7 +11272,7 @@
                 </a:solidFill>
                 <a:latin typeface="Arial"/>
               </a:rPr>
-              <a:t>The model receives a Python observation, so it is not directly comparable with static prompts.</a:t>
+              <a:t>Plan-and-Solve adds +0.184 joint over CoT zero on DeepSeek and +0.139 on Qwen. The decomposition stage helps even without external tools.</a:t>
             </a:r>
           </a:p>
         </p:txBody>
@@ -8999,8 +11285,8 @@
         </p:nvSpPr>
         <p:spPr>
           <a:xfrm>
-            <a:off x="6089904" y="2139696"/>
-            <a:ext cx="5175504" cy="2057400"/>
+            <a:off x="4309872" y="2139696"/>
+            <a:ext cx="3395472" cy="2057400"/>
           </a:xfrm>
           <a:prstGeom prst="rect">
             <a:avLst/>
@@ -9044,8 +11330,8 @@
         </p:nvSpPr>
         <p:spPr>
           <a:xfrm>
-            <a:off x="6089904" y="2139696"/>
-            <a:ext cx="5175504" cy="64008"/>
+            <a:off x="4309872" y="2139696"/>
+            <a:ext cx="3395472" cy="64008"/>
           </a:xfrm>
           <a:prstGeom prst="rect">
             <a:avLst/>
@@ -9087,8 +11373,8 @@
         </p:nvSpPr>
         <p:spPr>
           <a:xfrm>
-            <a:off x="6254496" y="2340864"/>
-            <a:ext cx="4846320" cy="310896"/>
+            <a:off x="4474464" y="2340864"/>
+            <a:ext cx="3066288" cy="310896"/>
           </a:xfrm>
           <a:prstGeom prst="rect">
             <a:avLst/>
@@ -9109,7 +11395,7 @@
                 </a:solidFill>
                 <a:latin typeface="Arial"/>
               </a:rPr>
-              <a:t>Agentic value</a:t>
+              <a:t>A stronger reasoning prior converts tools into bigger hard-split gains</a:t>
             </a:r>
           </a:p>
         </p:txBody>
@@ -9122,8 +11408,8 @@
         </p:nvSpPr>
         <p:spPr>
           <a:xfrm>
-            <a:off x="6254496" y="2798063"/>
-            <a:ext cx="4846320" cy="1289304"/>
+            <a:off x="4474464" y="2798063"/>
+            <a:ext cx="3066288" cy="1289304"/>
           </a:xfrm>
           <a:prstGeom prst="rect">
             <a:avLst/>
@@ -9144,7 +11430,7 @@
                 </a:solidFill>
                 <a:latin typeface="Arial"/>
               </a:rPr>
-              <a:t>The loop externalizes arithmetic and symbolic execution, then feeds evidence back into reasoning.</a:t>
+              <a:t>On AIME 2024, TIR reaches 0.528 on DeepSeek versus 0.317 on Qwen. The hardest split is where backbone quality most clearly limits the return from agentic control.</a:t>
             </a:r>
           </a:p>
         </p:txBody>
@@ -9152,6 +11438,400 @@
       <p:sp>
         <p:nvSpPr>
           <p:cNvPr id="16" name="Rectangle 15"/>
+          <p:cNvSpPr/>
+          <p:nvPr/>
+        </p:nvSpPr>
+        <p:spPr>
+          <a:xfrm>
+            <a:off x="7869936" y="2139696"/>
+            <a:ext cx="3395472" cy="2057400"/>
+          </a:xfrm>
+          <a:prstGeom prst="rect">
+            <a:avLst/>
+          </a:prstGeom>
+          <a:solidFill>
+            <a:srgbClr val="FFFFFF"/>
+          </a:solidFill>
+          <a:ln>
+            <a:solidFill>
+              <a:srgbClr val="CED6E3"/>
+            </a:solidFill>
+          </a:ln>
+        </p:spPr>
+        <p:style>
+          <a:lnRef idx="1">
+            <a:schemeClr val="accent1"/>
+          </a:lnRef>
+          <a:fillRef idx="3">
+            <a:schemeClr val="accent1"/>
+          </a:fillRef>
+          <a:effectRef idx="2">
+            <a:schemeClr val="accent1"/>
+          </a:effectRef>
+          <a:fontRef idx="minor">
+            <a:schemeClr val="lt1"/>
+          </a:fontRef>
+        </p:style>
+        <p:txBody>
+          <a:bodyPr rtlCol="0" anchor="ctr"/>
+          <a:lstStyle/>
+          <a:p>
+            <a:pPr algn="ctr"/>
+          </a:p>
+        </p:txBody>
+      </p:sp>
+      <p:sp>
+        <p:nvSpPr>
+          <p:cNvPr id="17" name="Rectangle 16"/>
+          <p:cNvSpPr/>
+          <p:nvPr/>
+        </p:nvSpPr>
+        <p:spPr>
+          <a:xfrm>
+            <a:off x="7869936" y="2139696"/>
+            <a:ext cx="3395472" cy="64008"/>
+          </a:xfrm>
+          <a:prstGeom prst="rect">
+            <a:avLst/>
+          </a:prstGeom>
+          <a:solidFill>
+            <a:srgbClr val="B7791F"/>
+          </a:solidFill>
+          <a:ln>
+            <a:noFill/>
+          </a:ln>
+        </p:spPr>
+        <p:style>
+          <a:lnRef idx="1">
+            <a:schemeClr val="accent1"/>
+          </a:lnRef>
+          <a:fillRef idx="3">
+            <a:schemeClr val="accent1"/>
+          </a:fillRef>
+          <a:effectRef idx="2">
+            <a:schemeClr val="accent1"/>
+          </a:effectRef>
+          <a:fontRef idx="minor">
+            <a:schemeClr val="lt1"/>
+          </a:fontRef>
+        </p:style>
+        <p:txBody>
+          <a:bodyPr rtlCol="0" anchor="ctr"/>
+          <a:lstStyle/>
+          <a:p>
+            <a:pPr algn="ctr"/>
+          </a:p>
+        </p:txBody>
+      </p:sp>
+      <p:sp>
+        <p:nvSpPr>
+          <p:cNvPr id="18" name="TextBox 17"/>
+          <p:cNvSpPr txBox="1"/>
+          <p:nvPr/>
+        </p:nvSpPr>
+        <p:spPr>
+          <a:xfrm>
+            <a:off x="8034528" y="2340864"/>
+            <a:ext cx="3066288" cy="310896"/>
+          </a:xfrm>
+          <a:prstGeom prst="rect">
+            <a:avLst/>
+          </a:prstGeom>
+          <a:noFill/>
+        </p:spPr>
+        <p:txBody>
+          <a:bodyPr wrap="square" lIns="36576" rIns="36576" tIns="18288" bIns="18288" anchor="t">
+            <a:spAutoFit/>
+          </a:bodyPr>
+          <a:lstStyle/>
+          <a:p>
+            <a:pPr algn="l"/>
+            <a:r>
+              <a:rPr sz="1500" b="1">
+                <a:solidFill>
+                  <a:srgbClr val="18212F"/>
+                </a:solidFill>
+                <a:latin typeface="Arial"/>
+              </a:rPr>
+              <a:t>Interpretation: structure helps both, but not for the same reason</a:t>
+            </a:r>
+          </a:p>
+        </p:txBody>
+      </p:sp>
+      <p:sp>
+        <p:nvSpPr>
+          <p:cNvPr id="19" name="TextBox 18"/>
+          <p:cNvSpPr txBox="1"/>
+          <p:nvPr/>
+        </p:nvSpPr>
+        <p:spPr>
+          <a:xfrm>
+            <a:off x="8034528" y="2798063"/>
+            <a:ext cx="3066288" cy="1289304"/>
+          </a:xfrm>
+          <a:prstGeom prst="rect">
+            <a:avLst/>
+          </a:prstGeom>
+          <a:noFill/>
+        </p:spPr>
+        <p:txBody>
+          <a:bodyPr wrap="square" lIns="36576" rIns="36576" tIns="18288" bIns="18288" anchor="t">
+            <a:spAutoFit/>
+          </a:bodyPr>
+          <a:lstStyle/>
+          <a:p>
+            <a:pPr algn="l"/>
+            <a:r>
+              <a:rPr sz="1000" b="0">
+                <a:solidFill>
+                  <a:srgbClr val="647084"/>
+                </a:solidFill>
+                <a:latin typeface="Arial"/>
+              </a:rPr>
+              <a:t>DeepSeek gets the larger absolute gain with TIR (+0.203), while Qwen keeps a tighter efficiency profile (0.972). One model converts extra structure into harder-problem accuracy; the other benefits more from controlled execution.</a:t>
+            </a:r>
+          </a:p>
+        </p:txBody>
+      </p:sp>
+      <p:sp>
+        <p:nvSpPr>
+          <p:cNvPr id="20" name="Rectangle 19"/>
+          <p:cNvSpPr/>
+          <p:nvPr/>
+        </p:nvSpPr>
+        <p:spPr>
+          <a:xfrm>
+            <a:off x="694944" y="5650992"/>
+            <a:ext cx="10771632" cy="548640"/>
+          </a:xfrm>
+          <a:prstGeom prst="rect">
+            <a:avLst/>
+          </a:prstGeom>
+          <a:solidFill>
+            <a:srgbClr val="FFFFFF"/>
+          </a:solidFill>
+          <a:ln>
+            <a:solidFill>
+              <a:srgbClr val="CED6E3"/>
+            </a:solidFill>
+          </a:ln>
+        </p:spPr>
+        <p:style>
+          <a:lnRef idx="1">
+            <a:schemeClr val="accent1"/>
+          </a:lnRef>
+          <a:fillRef idx="3">
+            <a:schemeClr val="accent1"/>
+          </a:fillRef>
+          <a:effectRef idx="2">
+            <a:schemeClr val="accent1"/>
+          </a:effectRef>
+          <a:fontRef idx="minor">
+            <a:schemeClr val="lt1"/>
+          </a:fontRef>
+        </p:style>
+        <p:txBody>
+          <a:bodyPr rtlCol="0" anchor="ctr"/>
+          <a:lstStyle/>
+          <a:p>
+            <a:pPr algn="ctr"/>
+          </a:p>
+        </p:txBody>
+      </p:sp>
+      <p:sp>
+        <p:nvSpPr>
+          <p:cNvPr id="21" name="Rectangle 20"/>
+          <p:cNvSpPr/>
+          <p:nvPr/>
+        </p:nvSpPr>
+        <p:spPr>
+          <a:xfrm>
+            <a:off x="694944" y="5650992"/>
+            <a:ext cx="54864" cy="548640"/>
+          </a:xfrm>
+          <a:prstGeom prst="rect">
+            <a:avLst/>
+          </a:prstGeom>
+          <a:solidFill>
+            <a:srgbClr val="1E5B9E"/>
+          </a:solidFill>
+          <a:ln>
+            <a:noFill/>
+          </a:ln>
+        </p:spPr>
+        <p:style>
+          <a:lnRef idx="1">
+            <a:schemeClr val="accent1"/>
+          </a:lnRef>
+          <a:fillRef idx="3">
+            <a:schemeClr val="accent1"/>
+          </a:fillRef>
+          <a:effectRef idx="2">
+            <a:schemeClr val="accent1"/>
+          </a:effectRef>
+          <a:fontRef idx="minor">
+            <a:schemeClr val="lt1"/>
+          </a:fontRef>
+        </p:style>
+        <p:txBody>
+          <a:bodyPr rtlCol="0" anchor="ctr"/>
+          <a:lstStyle/>
+          <a:p>
+            <a:pPr algn="ctr"/>
+          </a:p>
+        </p:txBody>
+      </p:sp>
+      <p:sp>
+        <p:nvSpPr>
+          <p:cNvPr id="22" name="Rounded Rectangle 21"/>
+          <p:cNvSpPr/>
+          <p:nvPr/>
+        </p:nvSpPr>
+        <p:spPr>
+          <a:xfrm>
+            <a:off x="841248" y="5733288"/>
+            <a:ext cx="1325880" cy="146304"/>
+          </a:xfrm>
+          <a:prstGeom prst="roundRect">
+            <a:avLst/>
+          </a:prstGeom>
+          <a:solidFill>
+            <a:srgbClr val="EAF2FF"/>
+          </a:solidFill>
+          <a:ln>
+            <a:noFill/>
+          </a:ln>
+        </p:spPr>
+        <p:style>
+          <a:lnRef idx="1">
+            <a:schemeClr val="accent1"/>
+          </a:lnRef>
+          <a:fillRef idx="3">
+            <a:schemeClr val="accent1"/>
+          </a:fillRef>
+          <a:effectRef idx="2">
+            <a:schemeClr val="accent1"/>
+          </a:effectRef>
+          <a:fontRef idx="minor">
+            <a:schemeClr val="lt1"/>
+          </a:fontRef>
+        </p:style>
+        <p:txBody>
+          <a:bodyPr rtlCol="0" anchor="ctr"/>
+          <a:lstStyle/>
+          <a:p>
+            <a:pPr algn="ctr"/>
+          </a:p>
+        </p:txBody>
+      </p:sp>
+      <p:sp>
+        <p:nvSpPr>
+          <p:cNvPr id="23" name="TextBox 22"/>
+          <p:cNvSpPr txBox="1"/>
+          <p:nvPr/>
+        </p:nvSpPr>
+        <p:spPr>
+          <a:xfrm>
+            <a:off x="896112" y="5765292"/>
+            <a:ext cx="1170432" cy="73152"/>
+          </a:xfrm>
+          <a:prstGeom prst="rect">
+            <a:avLst/>
+          </a:prstGeom>
+          <a:noFill/>
+        </p:spPr>
+        <p:txBody>
+          <a:bodyPr wrap="square" lIns="36576" rIns="36576" tIns="18288" bIns="18288" anchor="t">
+            <a:spAutoFit/>
+          </a:bodyPr>
+          <a:lstStyle/>
+          <a:p>
+            <a:pPr algn="ctr"/>
+            <a:r>
+              <a:rPr sz="600" b="1">
+                <a:solidFill>
+                  <a:srgbClr val="1E5B9E"/>
+                </a:solidFill>
+                <a:latin typeface="Courier New"/>
+              </a:rPr>
+              <a:t>MODEL LENS</a:t>
+            </a:r>
+          </a:p>
+        </p:txBody>
+      </p:sp>
+      <p:sp>
+        <p:nvSpPr>
+          <p:cNvPr id="24" name="TextBox 23"/>
+          <p:cNvSpPr txBox="1"/>
+          <p:nvPr/>
+        </p:nvSpPr>
+        <p:spPr>
+          <a:xfrm>
+            <a:off x="9985248" y="5765292"/>
+            <a:ext cx="1097280" cy="73152"/>
+          </a:xfrm>
+          <a:prstGeom prst="rect">
+            <a:avLst/>
+          </a:prstGeom>
+          <a:noFill/>
+        </p:spPr>
+        <p:txBody>
+          <a:bodyPr wrap="square" lIns="36576" rIns="36576" tIns="18288" bIns="18288" anchor="t">
+            <a:spAutoFit/>
+          </a:bodyPr>
+          <a:lstStyle/>
+          <a:p>
+            <a:pPr algn="r"/>
+            <a:r>
+              <a:rPr sz="600" b="1">
+                <a:solidFill>
+                  <a:srgbClr val="647084"/>
+                </a:solidFill>
+                <a:latin typeface="Courier New"/>
+              </a:rPr>
+              <a:t>BACKBONE</a:t>
+            </a:r>
+          </a:p>
+        </p:txBody>
+      </p:sp>
+      <p:sp>
+        <p:nvSpPr>
+          <p:cNvPr id="25" name="TextBox 24"/>
+          <p:cNvSpPr txBox="1"/>
+          <p:nvPr/>
+        </p:nvSpPr>
+        <p:spPr>
+          <a:xfrm>
+            <a:off x="841248" y="5925312"/>
+            <a:ext cx="10296144" cy="146304"/>
+          </a:xfrm>
+          <a:prstGeom prst="rect">
+            <a:avLst/>
+          </a:prstGeom>
+          <a:noFill/>
+        </p:spPr>
+        <p:txBody>
+          <a:bodyPr wrap="square" lIns="36576" rIns="36576" tIns="18288" bIns="18288" anchor="t">
+            <a:spAutoFit/>
+          </a:bodyPr>
+          <a:lstStyle/>
+          <a:p>
+            <a:pPr algn="l"/>
+            <a:r>
+              <a:rPr sz="700" b="0">
+                <a:solidFill>
+                  <a:srgbClr val="344256"/>
+                </a:solidFill>
+                <a:latin typeface="Arial"/>
+              </a:rPr>
+              <a:t>Method gains depend on model quality as well as prompt design. The stronger backbone converts the same structured scaffold into larger hard-split gains.</a:t>
+            </a:r>
+          </a:p>
+        </p:txBody>
+      </p:sp>
+      <p:sp>
+        <p:nvSpPr>
+          <p:cNvPr id="26" name="Rectangle 25"/>
           <p:cNvSpPr/>
           <p:nvPr/>
         </p:nvSpPr>
@@ -9194,7 +11874,7 @@
       </p:sp>
       <p:sp>
         <p:nvSpPr>
-          <p:cNvPr id="17" name="TextBox 16"/>
+          <p:cNvPr id="27" name="TextBox 26"/>
           <p:cNvSpPr txBox="1"/>
           <p:nvPr/>
         </p:nvSpPr>
@@ -9222,7 +11902,7 @@
                 </a:solidFill>
                 <a:latin typeface="Arial"/>
               </a:rPr>
-              <a:t>TIR points beyond static prompting toward small solver agents with reliable tools.</a:t>
+              <a:t>Structure helps both backbones; stronger priors turn it into bigger hard-split gains.</a:t>
             </a:r>
           </a:p>
         </p:txBody>
@@ -9439,7 +12119,7 @@
                 </a:solidFill>
                 <a:latin typeface="Georgia"/>
               </a:rPr>
-              <a:t>The three datasets play different diagnostic roles</a:t>
+              <a:t>Dataset joint-score matrix shows where the gains really transfer</a:t>
             </a:r>
           </a:p>
         </p:txBody>
@@ -9474,7 +12154,7 @@
                 </a:solidFill>
                 <a:latin typeface="Arial"/>
               </a:rPr>
-              <a:t>The dataset breakdown is interpreted qualitatively, not as a standalone metric slide.</a:t>
+              <a:t>GSM8K reveals decomposition gains early; AIME 2024 checks whether those gains survive on harder symbolic reasoning.</a:t>
             </a:r>
           </a:p>
         </p:txBody>
@@ -9487,8 +12167,8 @@
         </p:nvSpPr>
         <p:spPr>
           <a:xfrm>
-            <a:off x="749808" y="2139696"/>
-            <a:ext cx="3395472" cy="2057400"/>
+            <a:off x="749808" y="1901952"/>
+            <a:ext cx="5010912" cy="3456432"/>
           </a:xfrm>
           <a:prstGeom prst="rect">
             <a:avLst/>
@@ -9532,14 +12212,14 @@
         </p:nvSpPr>
         <p:spPr>
           <a:xfrm>
-            <a:off x="749808" y="2139696"/>
-            <a:ext cx="3395472" cy="64008"/>
+            <a:off x="749808" y="1901952"/>
+            <a:ext cx="5010912" cy="73152"/>
           </a:xfrm>
           <a:prstGeom prst="rect">
             <a:avLst/>
           </a:prstGeom>
           <a:solidFill>
-            <a:srgbClr val="2F855A"/>
+            <a:srgbClr val="1E5B9E"/>
           </a:solidFill>
           <a:ln>
             <a:noFill/>
@@ -9575,8 +12255,8 @@
         </p:nvSpPr>
         <p:spPr>
           <a:xfrm>
-            <a:off x="914400" y="2340864"/>
-            <a:ext cx="3066288" cy="310896"/>
+            <a:off x="896112" y="2029968"/>
+            <a:ext cx="4718304" cy="201168"/>
           </a:xfrm>
           <a:prstGeom prst="rect">
             <a:avLst/>
@@ -9591,52 +12271,675 @@
           <a:p>
             <a:pPr algn="l"/>
             <a:r>
-              <a:rPr sz="1500" b="1">
+              <a:rPr sz="1200" b="1">
                 <a:solidFill>
                   <a:srgbClr val="18212F"/>
                 </a:solidFill>
                 <a:latin typeface="Arial"/>
               </a:rPr>
-              <a:t>GSM8K</a:t>
-            </a:r>
-          </a:p>
-        </p:txBody>
-      </p:sp>
-      <p:sp>
-        <p:nvSpPr>
-          <p:cNvPr id="11" name="TextBox 10"/>
-          <p:cNvSpPr txBox="1"/>
-          <p:nvPr/>
-        </p:nvSpPr>
-        <p:spPr>
-          <a:xfrm>
-            <a:off x="914400" y="2798063"/>
-            <a:ext cx="3066288" cy="1289304"/>
-          </a:xfrm>
-          <a:prstGeom prst="rect">
-            <a:avLst/>
-          </a:prstGeom>
-          <a:noFill/>
-        </p:spPr>
-        <p:txBody>
-          <a:bodyPr wrap="square" lIns="36576" rIns="36576" tIns="18288" bIns="18288" anchor="t">
-            <a:spAutoFit/>
-          </a:bodyPr>
-          <a:lstStyle/>
-          <a:p>
-            <a:pPr algn="l"/>
-            <a:r>
-              <a:rPr sz="1000" b="0">
-                <a:solidFill>
-                  <a:srgbClr val="647084"/>
-                </a:solidFill>
-                <a:latin typeface="Arial"/>
-              </a:rPr>
-              <a:t>Grade-school word problems; decomposition and controlled execution help most directly.</a:t>
-            </a:r>
-          </a:p>
-        </p:txBody>
-      </p:sp>
+              <a:t>DeepSeek joint score by dataset</a:t>
+            </a:r>
+          </a:p>
+        </p:txBody>
+      </p:sp>
+      <p:graphicFrame>
+        <p:nvGraphicFramePr>
+          <p:cNvPr id="11" name="Table 10"/>
+          <p:cNvGraphicFramePr>
+            <a:graphicFrameLocks noGrp="1"/>
+          </p:cNvGraphicFramePr>
+          <p:nvPr/>
+        </p:nvGraphicFramePr>
+        <p:xfrm>
+          <a:off x="859536" y="2340864"/>
+          <a:ext cx="4791456" cy="2706624"/>
+        </p:xfrm>
+        <a:graphic>
+          <a:graphicData uri="http://schemas.openxmlformats.org/drawingml/2006/table">
+            <a:tbl>
+              <a:tblPr firstRow="1" bandRow="1">
+                <a:tableStyleId>{5C22544A-7EE6-4342-B048-85BDC9FD1C3A}</a:tableStyleId>
+              </a:tblPr>
+              <a:tblGrid>
+                <a:gridCol w="1197864"/>
+                <a:gridCol w="1197864"/>
+                <a:gridCol w="1197864"/>
+                <a:gridCol w="1197864"/>
+              </a:tblGrid>
+              <a:tr h="386660">
+                <a:tc>
+                  <a:txBody>
+                    <a:bodyPr/>
+                    <a:lstStyle/>
+                    <a:p>
+                      <a:r>
+                        <a:rPr sz="750" b="1">
+                          <a:solidFill>
+                            <a:srgbClr val="344256"/>
+                          </a:solidFill>
+                          <a:latin typeface="Courier New"/>
+                        </a:rPr>
+                        <a:t>Method</a:t>
+                      </a:r>
+                    </a:p>
+                  </a:txBody>
+                  <a:tcPr>
+                    <a:solidFill>
+                      <a:srgbClr val="F7F9FC"/>
+                    </a:solidFill>
+                  </a:tcPr>
+                </a:tc>
+                <a:tc>
+                  <a:txBody>
+                    <a:bodyPr/>
+                    <a:lstStyle/>
+                    <a:p>
+                      <a:r>
+                        <a:rPr sz="750" b="1">
+                          <a:solidFill>
+                            <a:srgbClr val="344256"/>
+                          </a:solidFill>
+                          <a:latin typeface="Courier New"/>
+                        </a:rPr>
+                        <a:t>MATH-500</a:t>
+                      </a:r>
+                    </a:p>
+                  </a:txBody>
+                  <a:tcPr>
+                    <a:solidFill>
+                      <a:srgbClr val="F7F9FC"/>
+                    </a:solidFill>
+                  </a:tcPr>
+                </a:tc>
+                <a:tc>
+                  <a:txBody>
+                    <a:bodyPr/>
+                    <a:lstStyle/>
+                    <a:p>
+                      <a:r>
+                        <a:rPr sz="750" b="1">
+                          <a:solidFill>
+                            <a:srgbClr val="344256"/>
+                          </a:solidFill>
+                          <a:latin typeface="Courier New"/>
+                        </a:rPr>
+                        <a:t>GSM8K</a:t>
+                      </a:r>
+                    </a:p>
+                  </a:txBody>
+                  <a:tcPr>
+                    <a:solidFill>
+                      <a:srgbClr val="F7F9FC"/>
+                    </a:solidFill>
+                  </a:tcPr>
+                </a:tc>
+                <a:tc>
+                  <a:txBody>
+                    <a:bodyPr/>
+                    <a:lstStyle/>
+                    <a:p>
+                      <a:r>
+                        <a:rPr sz="750" b="1">
+                          <a:solidFill>
+                            <a:srgbClr val="344256"/>
+                          </a:solidFill>
+                          <a:latin typeface="Courier New"/>
+                        </a:rPr>
+                        <a:t>AIME 2024</a:t>
+                      </a:r>
+                    </a:p>
+                  </a:txBody>
+                  <a:tcPr>
+                    <a:solidFill>
+                      <a:srgbClr val="F7F9FC"/>
+                    </a:solidFill>
+                  </a:tcPr>
+                </a:tc>
+              </a:tr>
+              <a:tr h="386660">
+                <a:tc>
+                  <a:txBody>
+                    <a:bodyPr/>
+                    <a:lstStyle/>
+                    <a:p>
+                      <a:r>
+                        <a:rPr sz="750" b="1">
+                          <a:solidFill>
+                            <a:srgbClr val="18212F"/>
+                          </a:solidFill>
+                          <a:latin typeface="Arial"/>
+                        </a:rPr>
+                        <a:t>CoT zero</a:t>
+                      </a:r>
+                    </a:p>
+                  </a:txBody>
+                  <a:tcPr>
+                    <a:solidFill>
+                      <a:srgbClr val="FFFFFF"/>
+                    </a:solidFill>
+                  </a:tcPr>
+                </a:tc>
+                <a:tc>
+                  <a:txBody>
+                    <a:bodyPr/>
+                    <a:lstStyle/>
+                    <a:p>
+                      <a:r>
+                        <a:rPr sz="750" b="1">
+                          <a:solidFill>
+                            <a:srgbClr val="1E5B9E"/>
+                          </a:solidFill>
+                          <a:latin typeface="Courier New"/>
+                        </a:rPr>
+                        <a:t>0.554</a:t>
+                      </a:r>
+                    </a:p>
+                  </a:txBody>
+                  <a:tcPr>
+                    <a:solidFill>
+                      <a:srgbClr val="EAF2FF"/>
+                    </a:solidFill>
+                  </a:tcPr>
+                </a:tc>
+                <a:tc>
+                  <a:txBody>
+                    <a:bodyPr/>
+                    <a:lstStyle/>
+                    <a:p>
+                      <a:r>
+                        <a:rPr sz="750" b="1">
+                          <a:solidFill>
+                            <a:srgbClr val="0F766E"/>
+                          </a:solidFill>
+                          <a:latin typeface="Courier New"/>
+                        </a:rPr>
+                        <a:t>0.631</a:t>
+                      </a:r>
+                    </a:p>
+                  </a:txBody>
+                  <a:tcPr>
+                    <a:solidFill>
+                      <a:srgbClr val="E7F6F4"/>
+                    </a:solidFill>
+                  </a:tcPr>
+                </a:tc>
+                <a:tc>
+                  <a:txBody>
+                    <a:bodyPr/>
+                    <a:lstStyle/>
+                    <a:p>
+                      <a:r>
+                        <a:rPr sz="750" b="1">
+                          <a:solidFill>
+                            <a:srgbClr val="B7791F"/>
+                          </a:solidFill>
+                          <a:latin typeface="Courier New"/>
+                        </a:rPr>
+                        <a:t>0.240</a:t>
+                      </a:r>
+                    </a:p>
+                  </a:txBody>
+                  <a:tcPr>
+                    <a:solidFill>
+                      <a:srgbClr val="FFF3D6"/>
+                    </a:solidFill>
+                  </a:tcPr>
+                </a:tc>
+              </a:tr>
+              <a:tr h="386660">
+                <a:tc>
+                  <a:txBody>
+                    <a:bodyPr/>
+                    <a:lstStyle/>
+                    <a:p>
+                      <a:r>
+                        <a:rPr sz="750" b="1">
+                          <a:solidFill>
+                            <a:srgbClr val="18212F"/>
+                          </a:solidFill>
+                          <a:latin typeface="Arial"/>
+                        </a:rPr>
+                        <a:t>CoT few</a:t>
+                      </a:r>
+                    </a:p>
+                  </a:txBody>
+                  <a:tcPr>
+                    <a:solidFill>
+                      <a:srgbClr val="FFFFFF"/>
+                    </a:solidFill>
+                  </a:tcPr>
+                </a:tc>
+                <a:tc>
+                  <a:txBody>
+                    <a:bodyPr/>
+                    <a:lstStyle/>
+                    <a:p>
+                      <a:r>
+                        <a:rPr sz="750" b="1">
+                          <a:solidFill>
+                            <a:srgbClr val="1E5B9E"/>
+                          </a:solidFill>
+                          <a:latin typeface="Courier New"/>
+                        </a:rPr>
+                        <a:t>0.563</a:t>
+                      </a:r>
+                    </a:p>
+                  </a:txBody>
+                  <a:tcPr>
+                    <a:solidFill>
+                      <a:srgbClr val="EAF2FF"/>
+                    </a:solidFill>
+                  </a:tcPr>
+                </a:tc>
+                <a:tc>
+                  <a:txBody>
+                    <a:bodyPr/>
+                    <a:lstStyle/>
+                    <a:p>
+                      <a:r>
+                        <a:rPr sz="750" b="1">
+                          <a:solidFill>
+                            <a:srgbClr val="0F766E"/>
+                          </a:solidFill>
+                          <a:latin typeface="Courier New"/>
+                        </a:rPr>
+                        <a:t>0.616</a:t>
+                      </a:r>
+                    </a:p>
+                  </a:txBody>
+                  <a:tcPr>
+                    <a:solidFill>
+                      <a:srgbClr val="E7F6F4"/>
+                    </a:solidFill>
+                  </a:tcPr>
+                </a:tc>
+                <a:tc>
+                  <a:txBody>
+                    <a:bodyPr/>
+                    <a:lstStyle/>
+                    <a:p>
+                      <a:r>
+                        <a:rPr sz="750" b="1">
+                          <a:solidFill>
+                            <a:srgbClr val="B7791F"/>
+                          </a:solidFill>
+                          <a:latin typeface="Courier New"/>
+                        </a:rPr>
+                        <a:t>0.200</a:t>
+                      </a:r>
+                    </a:p>
+                  </a:txBody>
+                  <a:tcPr>
+                    <a:solidFill>
+                      <a:srgbClr val="FFF3D6"/>
+                    </a:solidFill>
+                  </a:tcPr>
+                </a:tc>
+              </a:tr>
+              <a:tr h="386660">
+                <a:tc>
+                  <a:txBody>
+                    <a:bodyPr/>
+                    <a:lstStyle/>
+                    <a:p>
+                      <a:r>
+                        <a:rPr sz="750" b="1">
+                          <a:solidFill>
+                            <a:srgbClr val="18212F"/>
+                          </a:solidFill>
+                          <a:latin typeface="Arial"/>
+                        </a:rPr>
+                        <a:t>Self-Refine</a:t>
+                      </a:r>
+                    </a:p>
+                  </a:txBody>
+                  <a:tcPr>
+                    <a:solidFill>
+                      <a:srgbClr val="FFFFFF"/>
+                    </a:solidFill>
+                  </a:tcPr>
+                </a:tc>
+                <a:tc>
+                  <a:txBody>
+                    <a:bodyPr/>
+                    <a:lstStyle/>
+                    <a:p>
+                      <a:r>
+                        <a:rPr sz="750" b="1">
+                          <a:solidFill>
+                            <a:srgbClr val="0F766E"/>
+                          </a:solidFill>
+                          <a:latin typeface="Courier New"/>
+                        </a:rPr>
+                        <a:t>0.635</a:t>
+                      </a:r>
+                    </a:p>
+                  </a:txBody>
+                  <a:tcPr>
+                    <a:solidFill>
+                      <a:srgbClr val="E7F6F4"/>
+                    </a:solidFill>
+                  </a:tcPr>
+                </a:tc>
+                <a:tc>
+                  <a:txBody>
+                    <a:bodyPr/>
+                    <a:lstStyle/>
+                    <a:p>
+                      <a:r>
+                        <a:rPr sz="750" b="1">
+                          <a:solidFill>
+                            <a:srgbClr val="0F766E"/>
+                          </a:solidFill>
+                          <a:latin typeface="Courier New"/>
+                        </a:rPr>
+                        <a:t>0.705</a:t>
+                      </a:r>
+                    </a:p>
+                  </a:txBody>
+                  <a:tcPr>
+                    <a:solidFill>
+                      <a:srgbClr val="E7F6F4"/>
+                    </a:solidFill>
+                  </a:tcPr>
+                </a:tc>
+                <a:tc>
+                  <a:txBody>
+                    <a:bodyPr/>
+                    <a:lstStyle/>
+                    <a:p>
+                      <a:r>
+                        <a:rPr sz="750" b="1">
+                          <a:solidFill>
+                            <a:srgbClr val="B7791F"/>
+                          </a:solidFill>
+                          <a:latin typeface="Courier New"/>
+                        </a:rPr>
+                        <a:t>0.267</a:t>
+                      </a:r>
+                    </a:p>
+                  </a:txBody>
+                  <a:tcPr>
+                    <a:solidFill>
+                      <a:srgbClr val="FFF3D6"/>
+                    </a:solidFill>
+                  </a:tcPr>
+                </a:tc>
+              </a:tr>
+              <a:tr h="386660">
+                <a:tc>
+                  <a:txBody>
+                    <a:bodyPr/>
+                    <a:lstStyle/>
+                    <a:p>
+                      <a:r>
+                        <a:rPr sz="750" b="1">
+                          <a:solidFill>
+                            <a:srgbClr val="18212F"/>
+                          </a:solidFill>
+                          <a:latin typeface="Arial"/>
+                        </a:rPr>
+                        <a:t>Self-Cons.</a:t>
+                      </a:r>
+                    </a:p>
+                  </a:txBody>
+                  <a:tcPr>
+                    <a:solidFill>
+                      <a:srgbClr val="FFFFFF"/>
+                    </a:solidFill>
+                  </a:tcPr>
+                </a:tc>
+                <a:tc>
+                  <a:txBody>
+                    <a:bodyPr/>
+                    <a:lstStyle/>
+                    <a:p>
+                      <a:r>
+                        <a:rPr sz="750" b="1">
+                          <a:solidFill>
+                            <a:srgbClr val="1E5B9E"/>
+                          </a:solidFill>
+                          <a:latin typeface="Courier New"/>
+                        </a:rPr>
+                        <a:t>0.553</a:t>
+                      </a:r>
+                    </a:p>
+                  </a:txBody>
+                  <a:tcPr>
+                    <a:solidFill>
+                      <a:srgbClr val="EAF2FF"/>
+                    </a:solidFill>
+                  </a:tcPr>
+                </a:tc>
+                <a:tc>
+                  <a:txBody>
+                    <a:bodyPr/>
+                    <a:lstStyle/>
+                    <a:p>
+                      <a:r>
+                        <a:rPr sz="750" b="1">
+                          <a:solidFill>
+                            <a:srgbClr val="0F766E"/>
+                          </a:solidFill>
+                          <a:latin typeface="Courier New"/>
+                        </a:rPr>
+                        <a:t>0.610</a:t>
+                      </a:r>
+                    </a:p>
+                  </a:txBody>
+                  <a:tcPr>
+                    <a:solidFill>
+                      <a:srgbClr val="E7F6F4"/>
+                    </a:solidFill>
+                  </a:tcPr>
+                </a:tc>
+                <a:tc>
+                  <a:txBody>
+                    <a:bodyPr/>
+                    <a:lstStyle/>
+                    <a:p>
+                      <a:r>
+                        <a:rPr sz="750" b="1">
+                          <a:solidFill>
+                            <a:srgbClr val="B7791F"/>
+                          </a:solidFill>
+                          <a:latin typeface="Courier New"/>
+                        </a:rPr>
+                        <a:t>0.320</a:t>
+                      </a:r>
+                    </a:p>
+                  </a:txBody>
+                  <a:tcPr>
+                    <a:solidFill>
+                      <a:srgbClr val="FFF3D6"/>
+                    </a:solidFill>
+                  </a:tcPr>
+                </a:tc>
+              </a:tr>
+              <a:tr h="386660">
+                <a:tc>
+                  <a:txBody>
+                    <a:bodyPr/>
+                    <a:lstStyle/>
+                    <a:p>
+                      <a:r>
+                        <a:rPr sz="750" b="1">
+                          <a:solidFill>
+                            <a:srgbClr val="18212F"/>
+                          </a:solidFill>
+                          <a:latin typeface="Arial"/>
+                        </a:rPr>
+                        <a:t>Plan-Solve</a:t>
+                      </a:r>
+                    </a:p>
+                  </a:txBody>
+                  <a:tcPr>
+                    <a:solidFill>
+                      <a:srgbClr val="FFFFFF"/>
+                    </a:solidFill>
+                  </a:tcPr>
+                </a:tc>
+                <a:tc>
+                  <a:txBody>
+                    <a:bodyPr/>
+                    <a:lstStyle/>
+                    <a:p>
+                      <a:r>
+                        <a:rPr sz="750" b="1">
+                          <a:solidFill>
+                            <a:srgbClr val="0F766E"/>
+                          </a:solidFill>
+                          <a:latin typeface="Courier New"/>
+                        </a:rPr>
+                        <a:t>0.728</a:t>
+                      </a:r>
+                    </a:p>
+                  </a:txBody>
+                  <a:tcPr>
+                    <a:solidFill>
+                      <a:srgbClr val="E7F6F4"/>
+                    </a:solidFill>
+                  </a:tcPr>
+                </a:tc>
+                <a:tc>
+                  <a:txBody>
+                    <a:bodyPr/>
+                    <a:lstStyle/>
+                    <a:p>
+                      <a:r>
+                        <a:rPr sz="750" b="1">
+                          <a:solidFill>
+                            <a:srgbClr val="2F855A"/>
+                          </a:solidFill>
+                          <a:latin typeface="Courier New"/>
+                        </a:rPr>
+                        <a:t>0.818</a:t>
+                      </a:r>
+                    </a:p>
+                  </a:txBody>
+                  <a:tcPr>
+                    <a:solidFill>
+                      <a:srgbClr val="EAF7EF"/>
+                    </a:solidFill>
+                  </a:tcPr>
+                </a:tc>
+                <a:tc>
+                  <a:txBody>
+                    <a:bodyPr/>
+                    <a:lstStyle/>
+                    <a:p>
+                      <a:r>
+                        <a:rPr sz="750" b="1">
+                          <a:solidFill>
+                            <a:srgbClr val="1E5B9E"/>
+                          </a:solidFill>
+                          <a:latin typeface="Courier New"/>
+                        </a:rPr>
+                        <a:t>0.436</a:t>
+                      </a:r>
+                    </a:p>
+                  </a:txBody>
+                  <a:tcPr>
+                    <a:solidFill>
+                      <a:srgbClr val="EAF2FF"/>
+                    </a:solidFill>
+                  </a:tcPr>
+                </a:tc>
+              </a:tr>
+              <a:tr h="386664">
+                <a:tc>
+                  <a:txBody>
+                    <a:bodyPr/>
+                    <a:lstStyle/>
+                    <a:p>
+                      <a:r>
+                        <a:rPr sz="750" b="1">
+                          <a:solidFill>
+                            <a:srgbClr val="18212F"/>
+                          </a:solidFill>
+                          <a:latin typeface="Arial"/>
+                        </a:rPr>
+                        <a:t>TIR</a:t>
+                      </a:r>
+                    </a:p>
+                  </a:txBody>
+                  <a:tcPr>
+                    <a:solidFill>
+                      <a:srgbClr val="FFFFFF"/>
+                    </a:solidFill>
+                  </a:tcPr>
+                </a:tc>
+                <a:tc>
+                  <a:txBody>
+                    <a:bodyPr/>
+                    <a:lstStyle/>
+                    <a:p>
+                      <a:r>
+                        <a:rPr sz="750" b="1">
+                          <a:solidFill>
+                            <a:srgbClr val="2F855A"/>
+                          </a:solidFill>
+                          <a:latin typeface="Courier New"/>
+                        </a:rPr>
+                        <a:t>0.767</a:t>
+                      </a:r>
+                    </a:p>
+                  </a:txBody>
+                  <a:tcPr>
+                    <a:solidFill>
+                      <a:srgbClr val="EAF7EF"/>
+                    </a:solidFill>
+                  </a:tcPr>
+                </a:tc>
+                <a:tc>
+                  <a:txBody>
+                    <a:bodyPr/>
+                    <a:lstStyle/>
+                    <a:p>
+                      <a:r>
+                        <a:rPr sz="750" b="1">
+                          <a:solidFill>
+                            <a:srgbClr val="2F855A"/>
+                          </a:solidFill>
+                          <a:latin typeface="Courier New"/>
+                        </a:rPr>
+                        <a:t>0.773</a:t>
+                      </a:r>
+                    </a:p>
+                  </a:txBody>
+                  <a:tcPr>
+                    <a:solidFill>
+                      <a:srgbClr val="EAF7EF"/>
+                    </a:solidFill>
+                  </a:tcPr>
+                </a:tc>
+                <a:tc>
+                  <a:txBody>
+                    <a:bodyPr/>
+                    <a:lstStyle/>
+                    <a:p>
+                      <a:r>
+                        <a:rPr sz="750" b="1">
+                          <a:solidFill>
+                            <a:srgbClr val="1E5B9E"/>
+                          </a:solidFill>
+                          <a:latin typeface="Courier New"/>
+                        </a:rPr>
+                        <a:t>0.528</a:t>
+                      </a:r>
+                    </a:p>
+                  </a:txBody>
+                  <a:tcPr>
+                    <a:solidFill>
+                      <a:srgbClr val="EAF2FF"/>
+                    </a:solidFill>
+                  </a:tcPr>
+                </a:tc>
+              </a:tr>
+            </a:tbl>
+          </a:graphicData>
+        </a:graphic>
+      </p:graphicFrame>
       <p:sp>
         <p:nvSpPr>
           <p:cNvPr id="12" name="Rectangle 11"/>
@@ -9645,8 +12948,8 @@
         </p:nvSpPr>
         <p:spPr>
           <a:xfrm>
-            <a:off x="4309872" y="2139696"/>
-            <a:ext cx="3395472" cy="2057400"/>
+            <a:off x="5513832" y="1901952"/>
+            <a:ext cx="5010912" cy="3456432"/>
           </a:xfrm>
           <a:prstGeom prst="rect">
             <a:avLst/>
@@ -9690,14 +12993,14 @@
         </p:nvSpPr>
         <p:spPr>
           <a:xfrm>
-            <a:off x="4309872" y="2139696"/>
-            <a:ext cx="3395472" cy="64008"/>
+            <a:off x="5513832" y="1901952"/>
+            <a:ext cx="5010912" cy="73152"/>
           </a:xfrm>
           <a:prstGeom prst="rect">
             <a:avLst/>
           </a:prstGeom>
           <a:solidFill>
-            <a:srgbClr val="1E5B9E"/>
+            <a:srgbClr val="0F766E"/>
           </a:solidFill>
           <a:ln>
             <a:noFill/>
@@ -9733,8 +13036,8 @@
         </p:nvSpPr>
         <p:spPr>
           <a:xfrm>
-            <a:off x="4474464" y="2340864"/>
-            <a:ext cx="3066288" cy="310896"/>
+            <a:off x="5660136" y="2029968"/>
+            <a:ext cx="4718304" cy="201168"/>
           </a:xfrm>
           <a:prstGeom prst="rect">
             <a:avLst/>
@@ -9749,52 +13052,675 @@
           <a:p>
             <a:pPr algn="l"/>
             <a:r>
-              <a:rPr sz="1500" b="1">
+              <a:rPr sz="1200" b="1">
                 <a:solidFill>
                   <a:srgbClr val="18212F"/>
                 </a:solidFill>
                 <a:latin typeface="Arial"/>
               </a:rPr>
-              <a:t>MATH-500</a:t>
-            </a:r>
-          </a:p>
-        </p:txBody>
-      </p:sp>
-      <p:sp>
-        <p:nvSpPr>
-          <p:cNvPr id="15" name="TextBox 14"/>
-          <p:cNvSpPr txBox="1"/>
-          <p:nvPr/>
-        </p:nvSpPr>
-        <p:spPr>
-          <a:xfrm>
-            <a:off x="4474464" y="2798063"/>
-            <a:ext cx="3066288" cy="1289304"/>
-          </a:xfrm>
-          <a:prstGeom prst="rect">
-            <a:avLst/>
-          </a:prstGeom>
-          <a:noFill/>
-        </p:spPr>
-        <p:txBody>
-          <a:bodyPr wrap="square" lIns="36576" rIns="36576" tIns="18288" bIns="18288" anchor="t">
-            <a:spAutoFit/>
-          </a:bodyPr>
-          <a:lstStyle/>
-          <a:p>
-            <a:pPr algn="l"/>
-            <a:r>
-              <a:rPr sz="1000" b="0">
-                <a:solidFill>
-                  <a:srgbClr val="647084"/>
-                </a:solidFill>
-                <a:latin typeface="Arial"/>
-              </a:rPr>
-              <a:t>Competition-style coverage; useful for broader mathematical reasoning diversity.</a:t>
-            </a:r>
-          </a:p>
-        </p:txBody>
-      </p:sp>
+              <a:t>Qwen joint score by dataset</a:t>
+            </a:r>
+          </a:p>
+        </p:txBody>
+      </p:sp>
+      <p:graphicFrame>
+        <p:nvGraphicFramePr>
+          <p:cNvPr id="15" name="Table 14"/>
+          <p:cNvGraphicFramePr>
+            <a:graphicFrameLocks noGrp="1"/>
+          </p:cNvGraphicFramePr>
+          <p:nvPr/>
+        </p:nvGraphicFramePr>
+        <p:xfrm>
+          <a:off x="5623560" y="2340864"/>
+          <a:ext cx="4791456" cy="2706624"/>
+        </p:xfrm>
+        <a:graphic>
+          <a:graphicData uri="http://schemas.openxmlformats.org/drawingml/2006/table">
+            <a:tbl>
+              <a:tblPr firstRow="1" bandRow="1">
+                <a:tableStyleId>{5C22544A-7EE6-4342-B048-85BDC9FD1C3A}</a:tableStyleId>
+              </a:tblPr>
+              <a:tblGrid>
+                <a:gridCol w="1197864"/>
+                <a:gridCol w="1197864"/>
+                <a:gridCol w="1197864"/>
+                <a:gridCol w="1197864"/>
+              </a:tblGrid>
+              <a:tr h="386660">
+                <a:tc>
+                  <a:txBody>
+                    <a:bodyPr/>
+                    <a:lstStyle/>
+                    <a:p>
+                      <a:r>
+                        <a:rPr sz="750" b="1">
+                          <a:solidFill>
+                            <a:srgbClr val="344256"/>
+                          </a:solidFill>
+                          <a:latin typeface="Courier New"/>
+                        </a:rPr>
+                        <a:t>Method</a:t>
+                      </a:r>
+                    </a:p>
+                  </a:txBody>
+                  <a:tcPr>
+                    <a:solidFill>
+                      <a:srgbClr val="F7F9FC"/>
+                    </a:solidFill>
+                  </a:tcPr>
+                </a:tc>
+                <a:tc>
+                  <a:txBody>
+                    <a:bodyPr/>
+                    <a:lstStyle/>
+                    <a:p>
+                      <a:r>
+                        <a:rPr sz="750" b="1">
+                          <a:solidFill>
+                            <a:srgbClr val="344256"/>
+                          </a:solidFill>
+                          <a:latin typeface="Courier New"/>
+                        </a:rPr>
+                        <a:t>MATH-500</a:t>
+                      </a:r>
+                    </a:p>
+                  </a:txBody>
+                  <a:tcPr>
+                    <a:solidFill>
+                      <a:srgbClr val="F7F9FC"/>
+                    </a:solidFill>
+                  </a:tcPr>
+                </a:tc>
+                <a:tc>
+                  <a:txBody>
+                    <a:bodyPr/>
+                    <a:lstStyle/>
+                    <a:p>
+                      <a:r>
+                        <a:rPr sz="750" b="1">
+                          <a:solidFill>
+                            <a:srgbClr val="344256"/>
+                          </a:solidFill>
+                          <a:latin typeface="Courier New"/>
+                        </a:rPr>
+                        <a:t>GSM8K</a:t>
+                      </a:r>
+                    </a:p>
+                  </a:txBody>
+                  <a:tcPr>
+                    <a:solidFill>
+                      <a:srgbClr val="F7F9FC"/>
+                    </a:solidFill>
+                  </a:tcPr>
+                </a:tc>
+                <a:tc>
+                  <a:txBody>
+                    <a:bodyPr/>
+                    <a:lstStyle/>
+                    <a:p>
+                      <a:r>
+                        <a:rPr sz="750" b="1">
+                          <a:solidFill>
+                            <a:srgbClr val="344256"/>
+                          </a:solidFill>
+                          <a:latin typeface="Courier New"/>
+                        </a:rPr>
+                        <a:t>AIME 2024</a:t>
+                      </a:r>
+                    </a:p>
+                  </a:txBody>
+                  <a:tcPr>
+                    <a:solidFill>
+                      <a:srgbClr val="F7F9FC"/>
+                    </a:solidFill>
+                  </a:tcPr>
+                </a:tc>
+              </a:tr>
+              <a:tr h="386660">
+                <a:tc>
+                  <a:txBody>
+                    <a:bodyPr/>
+                    <a:lstStyle/>
+                    <a:p>
+                      <a:r>
+                        <a:rPr sz="750" b="1">
+                          <a:solidFill>
+                            <a:srgbClr val="18212F"/>
+                          </a:solidFill>
+                          <a:latin typeface="Arial"/>
+                        </a:rPr>
+                        <a:t>CoT zero</a:t>
+                      </a:r>
+                    </a:p>
+                  </a:txBody>
+                  <a:tcPr>
+                    <a:solidFill>
+                      <a:srgbClr val="FFFFFF"/>
+                    </a:solidFill>
+                  </a:tcPr>
+                </a:tc>
+                <a:tc>
+                  <a:txBody>
+                    <a:bodyPr/>
+                    <a:lstStyle/>
+                    <a:p>
+                      <a:r>
+                        <a:rPr sz="750" b="1">
+                          <a:solidFill>
+                            <a:srgbClr val="1E5B9E"/>
+                          </a:solidFill>
+                          <a:latin typeface="Courier New"/>
+                        </a:rPr>
+                        <a:t>0.533</a:t>
+                      </a:r>
+                    </a:p>
+                  </a:txBody>
+                  <a:tcPr>
+                    <a:solidFill>
+                      <a:srgbClr val="EAF2FF"/>
+                    </a:solidFill>
+                  </a:tcPr>
+                </a:tc>
+                <a:tc>
+                  <a:txBody>
+                    <a:bodyPr/>
+                    <a:lstStyle/>
+                    <a:p>
+                      <a:r>
+                        <a:rPr sz="750" b="1">
+                          <a:solidFill>
+                            <a:srgbClr val="2F855A"/>
+                          </a:solidFill>
+                          <a:latin typeface="Courier New"/>
+                        </a:rPr>
+                        <a:t>0.754</a:t>
+                      </a:r>
+                    </a:p>
+                  </a:txBody>
+                  <a:tcPr>
+                    <a:solidFill>
+                      <a:srgbClr val="EAF7EF"/>
+                    </a:solidFill>
+                  </a:tcPr>
+                </a:tc>
+                <a:tc>
+                  <a:txBody>
+                    <a:bodyPr/>
+                    <a:lstStyle/>
+                    <a:p>
+                      <a:r>
+                        <a:rPr sz="750" b="1">
+                          <a:solidFill>
+                            <a:srgbClr val="B42318"/>
+                          </a:solidFill>
+                          <a:latin typeface="Courier New"/>
+                        </a:rPr>
+                        <a:t>0.099</a:t>
+                      </a:r>
+                    </a:p>
+                  </a:txBody>
+                  <a:tcPr>
+                    <a:solidFill>
+                      <a:srgbClr val="FEECEB"/>
+                    </a:solidFill>
+                  </a:tcPr>
+                </a:tc>
+              </a:tr>
+              <a:tr h="386660">
+                <a:tc>
+                  <a:txBody>
+                    <a:bodyPr/>
+                    <a:lstStyle/>
+                    <a:p>
+                      <a:r>
+                        <a:rPr sz="750" b="1">
+                          <a:solidFill>
+                            <a:srgbClr val="18212F"/>
+                          </a:solidFill>
+                          <a:latin typeface="Arial"/>
+                        </a:rPr>
+                        <a:t>CoT few</a:t>
+                      </a:r>
+                    </a:p>
+                  </a:txBody>
+                  <a:tcPr>
+                    <a:solidFill>
+                      <a:srgbClr val="FFFFFF"/>
+                    </a:solidFill>
+                  </a:tcPr>
+                </a:tc>
+                <a:tc>
+                  <a:txBody>
+                    <a:bodyPr/>
+                    <a:lstStyle/>
+                    <a:p>
+                      <a:r>
+                        <a:rPr sz="750" b="1">
+                          <a:solidFill>
+                            <a:srgbClr val="1E5B9E"/>
+                          </a:solidFill>
+                          <a:latin typeface="Courier New"/>
+                        </a:rPr>
+                        <a:t>0.529</a:t>
+                      </a:r>
+                    </a:p>
+                  </a:txBody>
+                  <a:tcPr>
+                    <a:solidFill>
+                      <a:srgbClr val="EAF2FF"/>
+                    </a:solidFill>
+                  </a:tcPr>
+                </a:tc>
+                <a:tc>
+                  <a:txBody>
+                    <a:bodyPr/>
+                    <a:lstStyle/>
+                    <a:p>
+                      <a:r>
+                        <a:rPr sz="750" b="1">
+                          <a:solidFill>
+                            <a:srgbClr val="0F766E"/>
+                          </a:solidFill>
+                          <a:latin typeface="Courier New"/>
+                        </a:rPr>
+                        <a:t>0.668</a:t>
+                      </a:r>
+                    </a:p>
+                  </a:txBody>
+                  <a:tcPr>
+                    <a:solidFill>
+                      <a:srgbClr val="E7F6F4"/>
+                    </a:solidFill>
+                  </a:tcPr>
+                </a:tc>
+                <a:tc>
+                  <a:txBody>
+                    <a:bodyPr/>
+                    <a:lstStyle/>
+                    <a:p>
+                      <a:r>
+                        <a:rPr sz="750" b="1">
+                          <a:solidFill>
+                            <a:srgbClr val="B42318"/>
+                          </a:solidFill>
+                          <a:latin typeface="Courier New"/>
+                        </a:rPr>
+                        <a:t>0.000</a:t>
+                      </a:r>
+                    </a:p>
+                  </a:txBody>
+                  <a:tcPr>
+                    <a:solidFill>
+                      <a:srgbClr val="FEECEB"/>
+                    </a:solidFill>
+                  </a:tcPr>
+                </a:tc>
+              </a:tr>
+              <a:tr h="386660">
+                <a:tc>
+                  <a:txBody>
+                    <a:bodyPr/>
+                    <a:lstStyle/>
+                    <a:p>
+                      <a:r>
+                        <a:rPr sz="750" b="1">
+                          <a:solidFill>
+                            <a:srgbClr val="18212F"/>
+                          </a:solidFill>
+                          <a:latin typeface="Arial"/>
+                        </a:rPr>
+                        <a:t>Self-Refine</a:t>
+                      </a:r>
+                    </a:p>
+                  </a:txBody>
+                  <a:tcPr>
+                    <a:solidFill>
+                      <a:srgbClr val="FFFFFF"/>
+                    </a:solidFill>
+                  </a:tcPr>
+                </a:tc>
+                <a:tc>
+                  <a:txBody>
+                    <a:bodyPr/>
+                    <a:lstStyle/>
+                    <a:p>
+                      <a:r>
+                        <a:rPr sz="750" b="1">
+                          <a:solidFill>
+                            <a:srgbClr val="1E5B9E"/>
+                          </a:solidFill>
+                          <a:latin typeface="Courier New"/>
+                        </a:rPr>
+                        <a:t>0.499</a:t>
+                      </a:r>
+                    </a:p>
+                  </a:txBody>
+                  <a:tcPr>
+                    <a:solidFill>
+                      <a:srgbClr val="EAF2FF"/>
+                    </a:solidFill>
+                  </a:tcPr>
+                </a:tc>
+                <a:tc>
+                  <a:txBody>
+                    <a:bodyPr/>
+                    <a:lstStyle/>
+                    <a:p>
+                      <a:r>
+                        <a:rPr sz="750" b="1">
+                          <a:solidFill>
+                            <a:srgbClr val="0F766E"/>
+                          </a:solidFill>
+                          <a:latin typeface="Courier New"/>
+                        </a:rPr>
+                        <a:t>0.712</a:t>
+                      </a:r>
+                    </a:p>
+                  </a:txBody>
+                  <a:tcPr>
+                    <a:solidFill>
+                      <a:srgbClr val="E7F6F4"/>
+                    </a:solidFill>
+                  </a:tcPr>
+                </a:tc>
+                <a:tc>
+                  <a:txBody>
+                    <a:bodyPr/>
+                    <a:lstStyle/>
+                    <a:p>
+                      <a:r>
+                        <a:rPr sz="750" b="1">
+                          <a:solidFill>
+                            <a:srgbClr val="B42318"/>
+                          </a:solidFill>
+                          <a:latin typeface="Courier New"/>
+                        </a:rPr>
+                        <a:t>0.030</a:t>
+                      </a:r>
+                    </a:p>
+                  </a:txBody>
+                  <a:tcPr>
+                    <a:solidFill>
+                      <a:srgbClr val="FEECEB"/>
+                    </a:solidFill>
+                  </a:tcPr>
+                </a:tc>
+              </a:tr>
+              <a:tr h="386660">
+                <a:tc>
+                  <a:txBody>
+                    <a:bodyPr/>
+                    <a:lstStyle/>
+                    <a:p>
+                      <a:r>
+                        <a:rPr sz="750" b="1">
+                          <a:solidFill>
+                            <a:srgbClr val="18212F"/>
+                          </a:solidFill>
+                          <a:latin typeface="Arial"/>
+                        </a:rPr>
+                        <a:t>Self-Cons.</a:t>
+                      </a:r>
+                    </a:p>
+                  </a:txBody>
+                  <a:tcPr>
+                    <a:solidFill>
+                      <a:srgbClr val="FFFFFF"/>
+                    </a:solidFill>
+                  </a:tcPr>
+                </a:tc>
+                <a:tc>
+                  <a:txBody>
+                    <a:bodyPr/>
+                    <a:lstStyle/>
+                    <a:p>
+                      <a:r>
+                        <a:rPr sz="750" b="1">
+                          <a:solidFill>
+                            <a:srgbClr val="1E5B9E"/>
+                          </a:solidFill>
+                          <a:latin typeface="Courier New"/>
+                        </a:rPr>
+                        <a:t>0.475</a:t>
+                      </a:r>
+                    </a:p>
+                  </a:txBody>
+                  <a:tcPr>
+                    <a:solidFill>
+                      <a:srgbClr val="EAF2FF"/>
+                    </a:solidFill>
+                  </a:tcPr>
+                </a:tc>
+                <a:tc>
+                  <a:txBody>
+                    <a:bodyPr/>
+                    <a:lstStyle/>
+                    <a:p>
+                      <a:r>
+                        <a:rPr sz="750" b="1">
+                          <a:solidFill>
+                            <a:srgbClr val="0F766E"/>
+                          </a:solidFill>
+                          <a:latin typeface="Courier New"/>
+                        </a:rPr>
+                        <a:t>0.742</a:t>
+                      </a:r>
+                    </a:p>
+                  </a:txBody>
+                  <a:tcPr>
+                    <a:solidFill>
+                      <a:srgbClr val="E7F6F4"/>
+                    </a:solidFill>
+                  </a:tcPr>
+                </a:tc>
+                <a:tc>
+                  <a:txBody>
+                    <a:bodyPr/>
+                    <a:lstStyle/>
+                    <a:p>
+                      <a:r>
+                        <a:rPr sz="750" b="1">
+                          <a:solidFill>
+                            <a:srgbClr val="B42318"/>
+                          </a:solidFill>
+                          <a:latin typeface="Courier New"/>
+                        </a:rPr>
+                        <a:t>0.047</a:t>
+                      </a:r>
+                    </a:p>
+                  </a:txBody>
+                  <a:tcPr>
+                    <a:solidFill>
+                      <a:srgbClr val="FEECEB"/>
+                    </a:solidFill>
+                  </a:tcPr>
+                </a:tc>
+              </a:tr>
+              <a:tr h="386660">
+                <a:tc>
+                  <a:txBody>
+                    <a:bodyPr/>
+                    <a:lstStyle/>
+                    <a:p>
+                      <a:r>
+                        <a:rPr sz="750" b="1">
+                          <a:solidFill>
+                            <a:srgbClr val="18212F"/>
+                          </a:solidFill>
+                          <a:latin typeface="Arial"/>
+                        </a:rPr>
+                        <a:t>Plan-Solve</a:t>
+                      </a:r>
+                    </a:p>
+                  </a:txBody>
+                  <a:tcPr>
+                    <a:solidFill>
+                      <a:srgbClr val="FFFFFF"/>
+                    </a:solidFill>
+                  </a:tcPr>
+                </a:tc>
+                <a:tc>
+                  <a:txBody>
+                    <a:bodyPr/>
+                    <a:lstStyle/>
+                    <a:p>
+                      <a:r>
+                        <a:rPr sz="750" b="1">
+                          <a:solidFill>
+                            <a:srgbClr val="0F766E"/>
+                          </a:solidFill>
+                          <a:latin typeface="Courier New"/>
+                        </a:rPr>
+                        <a:t>0.723</a:t>
+                      </a:r>
+                    </a:p>
+                  </a:txBody>
+                  <a:tcPr>
+                    <a:solidFill>
+                      <a:srgbClr val="E7F6F4"/>
+                    </a:solidFill>
+                  </a:tcPr>
+                </a:tc>
+                <a:tc>
+                  <a:txBody>
+                    <a:bodyPr/>
+                    <a:lstStyle/>
+                    <a:p>
+                      <a:r>
+                        <a:rPr sz="750" b="1">
+                          <a:solidFill>
+                            <a:srgbClr val="2F855A"/>
+                          </a:solidFill>
+                          <a:latin typeface="Courier New"/>
+                        </a:rPr>
+                        <a:t>0.809</a:t>
+                      </a:r>
+                    </a:p>
+                  </a:txBody>
+                  <a:tcPr>
+                    <a:solidFill>
+                      <a:srgbClr val="EAF7EF"/>
+                    </a:solidFill>
+                  </a:tcPr>
+                </a:tc>
+                <a:tc>
+                  <a:txBody>
+                    <a:bodyPr/>
+                    <a:lstStyle/>
+                    <a:p>
+                      <a:r>
+                        <a:rPr sz="750" b="1">
+                          <a:solidFill>
+                            <a:srgbClr val="B7791F"/>
+                          </a:solidFill>
+                          <a:latin typeface="Courier New"/>
+                        </a:rPr>
+                        <a:t>0.294</a:t>
+                      </a:r>
+                    </a:p>
+                  </a:txBody>
+                  <a:tcPr>
+                    <a:solidFill>
+                      <a:srgbClr val="FFF3D6"/>
+                    </a:solidFill>
+                  </a:tcPr>
+                </a:tc>
+              </a:tr>
+              <a:tr h="386664">
+                <a:tc>
+                  <a:txBody>
+                    <a:bodyPr/>
+                    <a:lstStyle/>
+                    <a:p>
+                      <a:r>
+                        <a:rPr sz="750" b="1">
+                          <a:solidFill>
+                            <a:srgbClr val="18212F"/>
+                          </a:solidFill>
+                          <a:latin typeface="Arial"/>
+                        </a:rPr>
+                        <a:t>TIR</a:t>
+                      </a:r>
+                    </a:p>
+                  </a:txBody>
+                  <a:tcPr>
+                    <a:solidFill>
+                      <a:srgbClr val="FFFFFF"/>
+                    </a:solidFill>
+                  </a:tcPr>
+                </a:tc>
+                <a:tc>
+                  <a:txBody>
+                    <a:bodyPr/>
+                    <a:lstStyle/>
+                    <a:p>
+                      <a:r>
+                        <a:rPr sz="750" b="1">
+                          <a:solidFill>
+                            <a:srgbClr val="2F855A"/>
+                          </a:solidFill>
+                          <a:latin typeface="Courier New"/>
+                        </a:rPr>
+                        <a:t>0.755</a:t>
+                      </a:r>
+                    </a:p>
+                  </a:txBody>
+                  <a:tcPr>
+                    <a:solidFill>
+                      <a:srgbClr val="EAF7EF"/>
+                    </a:solidFill>
+                  </a:tcPr>
+                </a:tc>
+                <a:tc>
+                  <a:txBody>
+                    <a:bodyPr/>
+                    <a:lstStyle/>
+                    <a:p>
+                      <a:r>
+                        <a:rPr sz="750" b="1">
+                          <a:solidFill>
+                            <a:srgbClr val="2F855A"/>
+                          </a:solidFill>
+                          <a:latin typeface="Courier New"/>
+                        </a:rPr>
+                        <a:t>0.792</a:t>
+                      </a:r>
+                    </a:p>
+                  </a:txBody>
+                  <a:tcPr>
+                    <a:solidFill>
+                      <a:srgbClr val="EAF7EF"/>
+                    </a:solidFill>
+                  </a:tcPr>
+                </a:tc>
+                <a:tc>
+                  <a:txBody>
+                    <a:bodyPr/>
+                    <a:lstStyle/>
+                    <a:p>
+                      <a:r>
+                        <a:rPr sz="750" b="1">
+                          <a:solidFill>
+                            <a:srgbClr val="B7791F"/>
+                          </a:solidFill>
+                          <a:latin typeface="Courier New"/>
+                        </a:rPr>
+                        <a:t>0.317</a:t>
+                      </a:r>
+                    </a:p>
+                  </a:txBody>
+                  <a:tcPr>
+                    <a:solidFill>
+                      <a:srgbClr val="FFF3D6"/>
+                    </a:solidFill>
+                  </a:tcPr>
+                </a:tc>
+              </a:tr>
+            </a:tbl>
+          </a:graphicData>
+        </a:graphic>
+      </p:graphicFrame>
       <p:sp>
         <p:nvSpPr>
           <p:cNvPr id="16" name="Rectangle 15"/>
@@ -9803,8 +13729,8 @@
         </p:nvSpPr>
         <p:spPr>
           <a:xfrm>
-            <a:off x="7869936" y="2139696"/>
-            <a:ext cx="3395472" cy="2057400"/>
+            <a:off x="694944" y="5650992"/>
+            <a:ext cx="10771632" cy="548640"/>
           </a:xfrm>
           <a:prstGeom prst="rect">
             <a:avLst/>
@@ -9848,14 +13774,14 @@
         </p:nvSpPr>
         <p:spPr>
           <a:xfrm>
-            <a:off x="7869936" y="2139696"/>
-            <a:ext cx="3395472" cy="64008"/>
+            <a:off x="694944" y="5650992"/>
+            <a:ext cx="54864" cy="548640"/>
           </a:xfrm>
           <a:prstGeom prst="rect">
             <a:avLst/>
           </a:prstGeom>
           <a:solidFill>
-            <a:srgbClr val="B7791F"/>
+            <a:srgbClr val="0F766E"/>
           </a:solidFill>
           <a:ln>
             <a:noFill/>
@@ -9885,14 +13811,127 @@
       </p:sp>
       <p:sp>
         <p:nvSpPr>
-          <p:cNvPr id="18" name="TextBox 17"/>
-          <p:cNvSpPr txBox="1"/>
-          <p:nvPr/>
-        </p:nvSpPr>
-        <p:spPr>
-          <a:xfrm>
-            <a:off x="8034528" y="2340864"/>
-            <a:ext cx="3066288" cy="310896"/>
+          <p:cNvPr id="18" name="Rounded Rectangle 17"/>
+          <p:cNvSpPr/>
+          <p:nvPr/>
+        </p:nvSpPr>
+        <p:spPr>
+          <a:xfrm>
+            <a:off x="841248" y="5733288"/>
+            <a:ext cx="1325880" cy="146304"/>
+          </a:xfrm>
+          <a:prstGeom prst="roundRect">
+            <a:avLst/>
+          </a:prstGeom>
+          <a:solidFill>
+            <a:srgbClr val="E7F6F4"/>
+          </a:solidFill>
+          <a:ln>
+            <a:noFill/>
+          </a:ln>
+        </p:spPr>
+        <p:style>
+          <a:lnRef idx="1">
+            <a:schemeClr val="accent1"/>
+          </a:lnRef>
+          <a:fillRef idx="3">
+            <a:schemeClr val="accent1"/>
+          </a:fillRef>
+          <a:effectRef idx="2">
+            <a:schemeClr val="accent1"/>
+          </a:effectRef>
+          <a:fontRef idx="minor">
+            <a:schemeClr val="lt1"/>
+          </a:fontRef>
+        </p:style>
+        <p:txBody>
+          <a:bodyPr rtlCol="0" anchor="ctr"/>
+          <a:lstStyle/>
+          <a:p>
+            <a:pPr algn="ctr"/>
+          </a:p>
+        </p:txBody>
+      </p:sp>
+      <p:sp>
+        <p:nvSpPr>
+          <p:cNvPr id="19" name="TextBox 18"/>
+          <p:cNvSpPr txBox="1"/>
+          <p:nvPr/>
+        </p:nvSpPr>
+        <p:spPr>
+          <a:xfrm>
+            <a:off x="896112" y="5765292"/>
+            <a:ext cx="1170432" cy="73152"/>
+          </a:xfrm>
+          <a:prstGeom prst="rect">
+            <a:avLst/>
+          </a:prstGeom>
+          <a:noFill/>
+        </p:spPr>
+        <p:txBody>
+          <a:bodyPr wrap="square" lIns="36576" rIns="36576" tIns="18288" bIns="18288" anchor="t">
+            <a:spAutoFit/>
+          </a:bodyPr>
+          <a:lstStyle/>
+          <a:p>
+            <a:pPr algn="ctr"/>
+            <a:r>
+              <a:rPr sz="600" b="1">
+                <a:solidFill>
+                  <a:srgbClr val="0F766E"/>
+                </a:solidFill>
+                <a:latin typeface="Courier New"/>
+              </a:rPr>
+              <a:t>DATASET LENS</a:t>
+            </a:r>
+          </a:p>
+        </p:txBody>
+      </p:sp>
+      <p:sp>
+        <p:nvSpPr>
+          <p:cNvPr id="20" name="TextBox 19"/>
+          <p:cNvSpPr txBox="1"/>
+          <p:nvPr/>
+        </p:nvSpPr>
+        <p:spPr>
+          <a:xfrm>
+            <a:off x="9985248" y="5765292"/>
+            <a:ext cx="1097280" cy="73152"/>
+          </a:xfrm>
+          <a:prstGeom prst="rect">
+            <a:avLst/>
+          </a:prstGeom>
+          <a:noFill/>
+        </p:spPr>
+        <p:txBody>
+          <a:bodyPr wrap="square" lIns="36576" rIns="36576" tIns="18288" bIns="18288" anchor="t">
+            <a:spAutoFit/>
+          </a:bodyPr>
+          <a:lstStyle/>
+          <a:p>
+            <a:pPr algn="r"/>
+            <a:r>
+              <a:rPr sz="600" b="1">
+                <a:solidFill>
+                  <a:srgbClr val="647084"/>
+                </a:solidFill>
+                <a:latin typeface="Courier New"/>
+              </a:rPr>
+              <a:t>JOINT SCORE</a:t>
+            </a:r>
+          </a:p>
+        </p:txBody>
+      </p:sp>
+      <p:sp>
+        <p:nvSpPr>
+          <p:cNvPr id="21" name="TextBox 20"/>
+          <p:cNvSpPr txBox="1"/>
+          <p:nvPr/>
+        </p:nvSpPr>
+        <p:spPr>
+          <a:xfrm>
+            <a:off x="841248" y="5925312"/>
+            <a:ext cx="10296144" cy="146304"/>
           </a:xfrm>
           <a:prstGeom prst="rect">
             <a:avLst/>
@@ -9907,55 +13946,20 @@
           <a:p>
             <a:pPr algn="l"/>
             <a:r>
-              <a:rPr sz="1500" b="1">
-                <a:solidFill>
-                  <a:srgbClr val="18212F"/>
+              <a:rPr sz="700" b="0">
+                <a:solidFill>
+                  <a:srgbClr val="344256"/>
                 </a:solidFill>
                 <a:latin typeface="Arial"/>
               </a:rPr>
-              <a:t>AIME 2024</a:t>
-            </a:r>
-          </a:p>
-        </p:txBody>
-      </p:sp>
-      <p:sp>
-        <p:nvSpPr>
-          <p:cNvPr id="19" name="TextBox 18"/>
-          <p:cNvSpPr txBox="1"/>
-          <p:nvPr/>
-        </p:nvSpPr>
-        <p:spPr>
-          <a:xfrm>
-            <a:off x="8034528" y="2798063"/>
-            <a:ext cx="3066288" cy="1289304"/>
-          </a:xfrm>
-          <a:prstGeom prst="rect">
-            <a:avLst/>
-          </a:prstGeom>
-          <a:noFill/>
-        </p:spPr>
-        <p:txBody>
-          <a:bodyPr wrap="square" lIns="36576" rIns="36576" tIns="18288" bIns="18288" anchor="t">
-            <a:spAutoFit/>
-          </a:bodyPr>
-          <a:lstStyle/>
-          <a:p>
-            <a:pPr algn="l"/>
-            <a:r>
-              <a:rPr sz="1000" b="0">
-                <a:solidFill>
-                  <a:srgbClr val="647084"/>
-                </a:solidFill>
-                <a:latin typeface="Arial"/>
-              </a:rPr>
-              <a:t>Hard stress test; exposes whether gains transfer beyond easier arithmetic structure.</a:t>
-            </a:r>
-          </a:p>
-        </p:txBody>
-      </p:sp>
-      <p:sp>
-        <p:nvSpPr>
-          <p:cNvPr id="20" name="Rectangle 19"/>
+              <a:t>GSM8K reveals early decomposition gains, MATH-500 broadens coverage, and AIME tests whether the gain survives under harder symbolic reasoning.</a:t>
+            </a:r>
+          </a:p>
+        </p:txBody>
+      </p:sp>
+      <p:sp>
+        <p:nvSpPr>
+          <p:cNvPr id="22" name="Rectangle 21"/>
           <p:cNvSpPr/>
           <p:nvPr/>
         </p:nvSpPr>
@@ -9998,7 +14002,7 @@
       </p:sp>
       <p:sp>
         <p:nvSpPr>
-          <p:cNvPr id="21" name="TextBox 20"/>
+          <p:cNvPr id="23" name="TextBox 22"/>
           <p:cNvSpPr txBox="1"/>
           <p:nvPr/>
         </p:nvSpPr>
@@ -10026,7 +14030,7 @@
                 </a:solidFill>
                 <a:latin typeface="Arial"/>
               </a:rPr>
-              <a:t>AIME is where superficial gains are most likely to break; GSM8K is where structure helps most visibly.</a:t>
+              <a:t>GSM8K responds fastest to structure; AIME remains the transfer stress test for both backbones.</a:t>
             </a:r>
           </a:p>
         </p:txBody>
@@ -10387,7 +14391,7 @@
                           </a:solidFill>
                           <a:latin typeface="Arial"/>
                         </a:rPr>
-                        <a:t>Prompting</a:t>
+                        <a:t>Prompting lineage</a:t>
                       </a:r>
                     </a:p>
                   </a:txBody>
@@ -10409,7 +14413,7 @@
                           </a:solidFill>
                           <a:latin typeface="Arial"/>
                         </a:rPr>
-                        <a:t>CoT, Self-Consistency, Self-Refine, Plan-and-Solve</a:t>
+                        <a:t>Wei et al. 2022; Wang et al. 2022, 2023; Madaan et al. 2024</a:t>
                       </a:r>
                     </a:p>
                   </a:txBody>
@@ -10431,7 +14435,7 @@
                           </a:solidFill>
                           <a:latin typeface="Arial"/>
                         </a:rPr>
-                        <a:t>Structured reasoning trajectories</a:t>
+                        <a:t>Reasoning elicitation, multi-path voting, critique, and explicit planning</a:t>
                       </a:r>
                     </a:p>
                   </a:txBody>
@@ -10455,7 +14459,7 @@
                           </a:solidFill>
                           <a:latin typeface="Arial"/>
                         </a:rPr>
-                        <a:t>Tool use</a:t>
+                        <a:t>Tool-grounded solving</a:t>
                       </a:r>
                     </a:p>
                   </a:txBody>
@@ -10477,7 +14481,7 @@
                           </a:solidFill>
                           <a:latin typeface="Arial"/>
                         </a:rPr>
-                        <a:t>ToRA</a:t>
+                        <a:t>Gou et al. 2023 (ToRA)</a:t>
                       </a:r>
                     </a:p>
                   </a:txBody>
@@ -10499,7 +14503,7 @@
                           </a:solidFill>
                           <a:latin typeface="Arial"/>
                         </a:rPr>
-                        <a:t>Reasoning plus executable computation</a:t>
+                        <a:t>Reasoning can call reliable computation, observe it, and continue</a:t>
                       </a:r>
                     </a:p>
                   </a:txBody>
@@ -10523,7 +14527,7 @@
                           </a:solidFill>
                           <a:latin typeface="Arial"/>
                         </a:rPr>
-                        <a:t>Efficiency</a:t>
+                        <a:t>Efficiency-aware diagnosis</a:t>
                       </a:r>
                     </a:p>
                   </a:txBody>
@@ -10545,7 +14549,7 @@
                           </a:solidFill>
                           <a:latin typeface="Arial"/>
                         </a:rPr>
-                        <a:t>NoWait, Dynamic Early Exit</a:t>
+                        <a:t>Wang et al. 2025; Yang et al. 2025</a:t>
                       </a:r>
                     </a:p>
                   </a:txBody>
@@ -10567,7 +14571,7 @@
                           </a:solidFill>
                           <a:latin typeface="Arial"/>
                         </a:rPr>
-                        <a:t>Reflection and long-reasoning cost</a:t>
+                        <a:t>Reflection-token cost, overlong reasoning, and answer-aware stopping</a:t>
                       </a:r>
                     </a:p>
                   </a:txBody>
@@ -10590,6 +14594,242 @@
         </p:nvSpPr>
         <p:spPr>
           <a:xfrm>
+            <a:off x="694944" y="5650992"/>
+            <a:ext cx="10771632" cy="548640"/>
+          </a:xfrm>
+          <a:prstGeom prst="rect">
+            <a:avLst/>
+          </a:prstGeom>
+          <a:solidFill>
+            <a:srgbClr val="FFFFFF"/>
+          </a:solidFill>
+          <a:ln>
+            <a:solidFill>
+              <a:srgbClr val="CED6E3"/>
+            </a:solidFill>
+          </a:ln>
+        </p:spPr>
+        <p:style>
+          <a:lnRef idx="1">
+            <a:schemeClr val="accent1"/>
+          </a:lnRef>
+          <a:fillRef idx="3">
+            <a:schemeClr val="accent1"/>
+          </a:fillRef>
+          <a:effectRef idx="2">
+            <a:schemeClr val="accent1"/>
+          </a:effectRef>
+          <a:fontRef idx="minor">
+            <a:schemeClr val="lt1"/>
+          </a:fontRef>
+        </p:style>
+        <p:txBody>
+          <a:bodyPr rtlCol="0" anchor="ctr"/>
+          <a:lstStyle/>
+          <a:p>
+            <a:pPr algn="ctr"/>
+          </a:p>
+        </p:txBody>
+      </p:sp>
+      <p:sp>
+        <p:nvSpPr>
+          <p:cNvPr id="10" name="Rectangle 9"/>
+          <p:cNvSpPr/>
+          <p:nvPr/>
+        </p:nvSpPr>
+        <p:spPr>
+          <a:xfrm>
+            <a:off x="694944" y="5650992"/>
+            <a:ext cx="54864" cy="548640"/>
+          </a:xfrm>
+          <a:prstGeom prst="rect">
+            <a:avLst/>
+          </a:prstGeom>
+          <a:solidFill>
+            <a:srgbClr val="1E5B9E"/>
+          </a:solidFill>
+          <a:ln>
+            <a:noFill/>
+          </a:ln>
+        </p:spPr>
+        <p:style>
+          <a:lnRef idx="1">
+            <a:schemeClr val="accent1"/>
+          </a:lnRef>
+          <a:fillRef idx="3">
+            <a:schemeClr val="accent1"/>
+          </a:fillRef>
+          <a:effectRef idx="2">
+            <a:schemeClr val="accent1"/>
+          </a:effectRef>
+          <a:fontRef idx="minor">
+            <a:schemeClr val="lt1"/>
+          </a:fontRef>
+        </p:style>
+        <p:txBody>
+          <a:bodyPr rtlCol="0" anchor="ctr"/>
+          <a:lstStyle/>
+          <a:p>
+            <a:pPr algn="ctr"/>
+          </a:p>
+        </p:txBody>
+      </p:sp>
+      <p:sp>
+        <p:nvSpPr>
+          <p:cNvPr id="11" name="Rounded Rectangle 10"/>
+          <p:cNvSpPr/>
+          <p:nvPr/>
+        </p:nvSpPr>
+        <p:spPr>
+          <a:xfrm>
+            <a:off x="841248" y="5733288"/>
+            <a:ext cx="1325880" cy="146304"/>
+          </a:xfrm>
+          <a:prstGeom prst="roundRect">
+            <a:avLst/>
+          </a:prstGeom>
+          <a:solidFill>
+            <a:srgbClr val="EAF2FF"/>
+          </a:solidFill>
+          <a:ln>
+            <a:noFill/>
+          </a:ln>
+        </p:spPr>
+        <p:style>
+          <a:lnRef idx="1">
+            <a:schemeClr val="accent1"/>
+          </a:lnRef>
+          <a:fillRef idx="3">
+            <a:schemeClr val="accent1"/>
+          </a:fillRef>
+          <a:effectRef idx="2">
+            <a:schemeClr val="accent1"/>
+          </a:effectRef>
+          <a:fontRef idx="minor">
+            <a:schemeClr val="lt1"/>
+          </a:fontRef>
+        </p:style>
+        <p:txBody>
+          <a:bodyPr rtlCol="0" anchor="ctr"/>
+          <a:lstStyle/>
+          <a:p>
+            <a:pPr algn="ctr"/>
+          </a:p>
+        </p:txBody>
+      </p:sp>
+      <p:sp>
+        <p:nvSpPr>
+          <p:cNvPr id="12" name="TextBox 11"/>
+          <p:cNvSpPr txBox="1"/>
+          <p:nvPr/>
+        </p:nvSpPr>
+        <p:spPr>
+          <a:xfrm>
+            <a:off x="896112" y="5765292"/>
+            <a:ext cx="1170432" cy="73152"/>
+          </a:xfrm>
+          <a:prstGeom prst="rect">
+            <a:avLst/>
+          </a:prstGeom>
+          <a:noFill/>
+        </p:spPr>
+        <p:txBody>
+          <a:bodyPr wrap="square" lIns="36576" rIns="36576" tIns="18288" bIns="18288" anchor="t">
+            <a:spAutoFit/>
+          </a:bodyPr>
+          <a:lstStyle/>
+          <a:p>
+            <a:pPr algn="ctr"/>
+            <a:r>
+              <a:rPr sz="600" b="1">
+                <a:solidFill>
+                  <a:srgbClr val="1E5B9E"/>
+                </a:solidFill>
+                <a:latin typeface="Courier New"/>
+              </a:rPr>
+              <a:t>REFERENCE LINK</a:t>
+            </a:r>
+          </a:p>
+        </p:txBody>
+      </p:sp>
+      <p:sp>
+        <p:nvSpPr>
+          <p:cNvPr id="13" name="TextBox 12"/>
+          <p:cNvSpPr txBox="1"/>
+          <p:nvPr/>
+        </p:nvSpPr>
+        <p:spPr>
+          <a:xfrm>
+            <a:off x="9985248" y="5765292"/>
+            <a:ext cx="1097280" cy="73152"/>
+          </a:xfrm>
+          <a:prstGeom prst="rect">
+            <a:avLst/>
+          </a:prstGeom>
+          <a:noFill/>
+        </p:spPr>
+        <p:txBody>
+          <a:bodyPr wrap="square" lIns="36576" rIns="36576" tIns="18288" bIns="18288" anchor="t">
+            <a:spAutoFit/>
+          </a:bodyPr>
+          <a:lstStyle/>
+          <a:p>
+            <a:pPr algn="r"/>
+            <a:r>
+              <a:rPr sz="600" b="1">
+                <a:solidFill>
+                  <a:srgbClr val="647084"/>
+                </a:solidFill>
+                <a:latin typeface="Courier New"/>
+              </a:rPr>
+              <a:t>RELATED WORK</a:t>
+            </a:r>
+          </a:p>
+        </p:txBody>
+      </p:sp>
+      <p:sp>
+        <p:nvSpPr>
+          <p:cNvPr id="14" name="TextBox 13"/>
+          <p:cNvSpPr txBox="1"/>
+          <p:nvPr/>
+        </p:nvSpPr>
+        <p:spPr>
+          <a:xfrm>
+            <a:off x="841248" y="5925312"/>
+            <a:ext cx="10296144" cy="146304"/>
+          </a:xfrm>
+          <a:prstGeom prst="rect">
+            <a:avLst/>
+          </a:prstGeom>
+          <a:noFill/>
+        </p:spPr>
+        <p:txBody>
+          <a:bodyPr wrap="square" lIns="36576" rIns="36576" tIns="18288" bIns="18288" anchor="t">
+            <a:spAutoFit/>
+          </a:bodyPr>
+          <a:lstStyle/>
+          <a:p>
+            <a:pPr algn="l"/>
+            <a:r>
+              <a:rPr sz="700" b="0">
+                <a:solidFill>
+                  <a:srgbClr val="344256"/>
+                </a:solidFill>
+                <a:latin typeface="Arial"/>
+              </a:rPr>
+              <a:t>The related work motivates the design choices: CoT-style reasoning paths, ToRA-style tool integration, and recent efficiency work on reflection and overlong reasoning.</a:t>
+            </a:r>
+          </a:p>
+        </p:txBody>
+      </p:sp>
+      <p:sp>
+        <p:nvSpPr>
+          <p:cNvPr id="15" name="Rectangle 14"/>
+          <p:cNvSpPr/>
+          <p:nvPr/>
+        </p:nvSpPr>
+        <p:spPr>
+          <a:xfrm>
             <a:off x="658368" y="6355080"/>
             <a:ext cx="10607040" cy="9144"/>
           </a:xfrm>
@@ -10627,7 +14867,7 @@
       </p:sp>
       <p:sp>
         <p:nvSpPr>
-          <p:cNvPr id="10" name="TextBox 9"/>
+          <p:cNvPr id="16" name="TextBox 15"/>
           <p:cNvSpPr txBox="1"/>
           <p:nvPr/>
         </p:nvSpPr>
@@ -10907,7 +15147,7 @@
                 </a:solidFill>
                 <a:latin typeface="Arial"/>
               </a:rPr>
-              <a:t>The next step is to let the system decide when to plan, sample, verify, or call tools.</a:t>
+              <a:t>The next step is not “always think longer”, but “decide which reasoning mode is worth paying for”.</a:t>
             </a:r>
           </a:p>
         </p:txBody>
@@ -11065,7 +15305,7 @@
                 </a:solidFill>
                 <a:latin typeface="Arial"/>
               </a:rPr>
-              <a:t>Prompt controller</a:t>
+              <a:t>Harness prompt</a:t>
             </a:r>
           </a:p>
         </p:txBody>
@@ -11100,7 +15340,7 @@
                 </a:solidFill>
                 <a:latin typeface="Arial"/>
               </a:rPr>
-              <a:t>Train or rule-design a router that chooses CoT, Plan-and-Solve, or tool use by problem type.</a:t>
+              <a:t>Standardize classify-plan-solve-verify slots so later agents read and act on the same reasoning scaffold.</a:t>
             </a:r>
           </a:p>
         </p:txBody>
@@ -11258,7 +15498,7 @@
                 </a:solidFill>
                 <a:latin typeface="Arial"/>
               </a:rPr>
-              <a:t>ReAct-style loop</a:t>
+              <a:t>Problem router</a:t>
             </a:r>
           </a:p>
         </p:txBody>
@@ -11293,7 +15533,7 @@
                 </a:solidFill>
                 <a:latin typeface="Arial"/>
               </a:rPr>
-              <a:t>Let the solver alternate between reasoning, Python actions, observations, and finalization.</a:t>
+              <a:t>Choose CoT, Plan-and-Solve, or TIR according to arithmetic load, symbolic depth, and uncertainty.</a:t>
             </a:r>
           </a:p>
         </p:txBody>
@@ -11451,7 +15691,7 @@
                 </a:solidFill>
                 <a:latin typeface="Arial"/>
               </a:rPr>
-              <a:t>Verifier agent</a:t>
+              <a:t>ReAct math loop</a:t>
             </a:r>
           </a:p>
         </p:txBody>
@@ -11486,7 +15726,7 @@
                 </a:solidFill>
                 <a:latin typeface="Arial"/>
               </a:rPr>
-              <a:t>Run a second pass to check answer consistency, detect repeated cues, and request targeted fixes.</a:t>
+              <a:t>Let the solver reason, call Python, observe, and revise only when execution evidence is actually needed.</a:t>
             </a:r>
           </a:p>
         </p:txBody>
@@ -11644,7 +15884,7 @@
                 </a:solidFill>
                 <a:latin typeface="Arial"/>
               </a:rPr>
-              <a:t>Adaptive stopping</a:t>
+              <a:t>Verifier + stop rule</a:t>
             </a:r>
           </a:p>
         </p:txBody>
@@ -11679,7 +15919,7 @@
                 </a:solidFill>
                 <a:latin typeface="Arial"/>
               </a:rPr>
-              <a:t>Stop generation when the answer is stable; continue only when uncertainty or contradiction is detected.</a:t>
+              <a:t>Check final-answer stability, repeated cues, and contradiction; then stop early or request one targeted repair.</a:t>
             </a:r>
           </a:p>
         </p:txBody>
@@ -11687,6 +15927,242 @@
       <p:sp>
         <p:nvSpPr>
           <p:cNvPr id="28" name="Rectangle 27"/>
+          <p:cNvSpPr/>
+          <p:nvPr/>
+        </p:nvSpPr>
+        <p:spPr>
+          <a:xfrm>
+            <a:off x="694944" y="5650992"/>
+            <a:ext cx="10771632" cy="548640"/>
+          </a:xfrm>
+          <a:prstGeom prst="rect">
+            <a:avLst/>
+          </a:prstGeom>
+          <a:solidFill>
+            <a:srgbClr val="FFFFFF"/>
+          </a:solidFill>
+          <a:ln>
+            <a:solidFill>
+              <a:srgbClr val="CED6E3"/>
+            </a:solidFill>
+          </a:ln>
+        </p:spPr>
+        <p:style>
+          <a:lnRef idx="1">
+            <a:schemeClr val="accent1"/>
+          </a:lnRef>
+          <a:fillRef idx="3">
+            <a:schemeClr val="accent1"/>
+          </a:fillRef>
+          <a:effectRef idx="2">
+            <a:schemeClr val="accent1"/>
+          </a:effectRef>
+          <a:fontRef idx="minor">
+            <a:schemeClr val="lt1"/>
+          </a:fontRef>
+        </p:style>
+        <p:txBody>
+          <a:bodyPr rtlCol="0" anchor="ctr"/>
+          <a:lstStyle/>
+          <a:p>
+            <a:pPr algn="ctr"/>
+          </a:p>
+        </p:txBody>
+      </p:sp>
+      <p:sp>
+        <p:nvSpPr>
+          <p:cNvPr id="29" name="Rectangle 28"/>
+          <p:cNvSpPr/>
+          <p:nvPr/>
+        </p:nvSpPr>
+        <p:spPr>
+          <a:xfrm>
+            <a:off x="694944" y="5650992"/>
+            <a:ext cx="54864" cy="548640"/>
+          </a:xfrm>
+          <a:prstGeom prst="rect">
+            <a:avLst/>
+          </a:prstGeom>
+          <a:solidFill>
+            <a:srgbClr val="B7791F"/>
+          </a:solidFill>
+          <a:ln>
+            <a:noFill/>
+          </a:ln>
+        </p:spPr>
+        <p:style>
+          <a:lnRef idx="1">
+            <a:schemeClr val="accent1"/>
+          </a:lnRef>
+          <a:fillRef idx="3">
+            <a:schemeClr val="accent1"/>
+          </a:fillRef>
+          <a:effectRef idx="2">
+            <a:schemeClr val="accent1"/>
+          </a:effectRef>
+          <a:fontRef idx="minor">
+            <a:schemeClr val="lt1"/>
+          </a:fontRef>
+        </p:style>
+        <p:txBody>
+          <a:bodyPr rtlCol="0" anchor="ctr"/>
+          <a:lstStyle/>
+          <a:p>
+            <a:pPr algn="ctr"/>
+          </a:p>
+        </p:txBody>
+      </p:sp>
+      <p:sp>
+        <p:nvSpPr>
+          <p:cNvPr id="30" name="Rounded Rectangle 29"/>
+          <p:cNvSpPr/>
+          <p:nvPr/>
+        </p:nvSpPr>
+        <p:spPr>
+          <a:xfrm>
+            <a:off x="841248" y="5733288"/>
+            <a:ext cx="1325880" cy="146304"/>
+          </a:xfrm>
+          <a:prstGeom prst="roundRect">
+            <a:avLst/>
+          </a:prstGeom>
+          <a:solidFill>
+            <a:srgbClr val="FFF3D6"/>
+          </a:solidFill>
+          <a:ln>
+            <a:noFill/>
+          </a:ln>
+        </p:spPr>
+        <p:style>
+          <a:lnRef idx="1">
+            <a:schemeClr val="accent1"/>
+          </a:lnRef>
+          <a:fillRef idx="3">
+            <a:schemeClr val="accent1"/>
+          </a:fillRef>
+          <a:effectRef idx="2">
+            <a:schemeClr val="accent1"/>
+          </a:effectRef>
+          <a:fontRef idx="minor">
+            <a:schemeClr val="lt1"/>
+          </a:fontRef>
+        </p:style>
+        <p:txBody>
+          <a:bodyPr rtlCol="0" anchor="ctr"/>
+          <a:lstStyle/>
+          <a:p>
+            <a:pPr algn="ctr"/>
+          </a:p>
+        </p:txBody>
+      </p:sp>
+      <p:sp>
+        <p:nvSpPr>
+          <p:cNvPr id="31" name="TextBox 30"/>
+          <p:cNvSpPr txBox="1"/>
+          <p:nvPr/>
+        </p:nvSpPr>
+        <p:spPr>
+          <a:xfrm>
+            <a:off x="896112" y="5765292"/>
+            <a:ext cx="1170432" cy="73152"/>
+          </a:xfrm>
+          <a:prstGeom prst="rect">
+            <a:avLst/>
+          </a:prstGeom>
+          <a:noFill/>
+        </p:spPr>
+        <p:txBody>
+          <a:bodyPr wrap="square" lIns="36576" rIns="36576" tIns="18288" bIns="18288" anchor="t">
+            <a:spAutoFit/>
+          </a:bodyPr>
+          <a:lstStyle/>
+          <a:p>
+            <a:pPr algn="ctr"/>
+            <a:r>
+              <a:rPr sz="600" b="1">
+                <a:solidFill>
+                  <a:srgbClr val="B7791F"/>
+                </a:solidFill>
+                <a:latin typeface="Courier New"/>
+              </a:rPr>
+              <a:t>NEXT MOVE</a:t>
+            </a:r>
+          </a:p>
+        </p:txBody>
+      </p:sp>
+      <p:sp>
+        <p:nvSpPr>
+          <p:cNvPr id="32" name="TextBox 31"/>
+          <p:cNvSpPr txBox="1"/>
+          <p:nvPr/>
+        </p:nvSpPr>
+        <p:spPr>
+          <a:xfrm>
+            <a:off x="9985248" y="5765292"/>
+            <a:ext cx="1097280" cy="73152"/>
+          </a:xfrm>
+          <a:prstGeom prst="rect">
+            <a:avLst/>
+          </a:prstGeom>
+          <a:noFill/>
+        </p:spPr>
+        <p:txBody>
+          <a:bodyPr wrap="square" lIns="36576" rIns="36576" tIns="18288" bIns="18288" anchor="t">
+            <a:spAutoFit/>
+          </a:bodyPr>
+          <a:lstStyle/>
+          <a:p>
+            <a:pPr algn="r"/>
+            <a:r>
+              <a:rPr sz="600" b="1">
+                <a:solidFill>
+                  <a:srgbClr val="647084"/>
+                </a:solidFill>
+                <a:latin typeface="Courier New"/>
+              </a:rPr>
+              <a:t>FUTURE</a:t>
+            </a:r>
+          </a:p>
+        </p:txBody>
+      </p:sp>
+      <p:sp>
+        <p:nvSpPr>
+          <p:cNvPr id="33" name="TextBox 32"/>
+          <p:cNvSpPr txBox="1"/>
+          <p:nvPr/>
+        </p:nvSpPr>
+        <p:spPr>
+          <a:xfrm>
+            <a:off x="841248" y="5925312"/>
+            <a:ext cx="10296144" cy="146304"/>
+          </a:xfrm>
+          <a:prstGeom prst="rect">
+            <a:avLst/>
+          </a:prstGeom>
+          <a:noFill/>
+        </p:spPr>
+        <p:txBody>
+          <a:bodyPr wrap="square" lIns="36576" rIns="36576" tIns="18288" bIns="18288" anchor="t">
+            <a:spAutoFit/>
+          </a:bodyPr>
+          <a:lstStyle/>
+          <a:p>
+            <a:pPr algn="l"/>
+            <a:r>
+              <a:rPr sz="700" b="0">
+                <a:solidFill>
+                  <a:srgbClr val="344256"/>
+                </a:solidFill>
+                <a:latin typeface="Arial"/>
+              </a:rPr>
+              <a:t>A concrete next step is an adaptive solver that routes problems to the cheapest sufficient reasoning mode, verifies answer stability, and stops once the solution is reliable.</a:t>
+            </a:r>
+          </a:p>
+        </p:txBody>
+      </p:sp>
+      <p:sp>
+        <p:nvSpPr>
+          <p:cNvPr id="34" name="Rectangle 33"/>
           <p:cNvSpPr/>
           <p:nvPr/>
         </p:nvSpPr>
@@ -11729,7 +16205,7 @@
       </p:sp>
       <p:sp>
         <p:nvSpPr>
-          <p:cNvPr id="29" name="TextBox 28"/>
+          <p:cNvPr id="35" name="TextBox 34"/>
           <p:cNvSpPr txBox="1"/>
           <p:nvPr/>
         </p:nvSpPr>
@@ -12496,6 +16972,242 @@
         </p:nvSpPr>
         <p:spPr>
           <a:xfrm>
+            <a:off x="694944" y="5650992"/>
+            <a:ext cx="10771632" cy="548640"/>
+          </a:xfrm>
+          <a:prstGeom prst="rect">
+            <a:avLst/>
+          </a:prstGeom>
+          <a:solidFill>
+            <a:srgbClr val="FFFFFF"/>
+          </a:solidFill>
+          <a:ln>
+            <a:solidFill>
+              <a:srgbClr val="CED6E3"/>
+            </a:solidFill>
+          </a:ln>
+        </p:spPr>
+        <p:style>
+          <a:lnRef idx="1">
+            <a:schemeClr val="accent1"/>
+          </a:lnRef>
+          <a:fillRef idx="3">
+            <a:schemeClr val="accent1"/>
+          </a:fillRef>
+          <a:effectRef idx="2">
+            <a:schemeClr val="accent1"/>
+          </a:effectRef>
+          <a:fontRef idx="minor">
+            <a:schemeClr val="lt1"/>
+          </a:fontRef>
+        </p:style>
+        <p:txBody>
+          <a:bodyPr rtlCol="0" anchor="ctr"/>
+          <a:lstStyle/>
+          <a:p>
+            <a:pPr algn="ctr"/>
+          </a:p>
+        </p:txBody>
+      </p:sp>
+      <p:sp>
+        <p:nvSpPr>
+          <p:cNvPr id="21" name="Rectangle 20"/>
+          <p:cNvSpPr/>
+          <p:nvPr/>
+        </p:nvSpPr>
+        <p:spPr>
+          <a:xfrm>
+            <a:off x="694944" y="5650992"/>
+            <a:ext cx="54864" cy="548640"/>
+          </a:xfrm>
+          <a:prstGeom prst="rect">
+            <a:avLst/>
+          </a:prstGeom>
+          <a:solidFill>
+            <a:srgbClr val="1E5B9E"/>
+          </a:solidFill>
+          <a:ln>
+            <a:noFill/>
+          </a:ln>
+        </p:spPr>
+        <p:style>
+          <a:lnRef idx="1">
+            <a:schemeClr val="accent1"/>
+          </a:lnRef>
+          <a:fillRef idx="3">
+            <a:schemeClr val="accent1"/>
+          </a:fillRef>
+          <a:effectRef idx="2">
+            <a:schemeClr val="accent1"/>
+          </a:effectRef>
+          <a:fontRef idx="minor">
+            <a:schemeClr val="lt1"/>
+          </a:fontRef>
+        </p:style>
+        <p:txBody>
+          <a:bodyPr rtlCol="0" anchor="ctr"/>
+          <a:lstStyle/>
+          <a:p>
+            <a:pPr algn="ctr"/>
+          </a:p>
+        </p:txBody>
+      </p:sp>
+      <p:sp>
+        <p:nvSpPr>
+          <p:cNvPr id="22" name="Rounded Rectangle 21"/>
+          <p:cNvSpPr/>
+          <p:nvPr/>
+        </p:nvSpPr>
+        <p:spPr>
+          <a:xfrm>
+            <a:off x="841248" y="5733288"/>
+            <a:ext cx="1325880" cy="146304"/>
+          </a:xfrm>
+          <a:prstGeom prst="roundRect">
+            <a:avLst/>
+          </a:prstGeom>
+          <a:solidFill>
+            <a:srgbClr val="EAF2FF"/>
+          </a:solidFill>
+          <a:ln>
+            <a:noFill/>
+          </a:ln>
+        </p:spPr>
+        <p:style>
+          <a:lnRef idx="1">
+            <a:schemeClr val="accent1"/>
+          </a:lnRef>
+          <a:fillRef idx="3">
+            <a:schemeClr val="accent1"/>
+          </a:fillRef>
+          <a:effectRef idx="2">
+            <a:schemeClr val="accent1"/>
+          </a:effectRef>
+          <a:fontRef idx="minor">
+            <a:schemeClr val="lt1"/>
+          </a:fontRef>
+        </p:style>
+        <p:txBody>
+          <a:bodyPr rtlCol="0" anchor="ctr"/>
+          <a:lstStyle/>
+          <a:p>
+            <a:pPr algn="ctr"/>
+          </a:p>
+        </p:txBody>
+      </p:sp>
+      <p:sp>
+        <p:nvSpPr>
+          <p:cNvPr id="23" name="TextBox 22"/>
+          <p:cNvSpPr txBox="1"/>
+          <p:nvPr/>
+        </p:nvSpPr>
+        <p:spPr>
+          <a:xfrm>
+            <a:off x="896112" y="5765292"/>
+            <a:ext cx="1170432" cy="73152"/>
+          </a:xfrm>
+          <a:prstGeom prst="rect">
+            <a:avLst/>
+          </a:prstGeom>
+          <a:noFill/>
+        </p:spPr>
+        <p:txBody>
+          <a:bodyPr wrap="square" lIns="36576" rIns="36576" tIns="18288" bIns="18288" anchor="t">
+            <a:spAutoFit/>
+          </a:bodyPr>
+          <a:lstStyle/>
+          <a:p>
+            <a:pPr algn="ctr"/>
+            <a:r>
+              <a:rPr sz="600" b="1">
+                <a:solidFill>
+                  <a:srgbClr val="1E5B9E"/>
+                </a:solidFill>
+                <a:latin typeface="Courier New"/>
+              </a:rPr>
+              <a:t>RESEARCH LENS</a:t>
+            </a:r>
+          </a:p>
+        </p:txBody>
+      </p:sp>
+      <p:sp>
+        <p:nvSpPr>
+          <p:cNvPr id="24" name="TextBox 23"/>
+          <p:cNvSpPr txBox="1"/>
+          <p:nvPr/>
+        </p:nvSpPr>
+        <p:spPr>
+          <a:xfrm>
+            <a:off x="9985248" y="5765292"/>
+            <a:ext cx="1097280" cy="73152"/>
+          </a:xfrm>
+          <a:prstGeom prst="rect">
+            <a:avLst/>
+          </a:prstGeom>
+          <a:noFill/>
+        </p:spPr>
+        <p:txBody>
+          <a:bodyPr wrap="square" lIns="36576" rIns="36576" tIns="18288" bIns="18288" anchor="t">
+            <a:spAutoFit/>
+          </a:bodyPr>
+          <a:lstStyle/>
+          <a:p>
+            <a:pPr algn="r"/>
+            <a:r>
+              <a:rPr sz="600" b="1">
+                <a:solidFill>
+                  <a:srgbClr val="647084"/>
+                </a:solidFill>
+                <a:latin typeface="Courier New"/>
+              </a:rPr>
+              <a:t>QUESTION</a:t>
+            </a:r>
+          </a:p>
+        </p:txBody>
+      </p:sp>
+      <p:sp>
+        <p:nvSpPr>
+          <p:cNvPr id="25" name="TextBox 24"/>
+          <p:cNvSpPr txBox="1"/>
+          <p:nvPr/>
+        </p:nvSpPr>
+        <p:spPr>
+          <a:xfrm>
+            <a:off x="841248" y="5925312"/>
+            <a:ext cx="10296144" cy="146304"/>
+          </a:xfrm>
+          <a:prstGeom prst="rect">
+            <a:avLst/>
+          </a:prstGeom>
+          <a:noFill/>
+        </p:spPr>
+        <p:txBody>
+          <a:bodyPr wrap="square" lIns="36576" rIns="36576" tIns="18288" bIns="18288" anchor="t">
+            <a:spAutoFit/>
+          </a:bodyPr>
+          <a:lstStyle/>
+          <a:p>
+            <a:pPr algn="l"/>
+            <a:r>
+              <a:rPr sz="700" b="0">
+                <a:solidFill>
+                  <a:srgbClr val="344256"/>
+                </a:solidFill>
+                <a:latin typeface="Arial"/>
+              </a:rPr>
+              <a:t>The research question is framed around small open-weight models, where each extra generation stage matters. The goal is to improve correctness while keeping the reasoning process observable and comparable.</a:t>
+            </a:r>
+          </a:p>
+        </p:txBody>
+      </p:sp>
+      <p:sp>
+        <p:nvSpPr>
+          <p:cNvPr id="26" name="Rectangle 25"/>
+          <p:cNvSpPr/>
+          <p:nvPr/>
+        </p:nvSpPr>
+        <p:spPr>
+          <a:xfrm>
             <a:off x="658368" y="6355080"/>
             <a:ext cx="10607040" cy="9144"/>
           </a:xfrm>
@@ -12533,7 +17245,7 @@
       </p:sp>
       <p:sp>
         <p:nvSpPr>
-          <p:cNvPr id="21" name="TextBox 20"/>
+          <p:cNvPr id="27" name="TextBox 26"/>
           <p:cNvSpPr txBox="1"/>
           <p:nvPr/>
         </p:nvSpPr>
@@ -12971,7 +17683,7 @@
                 </a:solidFill>
                 <a:latin typeface="Arial"/>
               </a:rPr>
-              <a:t>Plan-and-Solve is the strongest prompt-only story for this project.</a:t>
+              <a:t>Plan-and-Solve is the cleanest main contribution because it improves joint score without leaving the prompt-only setting.</a:t>
             </a:r>
           </a:p>
         </p:txBody>
@@ -13129,7 +17841,7 @@
                 </a:solidFill>
                 <a:latin typeface="Arial"/>
               </a:rPr>
-              <a:t>TIR is best framed as an agentic extension, not a fair prompt-only baseline.</a:t>
+              <a:t>TIR is best read as an agentic extension: reason, act, observe, and continue with a narrow mathematical tool boundary.</a:t>
             </a:r>
           </a:p>
         </p:txBody>
@@ -13287,7 +17999,7 @@
                 </a:solidFill>
                 <a:latin typeface="Arial"/>
               </a:rPr>
-              <a:t>The joint score keeps correctness dominant while making hidden cost visible.</a:t>
+              <a:t>The joint score keeps correctness dominant while exposing hidden budget, unstable answer cues, and excessive reflection.</a:t>
             </a:r>
           </a:p>
         </p:txBody>
@@ -13295,6 +18007,242 @@
       <p:sp>
         <p:nvSpPr>
           <p:cNvPr id="20" name="Rectangle 19"/>
+          <p:cNvSpPr/>
+          <p:nvPr/>
+        </p:nvSpPr>
+        <p:spPr>
+          <a:xfrm>
+            <a:off x="694944" y="5650992"/>
+            <a:ext cx="10771632" cy="548640"/>
+          </a:xfrm>
+          <a:prstGeom prst="rect">
+            <a:avLst/>
+          </a:prstGeom>
+          <a:solidFill>
+            <a:srgbClr val="FFFFFF"/>
+          </a:solidFill>
+          <a:ln>
+            <a:solidFill>
+              <a:srgbClr val="CED6E3"/>
+            </a:solidFill>
+          </a:ln>
+        </p:spPr>
+        <p:style>
+          <a:lnRef idx="1">
+            <a:schemeClr val="accent1"/>
+          </a:lnRef>
+          <a:fillRef idx="3">
+            <a:schemeClr val="accent1"/>
+          </a:fillRef>
+          <a:effectRef idx="2">
+            <a:schemeClr val="accent1"/>
+          </a:effectRef>
+          <a:fontRef idx="minor">
+            <a:schemeClr val="lt1"/>
+          </a:fontRef>
+        </p:style>
+        <p:txBody>
+          <a:bodyPr rtlCol="0" anchor="ctr"/>
+          <a:lstStyle/>
+          <a:p>
+            <a:pPr algn="ctr"/>
+          </a:p>
+        </p:txBody>
+      </p:sp>
+      <p:sp>
+        <p:nvSpPr>
+          <p:cNvPr id="21" name="Rectangle 20"/>
+          <p:cNvSpPr/>
+          <p:nvPr/>
+        </p:nvSpPr>
+        <p:spPr>
+          <a:xfrm>
+            <a:off x="694944" y="5650992"/>
+            <a:ext cx="54864" cy="548640"/>
+          </a:xfrm>
+          <a:prstGeom prst="rect">
+            <a:avLst/>
+          </a:prstGeom>
+          <a:solidFill>
+            <a:srgbClr val="2F855A"/>
+          </a:solidFill>
+          <a:ln>
+            <a:noFill/>
+          </a:ln>
+        </p:spPr>
+        <p:style>
+          <a:lnRef idx="1">
+            <a:schemeClr val="accent1"/>
+          </a:lnRef>
+          <a:fillRef idx="3">
+            <a:schemeClr val="accent1"/>
+          </a:fillRef>
+          <a:effectRef idx="2">
+            <a:schemeClr val="accent1"/>
+          </a:effectRef>
+          <a:fontRef idx="minor">
+            <a:schemeClr val="lt1"/>
+          </a:fontRef>
+        </p:style>
+        <p:txBody>
+          <a:bodyPr rtlCol="0" anchor="ctr"/>
+          <a:lstStyle/>
+          <a:p>
+            <a:pPr algn="ctr"/>
+          </a:p>
+        </p:txBody>
+      </p:sp>
+      <p:sp>
+        <p:nvSpPr>
+          <p:cNvPr id="22" name="Rounded Rectangle 21"/>
+          <p:cNvSpPr/>
+          <p:nvPr/>
+        </p:nvSpPr>
+        <p:spPr>
+          <a:xfrm>
+            <a:off x="841248" y="5733288"/>
+            <a:ext cx="1325880" cy="146304"/>
+          </a:xfrm>
+          <a:prstGeom prst="roundRect">
+            <a:avLst/>
+          </a:prstGeom>
+          <a:solidFill>
+            <a:srgbClr val="EAF7EF"/>
+          </a:solidFill>
+          <a:ln>
+            <a:noFill/>
+          </a:ln>
+        </p:spPr>
+        <p:style>
+          <a:lnRef idx="1">
+            <a:schemeClr val="accent1"/>
+          </a:lnRef>
+          <a:fillRef idx="3">
+            <a:schemeClr val="accent1"/>
+          </a:fillRef>
+          <a:effectRef idx="2">
+            <a:schemeClr val="accent1"/>
+          </a:effectRef>
+          <a:fontRef idx="minor">
+            <a:schemeClr val="lt1"/>
+          </a:fontRef>
+        </p:style>
+        <p:txBody>
+          <a:bodyPr rtlCol="0" anchor="ctr"/>
+          <a:lstStyle/>
+          <a:p>
+            <a:pPr algn="ctr"/>
+          </a:p>
+        </p:txBody>
+      </p:sp>
+      <p:sp>
+        <p:nvSpPr>
+          <p:cNvPr id="23" name="TextBox 22"/>
+          <p:cNvSpPr txBox="1"/>
+          <p:nvPr/>
+        </p:nvSpPr>
+        <p:spPr>
+          <a:xfrm>
+            <a:off x="896112" y="5765292"/>
+            <a:ext cx="1170432" cy="73152"/>
+          </a:xfrm>
+          <a:prstGeom prst="rect">
+            <a:avLst/>
+          </a:prstGeom>
+          <a:noFill/>
+        </p:spPr>
+        <p:txBody>
+          <a:bodyPr wrap="square" lIns="36576" rIns="36576" tIns="18288" bIns="18288" anchor="t">
+            <a:spAutoFit/>
+          </a:bodyPr>
+          <a:lstStyle/>
+          <a:p>
+            <a:pPr algn="ctr"/>
+            <a:r>
+              <a:rPr sz="600" b="1">
+                <a:solidFill>
+                  <a:srgbClr val="2F855A"/>
+                </a:solidFill>
+                <a:latin typeface="Courier New"/>
+              </a:rPr>
+              <a:t>FINAL TAKEAWAY</a:t>
+            </a:r>
+          </a:p>
+        </p:txBody>
+      </p:sp>
+      <p:sp>
+        <p:nvSpPr>
+          <p:cNvPr id="24" name="TextBox 23"/>
+          <p:cNvSpPr txBox="1"/>
+          <p:nvPr/>
+        </p:nvSpPr>
+        <p:spPr>
+          <a:xfrm>
+            <a:off x="9985248" y="5765292"/>
+            <a:ext cx="1097280" cy="73152"/>
+          </a:xfrm>
+          <a:prstGeom prst="rect">
+            <a:avLst/>
+          </a:prstGeom>
+          <a:noFill/>
+        </p:spPr>
+        <p:txBody>
+          <a:bodyPr wrap="square" lIns="36576" rIns="36576" tIns="18288" bIns="18288" anchor="t">
+            <a:spAutoFit/>
+          </a:bodyPr>
+          <a:lstStyle/>
+          <a:p>
+            <a:pPr algn="r"/>
+            <a:r>
+              <a:rPr sz="600" b="1">
+                <a:solidFill>
+                  <a:srgbClr val="647084"/>
+                </a:solidFill>
+                <a:latin typeface="Courier New"/>
+              </a:rPr>
+              <a:t>Q&amp;A</a:t>
+            </a:r>
+          </a:p>
+        </p:txBody>
+      </p:sp>
+      <p:sp>
+        <p:nvSpPr>
+          <p:cNvPr id="25" name="TextBox 24"/>
+          <p:cNvSpPr txBox="1"/>
+          <p:nvPr/>
+        </p:nvSpPr>
+        <p:spPr>
+          <a:xfrm>
+            <a:off x="841248" y="5925312"/>
+            <a:ext cx="10296144" cy="146304"/>
+          </a:xfrm>
+          <a:prstGeom prst="rect">
+            <a:avLst/>
+          </a:prstGeom>
+          <a:noFill/>
+        </p:spPr>
+        <p:txBody>
+          <a:bodyPr wrap="square" lIns="36576" rIns="36576" tIns="18288" bIns="18288" anchor="t">
+            <a:spAutoFit/>
+          </a:bodyPr>
+          <a:lstStyle/>
+          <a:p>
+            <a:pPr algn="l"/>
+            <a:r>
+              <a:rPr sz="700" b="0">
+                <a:solidFill>
+                  <a:srgbClr val="344256"/>
+                </a:solidFill>
+                <a:latin typeface="Arial"/>
+              </a:rPr>
+              <a:t>The final message is methodological: once methods use planning, sampling, refinement, or tools, evaluation must specify what behavior it rewards and what cost it counts.</a:t>
+            </a:r>
+          </a:p>
+        </p:txBody>
+      </p:sp>
+      <p:sp>
+        <p:nvSpPr>
+          <p:cNvPr id="26" name="Rectangle 25"/>
           <p:cNvSpPr/>
           <p:nvPr/>
         </p:nvSpPr>
@@ -13337,7 +18285,7 @@
       </p:sp>
       <p:sp>
         <p:nvSpPr>
-          <p:cNvPr id="21" name="TextBox 20"/>
+          <p:cNvPr id="27" name="TextBox 26"/>
           <p:cNvSpPr txBox="1"/>
           <p:nvPr/>
         </p:nvSpPr>
@@ -14184,6 +19132,242 @@
         </p:nvSpPr>
         <p:spPr>
           <a:xfrm>
+            <a:off x="694944" y="5650992"/>
+            <a:ext cx="10771632" cy="548640"/>
+          </a:xfrm>
+          <a:prstGeom prst="rect">
+            <a:avLst/>
+          </a:prstGeom>
+          <a:solidFill>
+            <a:srgbClr val="FFFFFF"/>
+          </a:solidFill>
+          <a:ln>
+            <a:solidFill>
+              <a:srgbClr val="CED6E3"/>
+            </a:solidFill>
+          </a:ln>
+        </p:spPr>
+        <p:style>
+          <a:lnRef idx="1">
+            <a:schemeClr val="accent1"/>
+          </a:lnRef>
+          <a:fillRef idx="3">
+            <a:schemeClr val="accent1"/>
+          </a:fillRef>
+          <a:effectRef idx="2">
+            <a:schemeClr val="accent1"/>
+          </a:effectRef>
+          <a:fontRef idx="minor">
+            <a:schemeClr val="lt1"/>
+          </a:fontRef>
+        </p:style>
+        <p:txBody>
+          <a:bodyPr rtlCol="0" anchor="ctr"/>
+          <a:lstStyle/>
+          <a:p>
+            <a:pPr algn="ctr"/>
+          </a:p>
+        </p:txBody>
+      </p:sp>
+      <p:sp>
+        <p:nvSpPr>
+          <p:cNvPr id="23" name="Rectangle 22"/>
+          <p:cNvSpPr/>
+          <p:nvPr/>
+        </p:nvSpPr>
+        <p:spPr>
+          <a:xfrm>
+            <a:off x="694944" y="5650992"/>
+            <a:ext cx="54864" cy="548640"/>
+          </a:xfrm>
+          <a:prstGeom prst="rect">
+            <a:avLst/>
+          </a:prstGeom>
+          <a:solidFill>
+            <a:srgbClr val="0F766E"/>
+          </a:solidFill>
+          <a:ln>
+            <a:noFill/>
+          </a:ln>
+        </p:spPr>
+        <p:style>
+          <a:lnRef idx="1">
+            <a:schemeClr val="accent1"/>
+          </a:lnRef>
+          <a:fillRef idx="3">
+            <a:schemeClr val="accent1"/>
+          </a:fillRef>
+          <a:effectRef idx="2">
+            <a:schemeClr val="accent1"/>
+          </a:effectRef>
+          <a:fontRef idx="minor">
+            <a:schemeClr val="lt1"/>
+          </a:fontRef>
+        </p:style>
+        <p:txBody>
+          <a:bodyPr rtlCol="0" anchor="ctr"/>
+          <a:lstStyle/>
+          <a:p>
+            <a:pPr algn="ctr"/>
+          </a:p>
+        </p:txBody>
+      </p:sp>
+      <p:sp>
+        <p:nvSpPr>
+          <p:cNvPr id="24" name="Rounded Rectangle 23"/>
+          <p:cNvSpPr/>
+          <p:nvPr/>
+        </p:nvSpPr>
+        <p:spPr>
+          <a:xfrm>
+            <a:off x="841248" y="5733288"/>
+            <a:ext cx="1325880" cy="146304"/>
+          </a:xfrm>
+          <a:prstGeom prst="roundRect">
+            <a:avLst/>
+          </a:prstGeom>
+          <a:solidFill>
+            <a:srgbClr val="E7F6F4"/>
+          </a:solidFill>
+          <a:ln>
+            <a:noFill/>
+          </a:ln>
+        </p:spPr>
+        <p:style>
+          <a:lnRef idx="1">
+            <a:schemeClr val="accent1"/>
+          </a:lnRef>
+          <a:fillRef idx="3">
+            <a:schemeClr val="accent1"/>
+          </a:fillRef>
+          <a:effectRef idx="2">
+            <a:schemeClr val="accent1"/>
+          </a:effectRef>
+          <a:fontRef idx="minor">
+            <a:schemeClr val="lt1"/>
+          </a:fontRef>
+        </p:style>
+        <p:txBody>
+          <a:bodyPr rtlCol="0" anchor="ctr"/>
+          <a:lstStyle/>
+          <a:p>
+            <a:pPr algn="ctr"/>
+          </a:p>
+        </p:txBody>
+      </p:sp>
+      <p:sp>
+        <p:nvSpPr>
+          <p:cNvPr id="25" name="TextBox 24"/>
+          <p:cNvSpPr txBox="1"/>
+          <p:nvPr/>
+        </p:nvSpPr>
+        <p:spPr>
+          <a:xfrm>
+            <a:off x="896112" y="5765292"/>
+            <a:ext cx="1170432" cy="73152"/>
+          </a:xfrm>
+          <a:prstGeom prst="rect">
+            <a:avLst/>
+          </a:prstGeom>
+          <a:noFill/>
+        </p:spPr>
+        <p:txBody>
+          <a:bodyPr wrap="square" lIns="36576" rIns="36576" tIns="18288" bIns="18288" anchor="t">
+            <a:spAutoFit/>
+          </a:bodyPr>
+          <a:lstStyle/>
+          <a:p>
+            <a:pPr algn="ctr"/>
+            <a:r>
+              <a:rPr sz="600" b="1">
+                <a:solidFill>
+                  <a:srgbClr val="0F766E"/>
+                </a:solidFill>
+                <a:latin typeface="Courier New"/>
+              </a:rPr>
+              <a:t>PROTOCOL READ</a:t>
+            </a:r>
+          </a:p>
+        </p:txBody>
+      </p:sp>
+      <p:sp>
+        <p:nvSpPr>
+          <p:cNvPr id="26" name="TextBox 25"/>
+          <p:cNvSpPr txBox="1"/>
+          <p:nvPr/>
+        </p:nvSpPr>
+        <p:spPr>
+          <a:xfrm>
+            <a:off x="9985248" y="5765292"/>
+            <a:ext cx="1097280" cy="73152"/>
+          </a:xfrm>
+          <a:prstGeom prst="rect">
+            <a:avLst/>
+          </a:prstGeom>
+          <a:noFill/>
+        </p:spPr>
+        <p:txBody>
+          <a:bodyPr wrap="square" lIns="36576" rIns="36576" tIns="18288" bIns="18288" anchor="t">
+            <a:spAutoFit/>
+          </a:bodyPr>
+          <a:lstStyle/>
+          <a:p>
+            <a:pPr algn="r"/>
+            <a:r>
+              <a:rPr sz="600" b="1">
+                <a:solidFill>
+                  <a:srgbClr val="647084"/>
+                </a:solidFill>
+                <a:latin typeface="Courier New"/>
+              </a:rPr>
+              <a:t>SETUP</a:t>
+            </a:r>
+          </a:p>
+        </p:txBody>
+      </p:sp>
+      <p:sp>
+        <p:nvSpPr>
+          <p:cNvPr id="27" name="TextBox 26"/>
+          <p:cNvSpPr txBox="1"/>
+          <p:nvPr/>
+        </p:nvSpPr>
+        <p:spPr>
+          <a:xfrm>
+            <a:off x="841248" y="5925312"/>
+            <a:ext cx="10296144" cy="146304"/>
+          </a:xfrm>
+          <a:prstGeom prst="rect">
+            <a:avLst/>
+          </a:prstGeom>
+          <a:noFill/>
+        </p:spPr>
+        <p:txBody>
+          <a:bodyPr wrap="square" lIns="36576" rIns="36576" tIns="18288" bIns="18288" anchor="t">
+            <a:spAutoFit/>
+          </a:bodyPr>
+          <a:lstStyle/>
+          <a:p>
+            <a:pPr algn="l"/>
+            <a:r>
+              <a:rPr sz="700" b="0">
+                <a:solidFill>
+                  <a:srgbClr val="344256"/>
+                </a:solidFill>
+                <a:latin typeface="Arial"/>
+              </a:rPr>
+              <a:t>The setup uses fixed sampled subsets to make the experiment reproducible. This supports relative method comparison, while the report still treats exact numbers as sample-dependent reference values.</a:t>
+            </a:r>
+          </a:p>
+        </p:txBody>
+      </p:sp>
+      <p:sp>
+        <p:nvSpPr>
+          <p:cNvPr id="28" name="Rectangle 27"/>
+          <p:cNvSpPr/>
+          <p:nvPr/>
+        </p:nvSpPr>
+        <p:spPr>
+          <a:xfrm>
             <a:off x="658368" y="6355080"/>
             <a:ext cx="10607040" cy="9144"/>
           </a:xfrm>
@@ -14221,7 +19405,7 @@
       </p:sp>
       <p:sp>
         <p:nvSpPr>
-          <p:cNvPr id="23" name="TextBox 22"/>
+          <p:cNvPr id="29" name="TextBox 28"/>
           <p:cNvSpPr txBox="1"/>
           <p:nvPr/>
         </p:nvSpPr>
@@ -15286,6 +20470,242 @@
         </p:nvSpPr>
         <p:spPr>
           <a:xfrm>
+            <a:off x="694944" y="5650992"/>
+            <a:ext cx="10771632" cy="548640"/>
+          </a:xfrm>
+          <a:prstGeom prst="rect">
+            <a:avLst/>
+          </a:prstGeom>
+          <a:solidFill>
+            <a:srgbClr val="FFFFFF"/>
+          </a:solidFill>
+          <a:ln>
+            <a:solidFill>
+              <a:srgbClr val="CED6E3"/>
+            </a:solidFill>
+          </a:ln>
+        </p:spPr>
+        <p:style>
+          <a:lnRef idx="1">
+            <a:schemeClr val="accent1"/>
+          </a:lnRef>
+          <a:fillRef idx="3">
+            <a:schemeClr val="accent1"/>
+          </a:fillRef>
+          <a:effectRef idx="2">
+            <a:schemeClr val="accent1"/>
+          </a:effectRef>
+          <a:fontRef idx="minor">
+            <a:schemeClr val="lt1"/>
+          </a:fontRef>
+        </p:style>
+        <p:txBody>
+          <a:bodyPr rtlCol="0" anchor="ctr"/>
+          <a:lstStyle/>
+          <a:p>
+            <a:pPr algn="ctr"/>
+          </a:p>
+        </p:txBody>
+      </p:sp>
+      <p:sp>
+        <p:nvSpPr>
+          <p:cNvPr id="29" name="Rectangle 28"/>
+          <p:cNvSpPr/>
+          <p:nvPr/>
+        </p:nvSpPr>
+        <p:spPr>
+          <a:xfrm>
+            <a:off x="694944" y="5650992"/>
+            <a:ext cx="54864" cy="548640"/>
+          </a:xfrm>
+          <a:prstGeom prst="rect">
+            <a:avLst/>
+          </a:prstGeom>
+          <a:solidFill>
+            <a:srgbClr val="1E5B9E"/>
+          </a:solidFill>
+          <a:ln>
+            <a:noFill/>
+          </a:ln>
+        </p:spPr>
+        <p:style>
+          <a:lnRef idx="1">
+            <a:schemeClr val="accent1"/>
+          </a:lnRef>
+          <a:fillRef idx="3">
+            <a:schemeClr val="accent1"/>
+          </a:fillRef>
+          <a:effectRef idx="2">
+            <a:schemeClr val="accent1"/>
+          </a:effectRef>
+          <a:fontRef idx="minor">
+            <a:schemeClr val="lt1"/>
+          </a:fontRef>
+        </p:style>
+        <p:txBody>
+          <a:bodyPr rtlCol="0" anchor="ctr"/>
+          <a:lstStyle/>
+          <a:p>
+            <a:pPr algn="ctr"/>
+          </a:p>
+        </p:txBody>
+      </p:sp>
+      <p:sp>
+        <p:nvSpPr>
+          <p:cNvPr id="30" name="Rounded Rectangle 29"/>
+          <p:cNvSpPr/>
+          <p:nvPr/>
+        </p:nvSpPr>
+        <p:spPr>
+          <a:xfrm>
+            <a:off x="841248" y="5733288"/>
+            <a:ext cx="1325880" cy="146304"/>
+          </a:xfrm>
+          <a:prstGeom prst="roundRect">
+            <a:avLst/>
+          </a:prstGeom>
+          <a:solidFill>
+            <a:srgbClr val="EAF2FF"/>
+          </a:solidFill>
+          <a:ln>
+            <a:noFill/>
+          </a:ln>
+        </p:spPr>
+        <p:style>
+          <a:lnRef idx="1">
+            <a:schemeClr val="accent1"/>
+          </a:lnRef>
+          <a:fillRef idx="3">
+            <a:schemeClr val="accent1"/>
+          </a:fillRef>
+          <a:effectRef idx="2">
+            <a:schemeClr val="accent1"/>
+          </a:effectRef>
+          <a:fontRef idx="minor">
+            <a:schemeClr val="lt1"/>
+          </a:fontRef>
+        </p:style>
+        <p:txBody>
+          <a:bodyPr rtlCol="0" anchor="ctr"/>
+          <a:lstStyle/>
+          <a:p>
+            <a:pPr algn="ctr"/>
+          </a:p>
+        </p:txBody>
+      </p:sp>
+      <p:sp>
+        <p:nvSpPr>
+          <p:cNvPr id="31" name="TextBox 30"/>
+          <p:cNvSpPr txBox="1"/>
+          <p:nvPr/>
+        </p:nvSpPr>
+        <p:spPr>
+          <a:xfrm>
+            <a:off x="896112" y="5765292"/>
+            <a:ext cx="1170432" cy="73152"/>
+          </a:xfrm>
+          <a:prstGeom prst="rect">
+            <a:avLst/>
+          </a:prstGeom>
+          <a:noFill/>
+        </p:spPr>
+        <p:txBody>
+          <a:bodyPr wrap="square" lIns="36576" rIns="36576" tIns="18288" bIns="18288" anchor="t">
+            <a:spAutoFit/>
+          </a:bodyPr>
+          <a:lstStyle/>
+          <a:p>
+            <a:pPr algn="ctr"/>
+            <a:r>
+              <a:rPr sz="600" b="1">
+                <a:solidFill>
+                  <a:srgbClr val="1E5B9E"/>
+                </a:solidFill>
+                <a:latin typeface="Courier New"/>
+              </a:rPr>
+              <a:t>DESIGN LENS</a:t>
+            </a:r>
+          </a:p>
+        </p:txBody>
+      </p:sp>
+      <p:sp>
+        <p:nvSpPr>
+          <p:cNvPr id="32" name="TextBox 31"/>
+          <p:cNvSpPr txBox="1"/>
+          <p:nvPr/>
+        </p:nvSpPr>
+        <p:spPr>
+          <a:xfrm>
+            <a:off x="9985248" y="5765292"/>
+            <a:ext cx="1097280" cy="73152"/>
+          </a:xfrm>
+          <a:prstGeom prst="rect">
+            <a:avLst/>
+          </a:prstGeom>
+          <a:noFill/>
+        </p:spPr>
+        <p:txBody>
+          <a:bodyPr wrap="square" lIns="36576" rIns="36576" tIns="18288" bIns="18288" anchor="t">
+            <a:spAutoFit/>
+          </a:bodyPr>
+          <a:lstStyle/>
+          <a:p>
+            <a:pPr algn="r"/>
+            <a:r>
+              <a:rPr sz="600" b="1">
+                <a:solidFill>
+                  <a:srgbClr val="647084"/>
+                </a:solidFill>
+                <a:latin typeface="Courier New"/>
+              </a:rPr>
+              <a:t>PIPELINE</a:t>
+            </a:r>
+          </a:p>
+        </p:txBody>
+      </p:sp>
+      <p:sp>
+        <p:nvSpPr>
+          <p:cNvPr id="33" name="TextBox 32"/>
+          <p:cNvSpPr txBox="1"/>
+          <p:nvPr/>
+        </p:nvSpPr>
+        <p:spPr>
+          <a:xfrm>
+            <a:off x="841248" y="5925312"/>
+            <a:ext cx="10296144" cy="146304"/>
+          </a:xfrm>
+          <a:prstGeom prst="rect">
+            <a:avLst/>
+          </a:prstGeom>
+          <a:noFill/>
+        </p:spPr>
+        <p:txBody>
+          <a:bodyPr wrap="square" lIns="36576" rIns="36576" tIns="18288" bIns="18288" anchor="t">
+            <a:spAutoFit/>
+          </a:bodyPr>
+          <a:lstStyle/>
+          <a:p>
+            <a:pPr algn="l"/>
+            <a:r>
+              <a:rPr sz="700" b="0">
+                <a:solidFill>
+                  <a:srgbClr val="344256"/>
+                </a:solidFill>
+                <a:latin typeface="Arial"/>
+              </a:rPr>
+              <a:t>For multi-stage methods, the intermediate plan, critique, voted samples, and tool transcript are part of the method. Counting them avoids underestimating the real computational behavior.</a:t>
+            </a:r>
+          </a:p>
+        </p:txBody>
+      </p:sp>
+      <p:sp>
+        <p:nvSpPr>
+          <p:cNvPr id="34" name="Rectangle 33"/>
+          <p:cNvSpPr/>
+          <p:nvPr/>
+        </p:nvSpPr>
+        <p:spPr>
+          <a:xfrm>
             <a:off x="658368" y="6355080"/>
             <a:ext cx="10607040" cy="9144"/>
           </a:xfrm>
@@ -15323,7 +20743,7 @@
       </p:sp>
       <p:sp>
         <p:nvSpPr>
-          <p:cNvPr id="29" name="TextBox 28"/>
+          <p:cNvPr id="35" name="TextBox 34"/>
           <p:cNvSpPr txBox="1"/>
           <p:nvPr/>
         </p:nvSpPr>
@@ -16231,6 +21651,242 @@
         </p:nvSpPr>
         <p:spPr>
           <a:xfrm>
+            <a:off x="694944" y="5650992"/>
+            <a:ext cx="10771632" cy="548640"/>
+          </a:xfrm>
+          <a:prstGeom prst="rect">
+            <a:avLst/>
+          </a:prstGeom>
+          <a:solidFill>
+            <a:srgbClr val="FFFFFF"/>
+          </a:solidFill>
+          <a:ln>
+            <a:solidFill>
+              <a:srgbClr val="CED6E3"/>
+            </a:solidFill>
+          </a:ln>
+        </p:spPr>
+        <p:style>
+          <a:lnRef idx="1">
+            <a:schemeClr val="accent1"/>
+          </a:lnRef>
+          <a:fillRef idx="3">
+            <a:schemeClr val="accent1"/>
+          </a:fillRef>
+          <a:effectRef idx="2">
+            <a:schemeClr val="accent1"/>
+          </a:effectRef>
+          <a:fontRef idx="minor">
+            <a:schemeClr val="lt1"/>
+          </a:fontRef>
+        </p:style>
+        <p:txBody>
+          <a:bodyPr rtlCol="0" anchor="ctr"/>
+          <a:lstStyle/>
+          <a:p>
+            <a:pPr algn="ctr"/>
+          </a:p>
+        </p:txBody>
+      </p:sp>
+      <p:sp>
+        <p:nvSpPr>
+          <p:cNvPr id="24" name="Rectangle 23"/>
+          <p:cNvSpPr/>
+          <p:nvPr/>
+        </p:nvSpPr>
+        <p:spPr>
+          <a:xfrm>
+            <a:off x="694944" y="5650992"/>
+            <a:ext cx="54864" cy="548640"/>
+          </a:xfrm>
+          <a:prstGeom prst="rect">
+            <a:avLst/>
+          </a:prstGeom>
+          <a:solidFill>
+            <a:srgbClr val="B7791F"/>
+          </a:solidFill>
+          <a:ln>
+            <a:noFill/>
+          </a:ln>
+        </p:spPr>
+        <p:style>
+          <a:lnRef idx="1">
+            <a:schemeClr val="accent1"/>
+          </a:lnRef>
+          <a:fillRef idx="3">
+            <a:schemeClr val="accent1"/>
+          </a:fillRef>
+          <a:effectRef idx="2">
+            <a:schemeClr val="accent1"/>
+          </a:effectRef>
+          <a:fontRef idx="minor">
+            <a:schemeClr val="lt1"/>
+          </a:fontRef>
+        </p:style>
+        <p:txBody>
+          <a:bodyPr rtlCol="0" anchor="ctr"/>
+          <a:lstStyle/>
+          <a:p>
+            <a:pPr algn="ctr"/>
+          </a:p>
+        </p:txBody>
+      </p:sp>
+      <p:sp>
+        <p:nvSpPr>
+          <p:cNvPr id="25" name="Rounded Rectangle 24"/>
+          <p:cNvSpPr/>
+          <p:nvPr/>
+        </p:nvSpPr>
+        <p:spPr>
+          <a:xfrm>
+            <a:off x="841248" y="5733288"/>
+            <a:ext cx="1325880" cy="146304"/>
+          </a:xfrm>
+          <a:prstGeom prst="roundRect">
+            <a:avLst/>
+          </a:prstGeom>
+          <a:solidFill>
+            <a:srgbClr val="FFF3D6"/>
+          </a:solidFill>
+          <a:ln>
+            <a:noFill/>
+          </a:ln>
+        </p:spPr>
+        <p:style>
+          <a:lnRef idx="1">
+            <a:schemeClr val="accent1"/>
+          </a:lnRef>
+          <a:fillRef idx="3">
+            <a:schemeClr val="accent1"/>
+          </a:fillRef>
+          <a:effectRef idx="2">
+            <a:schemeClr val="accent1"/>
+          </a:effectRef>
+          <a:fontRef idx="minor">
+            <a:schemeClr val="lt1"/>
+          </a:fontRef>
+        </p:style>
+        <p:txBody>
+          <a:bodyPr rtlCol="0" anchor="ctr"/>
+          <a:lstStyle/>
+          <a:p>
+            <a:pPr algn="ctr"/>
+          </a:p>
+        </p:txBody>
+      </p:sp>
+      <p:sp>
+        <p:nvSpPr>
+          <p:cNvPr id="26" name="TextBox 25"/>
+          <p:cNvSpPr txBox="1"/>
+          <p:nvPr/>
+        </p:nvSpPr>
+        <p:spPr>
+          <a:xfrm>
+            <a:off x="896112" y="5765292"/>
+            <a:ext cx="1170432" cy="73152"/>
+          </a:xfrm>
+          <a:prstGeom prst="rect">
+            <a:avLst/>
+          </a:prstGeom>
+          <a:noFill/>
+        </p:spPr>
+        <p:txBody>
+          <a:bodyPr wrap="square" lIns="36576" rIns="36576" tIns="18288" bIns="18288" anchor="t">
+            <a:spAutoFit/>
+          </a:bodyPr>
+          <a:lstStyle/>
+          <a:p>
+            <a:pPr algn="ctr"/>
+            <a:r>
+              <a:rPr sz="600" b="1">
+                <a:solidFill>
+                  <a:srgbClr val="B7791F"/>
+                </a:solidFill>
+                <a:latin typeface="Courier New"/>
+              </a:rPr>
+              <a:t>COMPARISON RULE</a:t>
+            </a:r>
+          </a:p>
+        </p:txBody>
+      </p:sp>
+      <p:sp>
+        <p:nvSpPr>
+          <p:cNvPr id="27" name="TextBox 26"/>
+          <p:cNvSpPr txBox="1"/>
+          <p:nvPr/>
+        </p:nvSpPr>
+        <p:spPr>
+          <a:xfrm>
+            <a:off x="9985248" y="5765292"/>
+            <a:ext cx="1097280" cy="73152"/>
+          </a:xfrm>
+          <a:prstGeom prst="rect">
+            <a:avLst/>
+          </a:prstGeom>
+          <a:noFill/>
+        </p:spPr>
+        <p:txBody>
+          <a:bodyPr wrap="square" lIns="36576" rIns="36576" tIns="18288" bIns="18288" anchor="t">
+            <a:spAutoFit/>
+          </a:bodyPr>
+          <a:lstStyle/>
+          <a:p>
+            <a:pPr algn="r"/>
+            <a:r>
+              <a:rPr sz="600" b="1">
+                <a:solidFill>
+                  <a:srgbClr val="647084"/>
+                </a:solidFill>
+                <a:latin typeface="Courier New"/>
+              </a:rPr>
+              <a:t>METHOD</a:t>
+            </a:r>
+          </a:p>
+        </p:txBody>
+      </p:sp>
+      <p:sp>
+        <p:nvSpPr>
+          <p:cNvPr id="28" name="TextBox 27"/>
+          <p:cNvSpPr txBox="1"/>
+          <p:nvPr/>
+        </p:nvSpPr>
+        <p:spPr>
+          <a:xfrm>
+            <a:off x="841248" y="5925312"/>
+            <a:ext cx="10296144" cy="146304"/>
+          </a:xfrm>
+          <a:prstGeom prst="rect">
+            <a:avLst/>
+          </a:prstGeom>
+          <a:noFill/>
+        </p:spPr>
+        <p:txBody>
+          <a:bodyPr wrap="square" lIns="36576" rIns="36576" tIns="18288" bIns="18288" anchor="t">
+            <a:spAutoFit/>
+          </a:bodyPr>
+          <a:lstStyle/>
+          <a:p>
+            <a:pPr algn="l"/>
+            <a:r>
+              <a:rPr sz="700" b="0">
+                <a:solidFill>
+                  <a:srgbClr val="344256"/>
+                </a:solidFill>
+                <a:latin typeface="Arial"/>
+              </a:rPr>
+              <a:t>The taxonomy separates methods by what they change: the prompt text, the inference trajectory, or the system boundary. This prevents treating tool-augmented gains as ordinary prompt-only gains.</a:t>
+            </a:r>
+          </a:p>
+        </p:txBody>
+      </p:sp>
+      <p:sp>
+        <p:nvSpPr>
+          <p:cNvPr id="29" name="Rectangle 28"/>
+          <p:cNvSpPr/>
+          <p:nvPr/>
+        </p:nvSpPr>
+        <p:spPr>
+          <a:xfrm>
             <a:off x="658368" y="6355080"/>
             <a:ext cx="10607040" cy="9144"/>
           </a:xfrm>
@@ -16268,7 +21924,7 @@
       </p:sp>
       <p:sp>
         <p:nvSpPr>
-          <p:cNvPr id="24" name="TextBox 23"/>
+          <p:cNvPr id="30" name="TextBox 29"/>
           <p:cNvSpPr txBox="1"/>
           <p:nvPr/>
         </p:nvSpPr>
@@ -17193,6 +22849,242 @@
         </p:nvSpPr>
         <p:spPr>
           <a:xfrm>
+            <a:off x="694944" y="5650992"/>
+            <a:ext cx="10771632" cy="548640"/>
+          </a:xfrm>
+          <a:prstGeom prst="rect">
+            <a:avLst/>
+          </a:prstGeom>
+          <a:solidFill>
+            <a:srgbClr val="FFFFFF"/>
+          </a:solidFill>
+          <a:ln>
+            <a:solidFill>
+              <a:srgbClr val="CED6E3"/>
+            </a:solidFill>
+          </a:ln>
+        </p:spPr>
+        <p:style>
+          <a:lnRef idx="1">
+            <a:schemeClr val="accent1"/>
+          </a:lnRef>
+          <a:fillRef idx="3">
+            <a:schemeClr val="accent1"/>
+          </a:fillRef>
+          <a:effectRef idx="2">
+            <a:schemeClr val="accent1"/>
+          </a:effectRef>
+          <a:fontRef idx="minor">
+            <a:schemeClr val="lt1"/>
+          </a:fontRef>
+        </p:style>
+        <p:txBody>
+          <a:bodyPr rtlCol="0" anchor="ctr"/>
+          <a:lstStyle/>
+          <a:p>
+            <a:pPr algn="ctr"/>
+          </a:p>
+        </p:txBody>
+      </p:sp>
+      <p:sp>
+        <p:nvSpPr>
+          <p:cNvPr id="25" name="Rectangle 24"/>
+          <p:cNvSpPr/>
+          <p:nvPr/>
+        </p:nvSpPr>
+        <p:spPr>
+          <a:xfrm>
+            <a:off x="694944" y="5650992"/>
+            <a:ext cx="54864" cy="548640"/>
+          </a:xfrm>
+          <a:prstGeom prst="rect">
+            <a:avLst/>
+          </a:prstGeom>
+          <a:solidFill>
+            <a:srgbClr val="0F766E"/>
+          </a:solidFill>
+          <a:ln>
+            <a:noFill/>
+          </a:ln>
+        </p:spPr>
+        <p:style>
+          <a:lnRef idx="1">
+            <a:schemeClr val="accent1"/>
+          </a:lnRef>
+          <a:fillRef idx="3">
+            <a:schemeClr val="accent1"/>
+          </a:fillRef>
+          <a:effectRef idx="2">
+            <a:schemeClr val="accent1"/>
+          </a:effectRef>
+          <a:fontRef idx="minor">
+            <a:schemeClr val="lt1"/>
+          </a:fontRef>
+        </p:style>
+        <p:txBody>
+          <a:bodyPr rtlCol="0" anchor="ctr"/>
+          <a:lstStyle/>
+          <a:p>
+            <a:pPr algn="ctr"/>
+          </a:p>
+        </p:txBody>
+      </p:sp>
+      <p:sp>
+        <p:nvSpPr>
+          <p:cNvPr id="26" name="Rounded Rectangle 25"/>
+          <p:cNvSpPr/>
+          <p:nvPr/>
+        </p:nvSpPr>
+        <p:spPr>
+          <a:xfrm>
+            <a:off x="841248" y="5733288"/>
+            <a:ext cx="1325880" cy="146304"/>
+          </a:xfrm>
+          <a:prstGeom prst="roundRect">
+            <a:avLst/>
+          </a:prstGeom>
+          <a:solidFill>
+            <a:srgbClr val="E7F6F4"/>
+          </a:solidFill>
+          <a:ln>
+            <a:noFill/>
+          </a:ln>
+        </p:spPr>
+        <p:style>
+          <a:lnRef idx="1">
+            <a:schemeClr val="accent1"/>
+          </a:lnRef>
+          <a:fillRef idx="3">
+            <a:schemeClr val="accent1"/>
+          </a:fillRef>
+          <a:effectRef idx="2">
+            <a:schemeClr val="accent1"/>
+          </a:effectRef>
+          <a:fontRef idx="minor">
+            <a:schemeClr val="lt1"/>
+          </a:fontRef>
+        </p:style>
+        <p:txBody>
+          <a:bodyPr rtlCol="0" anchor="ctr"/>
+          <a:lstStyle/>
+          <a:p>
+            <a:pPr algn="ctr"/>
+          </a:p>
+        </p:txBody>
+      </p:sp>
+      <p:sp>
+        <p:nvSpPr>
+          <p:cNvPr id="27" name="TextBox 26"/>
+          <p:cNvSpPr txBox="1"/>
+          <p:nvPr/>
+        </p:nvSpPr>
+        <p:spPr>
+          <a:xfrm>
+            <a:off x="896112" y="5765292"/>
+            <a:ext cx="1170432" cy="73152"/>
+          </a:xfrm>
+          <a:prstGeom prst="rect">
+            <a:avLst/>
+          </a:prstGeom>
+          <a:noFill/>
+        </p:spPr>
+        <p:txBody>
+          <a:bodyPr wrap="square" lIns="36576" rIns="36576" tIns="18288" bIns="18288" anchor="t">
+            <a:spAutoFit/>
+          </a:bodyPr>
+          <a:lstStyle/>
+          <a:p>
+            <a:pPr algn="ctr"/>
+            <a:r>
+              <a:rPr sz="600" b="1">
+                <a:solidFill>
+                  <a:srgbClr val="0F766E"/>
+                </a:solidFill>
+                <a:latin typeface="Courier New"/>
+              </a:rPr>
+              <a:t>METHOD READ</a:t>
+            </a:r>
+          </a:p>
+        </p:txBody>
+      </p:sp>
+      <p:sp>
+        <p:nvSpPr>
+          <p:cNvPr id="28" name="TextBox 27"/>
+          <p:cNvSpPr txBox="1"/>
+          <p:nvPr/>
+        </p:nvSpPr>
+        <p:spPr>
+          <a:xfrm>
+            <a:off x="9985248" y="5765292"/>
+            <a:ext cx="1097280" cy="73152"/>
+          </a:xfrm>
+          <a:prstGeom prst="rect">
+            <a:avLst/>
+          </a:prstGeom>
+          <a:noFill/>
+        </p:spPr>
+        <p:txBody>
+          <a:bodyPr wrap="square" lIns="36576" rIns="36576" tIns="18288" bIns="18288" anchor="t">
+            <a:spAutoFit/>
+          </a:bodyPr>
+          <a:lstStyle/>
+          <a:p>
+            <a:pPr algn="r"/>
+            <a:r>
+              <a:rPr sz="600" b="1">
+                <a:solidFill>
+                  <a:srgbClr val="647084"/>
+                </a:solidFill>
+                <a:latin typeface="Courier New"/>
+              </a:rPr>
+              <a:t>BEHAVIOR</a:t>
+            </a:r>
+          </a:p>
+        </p:txBody>
+      </p:sp>
+      <p:sp>
+        <p:nvSpPr>
+          <p:cNvPr id="29" name="TextBox 28"/>
+          <p:cNvSpPr txBox="1"/>
+          <p:nvPr/>
+        </p:nvSpPr>
+        <p:spPr>
+          <a:xfrm>
+            <a:off x="841248" y="5925312"/>
+            <a:ext cx="10296144" cy="146304"/>
+          </a:xfrm>
+          <a:prstGeom prst="rect">
+            <a:avLst/>
+          </a:prstGeom>
+          <a:noFill/>
+        </p:spPr>
+        <p:txBody>
+          <a:bodyPr wrap="square" lIns="36576" rIns="36576" tIns="18288" bIns="18288" anchor="t">
+            <a:spAutoFit/>
+          </a:bodyPr>
+          <a:lstStyle/>
+          <a:p>
+            <a:pPr algn="l"/>
+            <a:r>
+              <a:rPr sz="700" b="0">
+                <a:solidFill>
+                  <a:srgbClr val="344256"/>
+                </a:solidFill>
+                <a:latin typeface="Arial"/>
+              </a:rPr>
+              <a:t>A single response, five sampled responses, staged dialogue, and action-observation loop all expose different costs. The evaluation therefore uses total generated length rather than only final answer length.</a:t>
+            </a:r>
+          </a:p>
+        </p:txBody>
+      </p:sp>
+      <p:sp>
+        <p:nvSpPr>
+          <p:cNvPr id="30" name="Rectangle 29"/>
+          <p:cNvSpPr/>
+          <p:nvPr/>
+        </p:nvSpPr>
+        <p:spPr>
+          <a:xfrm>
             <a:off x="658368" y="6355080"/>
             <a:ext cx="10607040" cy="9144"/>
           </a:xfrm>
@@ -17230,7 +23122,7 @@
       </p:sp>
       <p:sp>
         <p:nvSpPr>
-          <p:cNvPr id="25" name="TextBox 24"/>
+          <p:cNvPr id="31" name="TextBox 30"/>
           <p:cNvSpPr txBox="1"/>
           <p:nvPr/>
         </p:nvSpPr>
@@ -17997,6 +23889,242 @@
         </p:nvSpPr>
         <p:spPr>
           <a:xfrm>
+            <a:off x="694944" y="5650992"/>
+            <a:ext cx="10771632" cy="548640"/>
+          </a:xfrm>
+          <a:prstGeom prst="rect">
+            <a:avLst/>
+          </a:prstGeom>
+          <a:solidFill>
+            <a:srgbClr val="FFFFFF"/>
+          </a:solidFill>
+          <a:ln>
+            <a:solidFill>
+              <a:srgbClr val="CED6E3"/>
+            </a:solidFill>
+          </a:ln>
+        </p:spPr>
+        <p:style>
+          <a:lnRef idx="1">
+            <a:schemeClr val="accent1"/>
+          </a:lnRef>
+          <a:fillRef idx="3">
+            <a:schemeClr val="accent1"/>
+          </a:fillRef>
+          <a:effectRef idx="2">
+            <a:schemeClr val="accent1"/>
+          </a:effectRef>
+          <a:fontRef idx="minor">
+            <a:schemeClr val="lt1"/>
+          </a:fontRef>
+        </p:style>
+        <p:txBody>
+          <a:bodyPr rtlCol="0" anchor="ctr"/>
+          <a:lstStyle/>
+          <a:p>
+            <a:pPr algn="ctr"/>
+          </a:p>
+        </p:txBody>
+      </p:sp>
+      <p:sp>
+        <p:nvSpPr>
+          <p:cNvPr id="21" name="Rectangle 20"/>
+          <p:cNvSpPr/>
+          <p:nvPr/>
+        </p:nvSpPr>
+        <p:spPr>
+          <a:xfrm>
+            <a:off x="694944" y="5650992"/>
+            <a:ext cx="54864" cy="548640"/>
+          </a:xfrm>
+          <a:prstGeom prst="rect">
+            <a:avLst/>
+          </a:prstGeom>
+          <a:solidFill>
+            <a:srgbClr val="B7791F"/>
+          </a:solidFill>
+          <a:ln>
+            <a:noFill/>
+          </a:ln>
+        </p:spPr>
+        <p:style>
+          <a:lnRef idx="1">
+            <a:schemeClr val="accent1"/>
+          </a:lnRef>
+          <a:fillRef idx="3">
+            <a:schemeClr val="accent1"/>
+          </a:fillRef>
+          <a:effectRef idx="2">
+            <a:schemeClr val="accent1"/>
+          </a:effectRef>
+          <a:fontRef idx="minor">
+            <a:schemeClr val="lt1"/>
+          </a:fontRef>
+        </p:style>
+        <p:txBody>
+          <a:bodyPr rtlCol="0" anchor="ctr"/>
+          <a:lstStyle/>
+          <a:p>
+            <a:pPr algn="ctr"/>
+          </a:p>
+        </p:txBody>
+      </p:sp>
+      <p:sp>
+        <p:nvSpPr>
+          <p:cNvPr id="22" name="Rounded Rectangle 21"/>
+          <p:cNvSpPr/>
+          <p:nvPr/>
+        </p:nvSpPr>
+        <p:spPr>
+          <a:xfrm>
+            <a:off x="841248" y="5733288"/>
+            <a:ext cx="1325880" cy="146304"/>
+          </a:xfrm>
+          <a:prstGeom prst="roundRect">
+            <a:avLst/>
+          </a:prstGeom>
+          <a:solidFill>
+            <a:srgbClr val="FFF3D6"/>
+          </a:solidFill>
+          <a:ln>
+            <a:noFill/>
+          </a:ln>
+        </p:spPr>
+        <p:style>
+          <a:lnRef idx="1">
+            <a:schemeClr val="accent1"/>
+          </a:lnRef>
+          <a:fillRef idx="3">
+            <a:schemeClr val="accent1"/>
+          </a:fillRef>
+          <a:effectRef idx="2">
+            <a:schemeClr val="accent1"/>
+          </a:effectRef>
+          <a:fontRef idx="minor">
+            <a:schemeClr val="lt1"/>
+          </a:fontRef>
+        </p:style>
+        <p:txBody>
+          <a:bodyPr rtlCol="0" anchor="ctr"/>
+          <a:lstStyle/>
+          <a:p>
+            <a:pPr algn="ctr"/>
+          </a:p>
+        </p:txBody>
+      </p:sp>
+      <p:sp>
+        <p:nvSpPr>
+          <p:cNvPr id="23" name="TextBox 22"/>
+          <p:cNvSpPr txBox="1"/>
+          <p:nvPr/>
+        </p:nvSpPr>
+        <p:spPr>
+          <a:xfrm>
+            <a:off x="896112" y="5765292"/>
+            <a:ext cx="1170432" cy="73152"/>
+          </a:xfrm>
+          <a:prstGeom prst="rect">
+            <a:avLst/>
+          </a:prstGeom>
+          <a:noFill/>
+        </p:spPr>
+        <p:txBody>
+          <a:bodyPr wrap="square" lIns="36576" rIns="36576" tIns="18288" bIns="18288" anchor="t">
+            <a:spAutoFit/>
+          </a:bodyPr>
+          <a:lstStyle/>
+          <a:p>
+            <a:pPr algn="ctr"/>
+            <a:r>
+              <a:rPr sz="600" b="1">
+                <a:solidFill>
+                  <a:srgbClr val="B7791F"/>
+                </a:solidFill>
+                <a:latin typeface="Courier New"/>
+              </a:rPr>
+              <a:t>FAILURE LENS</a:t>
+            </a:r>
+          </a:p>
+        </p:txBody>
+      </p:sp>
+      <p:sp>
+        <p:nvSpPr>
+          <p:cNvPr id="24" name="TextBox 23"/>
+          <p:cNvSpPr txBox="1"/>
+          <p:nvPr/>
+        </p:nvSpPr>
+        <p:spPr>
+          <a:xfrm>
+            <a:off x="9985248" y="5765292"/>
+            <a:ext cx="1097280" cy="73152"/>
+          </a:xfrm>
+          <a:prstGeom prst="rect">
+            <a:avLst/>
+          </a:prstGeom>
+          <a:noFill/>
+        </p:spPr>
+        <p:txBody>
+          <a:bodyPr wrap="square" lIns="36576" rIns="36576" tIns="18288" bIns="18288" anchor="t">
+            <a:spAutoFit/>
+          </a:bodyPr>
+          <a:lstStyle/>
+          <a:p>
+            <a:pPr algn="r"/>
+            <a:r>
+              <a:rPr sz="600" b="1">
+                <a:solidFill>
+                  <a:srgbClr val="647084"/>
+                </a:solidFill>
+                <a:latin typeface="Courier New"/>
+              </a:rPr>
+              <a:t>PROMPT</a:t>
+            </a:r>
+          </a:p>
+        </p:txBody>
+      </p:sp>
+      <p:sp>
+        <p:nvSpPr>
+          <p:cNvPr id="25" name="TextBox 24"/>
+          <p:cNvSpPr txBox="1"/>
+          <p:nvPr/>
+        </p:nvSpPr>
+        <p:spPr>
+          <a:xfrm>
+            <a:off x="841248" y="5925312"/>
+            <a:ext cx="10296144" cy="146304"/>
+          </a:xfrm>
+          <a:prstGeom prst="rect">
+            <a:avLst/>
+          </a:prstGeom>
+          <a:noFill/>
+        </p:spPr>
+        <p:txBody>
+          <a:bodyPr wrap="square" lIns="36576" rIns="36576" tIns="18288" bIns="18288" anchor="t">
+            <a:spAutoFit/>
+          </a:bodyPr>
+          <a:lstStyle/>
+          <a:p>
+            <a:pPr algn="l"/>
+            <a:r>
+              <a:rPr sz="700" b="0">
+                <a:solidFill>
+                  <a:srgbClr val="344256"/>
+                </a:solidFill>
+                <a:latin typeface="Arial"/>
+              </a:rPr>
+              <a:t>The prompt design targets failure modes beyond final wrongness: missing early steps, excessive derivation, and unstable answer formatting. These behaviors motivate both Plan-and-Solve and the factorized metric.</a:t>
+            </a:r>
+          </a:p>
+        </p:txBody>
+      </p:sp>
+      <p:sp>
+        <p:nvSpPr>
+          <p:cNvPr id="26" name="Rectangle 25"/>
+          <p:cNvSpPr/>
+          <p:nvPr/>
+        </p:nvSpPr>
+        <p:spPr>
+          <a:xfrm>
             <a:off x="658368" y="6355080"/>
             <a:ext cx="10607040" cy="9144"/>
           </a:xfrm>
@@ -18034,7 +24162,7 @@
       </p:sp>
       <p:sp>
         <p:nvSpPr>
-          <p:cNvPr id="21" name="TextBox 20"/>
+          <p:cNvPr id="27" name="TextBox 26"/>
           <p:cNvSpPr txBox="1"/>
           <p:nvPr/>
         </p:nvSpPr>
@@ -19275,6 +25403,242 @@
         </p:nvSpPr>
         <p:spPr>
           <a:xfrm>
+            <a:off x="694944" y="5650992"/>
+            <a:ext cx="10771632" cy="548640"/>
+          </a:xfrm>
+          <a:prstGeom prst="rect">
+            <a:avLst/>
+          </a:prstGeom>
+          <a:solidFill>
+            <a:srgbClr val="FFFFFF"/>
+          </a:solidFill>
+          <a:ln>
+            <a:solidFill>
+              <a:srgbClr val="CED6E3"/>
+            </a:solidFill>
+          </a:ln>
+        </p:spPr>
+        <p:style>
+          <a:lnRef idx="1">
+            <a:schemeClr val="accent1"/>
+          </a:lnRef>
+          <a:fillRef idx="3">
+            <a:schemeClr val="accent1"/>
+          </a:fillRef>
+          <a:effectRef idx="2">
+            <a:schemeClr val="accent1"/>
+          </a:effectRef>
+          <a:fontRef idx="minor">
+            <a:schemeClr val="lt1"/>
+          </a:fontRef>
+        </p:style>
+        <p:txBody>
+          <a:bodyPr rtlCol="0" anchor="ctr"/>
+          <a:lstStyle/>
+          <a:p>
+            <a:pPr algn="ctr"/>
+          </a:p>
+        </p:txBody>
+      </p:sp>
+      <p:sp>
+        <p:nvSpPr>
+          <p:cNvPr id="33" name="Rectangle 32"/>
+          <p:cNvSpPr/>
+          <p:nvPr/>
+        </p:nvSpPr>
+        <p:spPr>
+          <a:xfrm>
+            <a:off x="694944" y="5650992"/>
+            <a:ext cx="54864" cy="548640"/>
+          </a:xfrm>
+          <a:prstGeom prst="rect">
+            <a:avLst/>
+          </a:prstGeom>
+          <a:solidFill>
+            <a:srgbClr val="0F766E"/>
+          </a:solidFill>
+          <a:ln>
+            <a:noFill/>
+          </a:ln>
+        </p:spPr>
+        <p:style>
+          <a:lnRef idx="1">
+            <a:schemeClr val="accent1"/>
+          </a:lnRef>
+          <a:fillRef idx="3">
+            <a:schemeClr val="accent1"/>
+          </a:fillRef>
+          <a:effectRef idx="2">
+            <a:schemeClr val="accent1"/>
+          </a:effectRef>
+          <a:fontRef idx="minor">
+            <a:schemeClr val="lt1"/>
+          </a:fontRef>
+        </p:style>
+        <p:txBody>
+          <a:bodyPr rtlCol="0" anchor="ctr"/>
+          <a:lstStyle/>
+          <a:p>
+            <a:pPr algn="ctr"/>
+          </a:p>
+        </p:txBody>
+      </p:sp>
+      <p:sp>
+        <p:nvSpPr>
+          <p:cNvPr id="34" name="Rounded Rectangle 33"/>
+          <p:cNvSpPr/>
+          <p:nvPr/>
+        </p:nvSpPr>
+        <p:spPr>
+          <a:xfrm>
+            <a:off x="841248" y="5733288"/>
+            <a:ext cx="1325880" cy="146304"/>
+          </a:xfrm>
+          <a:prstGeom prst="roundRect">
+            <a:avLst/>
+          </a:prstGeom>
+          <a:solidFill>
+            <a:srgbClr val="E7F6F4"/>
+          </a:solidFill>
+          <a:ln>
+            <a:noFill/>
+          </a:ln>
+        </p:spPr>
+        <p:style>
+          <a:lnRef idx="1">
+            <a:schemeClr val="accent1"/>
+          </a:lnRef>
+          <a:fillRef idx="3">
+            <a:schemeClr val="accent1"/>
+          </a:fillRef>
+          <a:effectRef idx="2">
+            <a:schemeClr val="accent1"/>
+          </a:effectRef>
+          <a:fontRef idx="minor">
+            <a:schemeClr val="lt1"/>
+          </a:fontRef>
+        </p:style>
+        <p:txBody>
+          <a:bodyPr rtlCol="0" anchor="ctr"/>
+          <a:lstStyle/>
+          <a:p>
+            <a:pPr algn="ctr"/>
+          </a:p>
+        </p:txBody>
+      </p:sp>
+      <p:sp>
+        <p:nvSpPr>
+          <p:cNvPr id="35" name="TextBox 34"/>
+          <p:cNvSpPr txBox="1"/>
+          <p:nvPr/>
+        </p:nvSpPr>
+        <p:spPr>
+          <a:xfrm>
+            <a:off x="896112" y="5765292"/>
+            <a:ext cx="1170432" cy="73152"/>
+          </a:xfrm>
+          <a:prstGeom prst="rect">
+            <a:avLst/>
+          </a:prstGeom>
+          <a:noFill/>
+        </p:spPr>
+        <p:txBody>
+          <a:bodyPr wrap="square" lIns="36576" rIns="36576" tIns="18288" bIns="18288" anchor="t">
+            <a:spAutoFit/>
+          </a:bodyPr>
+          <a:lstStyle/>
+          <a:p>
+            <a:pPr algn="ctr"/>
+            <a:r>
+              <a:rPr sz="600" b="1">
+                <a:solidFill>
+                  <a:srgbClr val="0F766E"/>
+                </a:solidFill>
+                <a:latin typeface="Courier New"/>
+              </a:rPr>
+              <a:t>METHOD READ</a:t>
+            </a:r>
+          </a:p>
+        </p:txBody>
+      </p:sp>
+      <p:sp>
+        <p:nvSpPr>
+          <p:cNvPr id="36" name="TextBox 35"/>
+          <p:cNvSpPr txBox="1"/>
+          <p:nvPr/>
+        </p:nvSpPr>
+        <p:spPr>
+          <a:xfrm>
+            <a:off x="9985248" y="5765292"/>
+            <a:ext cx="1097280" cy="73152"/>
+          </a:xfrm>
+          <a:prstGeom prst="rect">
+            <a:avLst/>
+          </a:prstGeom>
+          <a:noFill/>
+        </p:spPr>
+        <p:txBody>
+          <a:bodyPr wrap="square" lIns="36576" rIns="36576" tIns="18288" bIns="18288" anchor="t">
+            <a:spAutoFit/>
+          </a:bodyPr>
+          <a:lstStyle/>
+          <a:p>
+            <a:pPr algn="r"/>
+            <a:r>
+              <a:rPr sz="600" b="1">
+                <a:solidFill>
+                  <a:srgbClr val="647084"/>
+                </a:solidFill>
+                <a:latin typeface="Courier New"/>
+              </a:rPr>
+              <a:t>BEHAVIOR</a:t>
+            </a:r>
+          </a:p>
+        </p:txBody>
+      </p:sp>
+      <p:sp>
+        <p:nvSpPr>
+          <p:cNvPr id="37" name="TextBox 36"/>
+          <p:cNvSpPr txBox="1"/>
+          <p:nvPr/>
+        </p:nvSpPr>
+        <p:spPr>
+          <a:xfrm>
+            <a:off x="841248" y="5925312"/>
+            <a:ext cx="10296144" cy="146304"/>
+          </a:xfrm>
+          <a:prstGeom prst="rect">
+            <a:avLst/>
+          </a:prstGeom>
+          <a:noFill/>
+        </p:spPr>
+        <p:txBody>
+          <a:bodyPr wrap="square" lIns="36576" rIns="36576" tIns="18288" bIns="18288" anchor="t">
+            <a:spAutoFit/>
+          </a:bodyPr>
+          <a:lstStyle/>
+          <a:p>
+            <a:pPr algn="l"/>
+            <a:r>
+              <a:rPr sz="700" b="0">
+                <a:solidFill>
+                  <a:srgbClr val="344256"/>
+                </a:solidFill>
+                <a:latin typeface="Arial"/>
+              </a:rPr>
+              <a:t>The six methods represent distinct mechanisms: instruction, demonstration, self-critique, sampling, pre-solution planning, and external computation. This makes method interpretation more important than just ranking.</a:t>
+            </a:r>
+          </a:p>
+        </p:txBody>
+      </p:sp>
+      <p:sp>
+        <p:nvSpPr>
+          <p:cNvPr id="38" name="Rectangle 37"/>
+          <p:cNvSpPr/>
+          <p:nvPr/>
+        </p:nvSpPr>
+        <p:spPr>
+          <a:xfrm>
             <a:off x="658368" y="6355080"/>
             <a:ext cx="10607040" cy="9144"/>
           </a:xfrm>
@@ -19312,7 +25676,7 @@
       </p:sp>
       <p:sp>
         <p:nvSpPr>
-          <p:cNvPr id="33" name="TextBox 32"/>
+          <p:cNvPr id="39" name="TextBox 38"/>
           <p:cNvSpPr txBox="1"/>
           <p:nvPr/>
         </p:nvSpPr>
@@ -20184,6 +26548,242 @@
         </p:nvSpPr>
         <p:spPr>
           <a:xfrm>
+            <a:off x="694944" y="5650992"/>
+            <a:ext cx="10771632" cy="548640"/>
+          </a:xfrm>
+          <a:prstGeom prst="rect">
+            <a:avLst/>
+          </a:prstGeom>
+          <a:solidFill>
+            <a:srgbClr val="FFFFFF"/>
+          </a:solidFill>
+          <a:ln>
+            <a:solidFill>
+              <a:srgbClr val="CED6E3"/>
+            </a:solidFill>
+          </a:ln>
+        </p:spPr>
+        <p:style>
+          <a:lnRef idx="1">
+            <a:schemeClr val="accent1"/>
+          </a:lnRef>
+          <a:fillRef idx="3">
+            <a:schemeClr val="accent1"/>
+          </a:fillRef>
+          <a:effectRef idx="2">
+            <a:schemeClr val="accent1"/>
+          </a:effectRef>
+          <a:fontRef idx="minor">
+            <a:schemeClr val="lt1"/>
+          </a:fontRef>
+        </p:style>
+        <p:txBody>
+          <a:bodyPr rtlCol="0" anchor="ctr"/>
+          <a:lstStyle/>
+          <a:p>
+            <a:pPr algn="ctr"/>
+          </a:p>
+        </p:txBody>
+      </p:sp>
+      <p:sp>
+        <p:nvSpPr>
+          <p:cNvPr id="24" name="Rectangle 23"/>
+          <p:cNvSpPr/>
+          <p:nvPr/>
+        </p:nvSpPr>
+        <p:spPr>
+          <a:xfrm>
+            <a:off x="694944" y="5650992"/>
+            <a:ext cx="54864" cy="548640"/>
+          </a:xfrm>
+          <a:prstGeom prst="rect">
+            <a:avLst/>
+          </a:prstGeom>
+          <a:solidFill>
+            <a:srgbClr val="1E5B9E"/>
+          </a:solidFill>
+          <a:ln>
+            <a:noFill/>
+          </a:ln>
+        </p:spPr>
+        <p:style>
+          <a:lnRef idx="1">
+            <a:schemeClr val="accent1"/>
+          </a:lnRef>
+          <a:fillRef idx="3">
+            <a:schemeClr val="accent1"/>
+          </a:fillRef>
+          <a:effectRef idx="2">
+            <a:schemeClr val="accent1"/>
+          </a:effectRef>
+          <a:fontRef idx="minor">
+            <a:schemeClr val="lt1"/>
+          </a:fontRef>
+        </p:style>
+        <p:txBody>
+          <a:bodyPr rtlCol="0" anchor="ctr"/>
+          <a:lstStyle/>
+          <a:p>
+            <a:pPr algn="ctr"/>
+          </a:p>
+        </p:txBody>
+      </p:sp>
+      <p:sp>
+        <p:nvSpPr>
+          <p:cNvPr id="25" name="Rounded Rectangle 24"/>
+          <p:cNvSpPr/>
+          <p:nvPr/>
+        </p:nvSpPr>
+        <p:spPr>
+          <a:xfrm>
+            <a:off x="841248" y="5733288"/>
+            <a:ext cx="1325880" cy="146304"/>
+          </a:xfrm>
+          <a:prstGeom prst="roundRect">
+            <a:avLst/>
+          </a:prstGeom>
+          <a:solidFill>
+            <a:srgbClr val="EAF2FF"/>
+          </a:solidFill>
+          <a:ln>
+            <a:noFill/>
+          </a:ln>
+        </p:spPr>
+        <p:style>
+          <a:lnRef idx="1">
+            <a:schemeClr val="accent1"/>
+          </a:lnRef>
+          <a:fillRef idx="3">
+            <a:schemeClr val="accent1"/>
+          </a:fillRef>
+          <a:effectRef idx="2">
+            <a:schemeClr val="accent1"/>
+          </a:effectRef>
+          <a:fontRef idx="minor">
+            <a:schemeClr val="lt1"/>
+          </a:fontRef>
+        </p:style>
+        <p:txBody>
+          <a:bodyPr rtlCol="0" anchor="ctr"/>
+          <a:lstStyle/>
+          <a:p>
+            <a:pPr algn="ctr"/>
+          </a:p>
+        </p:txBody>
+      </p:sp>
+      <p:sp>
+        <p:nvSpPr>
+          <p:cNvPr id="26" name="TextBox 25"/>
+          <p:cNvSpPr txBox="1"/>
+          <p:nvPr/>
+        </p:nvSpPr>
+        <p:spPr>
+          <a:xfrm>
+            <a:off x="896112" y="5765292"/>
+            <a:ext cx="1170432" cy="73152"/>
+          </a:xfrm>
+          <a:prstGeom prst="rect">
+            <a:avLst/>
+          </a:prstGeom>
+          <a:noFill/>
+        </p:spPr>
+        <p:txBody>
+          <a:bodyPr wrap="square" lIns="36576" rIns="36576" tIns="18288" bIns="18288" anchor="t">
+            <a:spAutoFit/>
+          </a:bodyPr>
+          <a:lstStyle/>
+          <a:p>
+            <a:pPr algn="ctr"/>
+            <a:r>
+              <a:rPr sz="600" b="1">
+                <a:solidFill>
+                  <a:srgbClr val="1E5B9E"/>
+                </a:solidFill>
+                <a:latin typeface="Courier New"/>
+              </a:rPr>
+              <a:t>DESIGN LENS</a:t>
+            </a:r>
+          </a:p>
+        </p:txBody>
+      </p:sp>
+      <p:sp>
+        <p:nvSpPr>
+          <p:cNvPr id="27" name="TextBox 26"/>
+          <p:cNvSpPr txBox="1"/>
+          <p:nvPr/>
+        </p:nvSpPr>
+        <p:spPr>
+          <a:xfrm>
+            <a:off x="9985248" y="5765292"/>
+            <a:ext cx="1097280" cy="73152"/>
+          </a:xfrm>
+          <a:prstGeom prst="rect">
+            <a:avLst/>
+          </a:prstGeom>
+          <a:noFill/>
+        </p:spPr>
+        <p:txBody>
+          <a:bodyPr wrap="square" lIns="36576" rIns="36576" tIns="18288" bIns="18288" anchor="t">
+            <a:spAutoFit/>
+          </a:bodyPr>
+          <a:lstStyle/>
+          <a:p>
+            <a:pPr algn="r"/>
+            <a:r>
+              <a:rPr sz="600" b="1">
+                <a:solidFill>
+                  <a:srgbClr val="647084"/>
+                </a:solidFill>
+                <a:latin typeface="Courier New"/>
+              </a:rPr>
+              <a:t>PIPELINE</a:t>
+            </a:r>
+          </a:p>
+        </p:txBody>
+      </p:sp>
+      <p:sp>
+        <p:nvSpPr>
+          <p:cNvPr id="28" name="TextBox 27"/>
+          <p:cNvSpPr txBox="1"/>
+          <p:nvPr/>
+        </p:nvSpPr>
+        <p:spPr>
+          <a:xfrm>
+            <a:off x="841248" y="5925312"/>
+            <a:ext cx="10296144" cy="146304"/>
+          </a:xfrm>
+          <a:prstGeom prst="rect">
+            <a:avLst/>
+          </a:prstGeom>
+          <a:noFill/>
+        </p:spPr>
+        <p:txBody>
+          <a:bodyPr wrap="square" lIns="36576" rIns="36576" tIns="18288" bIns="18288" anchor="t">
+            <a:spAutoFit/>
+          </a:bodyPr>
+          <a:lstStyle/>
+          <a:p>
+            <a:pPr algn="l"/>
+            <a:r>
+              <a:rPr sz="700" b="0">
+                <a:solidFill>
+                  <a:srgbClr val="344256"/>
+                </a:solidFill>
+                <a:latin typeface="Arial"/>
+              </a:rPr>
+              <a:t>Plan-and-Solve is the main prompt-only innovation because it encourages problem decomposition before arithmetic execution. It is easy to compare fairly against CoT and refinement baselines.</a:t>
+            </a:r>
+          </a:p>
+        </p:txBody>
+      </p:sp>
+      <p:sp>
+        <p:nvSpPr>
+          <p:cNvPr id="29" name="Rectangle 28"/>
+          <p:cNvSpPr/>
+          <p:nvPr/>
+        </p:nvSpPr>
+        <p:spPr>
+          <a:xfrm>
             <a:off x="658368" y="6355080"/>
             <a:ext cx="10607040" cy="9144"/>
           </a:xfrm>
@@ -20221,7 +26821,7 @@
       </p:sp>
       <p:sp>
         <p:nvSpPr>
-          <p:cNvPr id="24" name="TextBox 23"/>
+          <p:cNvPr id="30" name="TextBox 29"/>
           <p:cNvSpPr txBox="1"/>
           <p:nvPr/>
         </p:nvSpPr>
